--- a/Claude-Microsoft365-Webinar-Deck.pptx
+++ b/Claude-Microsoft365-Webinar-Deck.pptx
@@ -4,6 +4,9 @@
   <p:sldMasterIdLst>
     <p:sldMasterId id="2147483648" r:id="rId1"/>
   </p:sldMasterIdLst>
+  <p:notesMasterIdLst>
+    <p:notesMasterId r:id="rId25"/>
+  </p:notesMasterIdLst>
   <p:sldIdLst>
     <p:sldId id="256" r:id="rId2"/>
     <p:sldId id="257" r:id="rId3"/>
@@ -29,9 +32,6 @@
     <p:sldId id="277" r:id="rId23"/>
     <p:sldId id="278" r:id="rId24"/>
   </p:sldIdLst>
-  <p:notesMasterIdLst>
-    <p:notesMasterId r:id="rId25"/>
-  </p:notesMasterIdLst>
   <p:sldSz cx="12192000" cy="6858000"/>
   <p:notesSz cx="6858000" cy="12192000"/>
   <p:defaultTextStyle>
@@ -126,6 +126,11 @@
       </a:defRPr>
     </a:lvl9pPr>
   </p:defaultTextStyle>
+  <p:extLst>
+    <p:ext uri="{EFAFB233-063F-42B5-8137-9DF3F51BA10A}">
+      <p15:sldGuideLst xmlns:p15="http://schemas.microsoft.com/office/powerpoint/2012/main"/>
+    </p:ext>
+  </p:extLst>
 </p:presentation>
 </file>
 
@@ -151,234 +156,10 @@
           <a:chExt cx="0" cy="0"/>
         </a:xfrm>
       </p:grpSpPr>
-      <p:sp>
-        <p:nvSpPr>
-          <p:cNvPr id="2" name="Header Placeholder 1"/>
-          <p:cNvSpPr>
-            <a:spLocks noGrp="1"/>
-          </p:cNvSpPr>
-          <p:nvPr>
-            <p:ph type="hdr" sz="quarter"/>
-          </p:nvPr>
-        </p:nvSpPr>
-        <p:spPr>
-          <a:xfrm>
-            <a:off x="0" y="0"/>
-            <a:ext cx="2971800" cy="458788"/>
-          </a:xfrm>
-          <a:prstGeom prst="rect">
-            <a:avLst/>
-          </a:prstGeom>
-        </p:spPr>
-        <p:txBody>
-          <a:bodyPr vert="horz" lIns="91440" tIns="45720" rIns="91440" bIns="45720" rtlCol="0"/>
-          <a:lstStyle>
-            <a:lvl1pPr algn="l">
-              <a:defRPr sz="1200"/>
-            </a:lvl1pPr>
-          </a:lstStyle>
-          <a:p>
-            <a:endParaRPr lang="en-US"/>
-          </a:p>
-        </p:txBody>
-      </p:sp>
-      <p:sp>
-        <p:nvSpPr>
-          <p:cNvPr id="3" name="Date Placeholder 2"/>
-          <p:cNvSpPr>
-            <a:spLocks noGrp="1"/>
-          </p:cNvSpPr>
-          <p:nvPr>
-            <p:ph type="dt" idx="1"/>
-          </p:nvPr>
-        </p:nvSpPr>
-        <p:spPr>
-          <a:xfrm>
-            <a:off x="3884613" y="0"/>
-            <a:ext cx="2971800" cy="458788"/>
-          </a:xfrm>
-          <a:prstGeom prst="rect">
-            <a:avLst/>
-          </a:prstGeom>
-        </p:spPr>
-        <p:txBody>
-          <a:bodyPr vert="horz" lIns="91440" tIns="45720" rIns="91440" bIns="45720" rtlCol="0"/>
-          <a:lstStyle>
-            <a:lvl1pPr algn="r">
-              <a:defRPr sz="1200"/>
-            </a:lvl1pPr>
-          </a:lstStyle>
-          <a:p>
-            <a:fld id="{5282F153-3F37-0F45-9E97-73ACFA13230C}" type="datetimeFigureOut">
-              <a:rPr lang="en-US"/>
-              <a:t>7/23/19</a:t>
-            </a:fld>
-            <a:endParaRPr lang="en-US"/>
-          </a:p>
-        </p:txBody>
-      </p:sp>
-      <p:sp>
-        <p:nvSpPr>
-          <p:cNvPr id="4" name="Slide Image Placeholder 3"/>
-          <p:cNvSpPr>
-            <a:spLocks noGrp="1" noRot="1" noChangeAspect="1"/>
-          </p:cNvSpPr>
-          <p:nvPr>
-            <p:ph type="sldImg" idx="2"/>
-          </p:nvPr>
-        </p:nvSpPr>
-        <p:spPr>
-          <a:xfrm>
-            <a:off x="685800" y="1143000"/>
-            <a:ext cx="5486400" cy="3086100"/>
-          </a:xfrm>
-          <a:prstGeom prst="rect">
-            <a:avLst/>
-          </a:prstGeom>
-          <a:noFill/>
-          <a:ln w="12700">
-            <a:solidFill>
-              <a:prstClr val="black"/>
-            </a:solidFill>
-          </a:ln>
-        </p:spPr>
-        <p:txBody>
-          <a:bodyPr vert="horz" lIns="91440" tIns="45720" rIns="91440" bIns="45720" rtlCol="0" anchor="ctr"/>
-          <a:lstStyle/>
-          <a:p>
-            <a:endParaRPr lang="en-US"/>
-          </a:p>
-        </p:txBody>
-      </p:sp>
-      <p:sp>
-        <p:nvSpPr>
-          <p:cNvPr id="5" name="Notes Placeholder 4"/>
-          <p:cNvSpPr>
-            <a:spLocks noGrp="1"/>
-          </p:cNvSpPr>
-          <p:nvPr>
-            <p:ph type="body" sz="quarter" idx="3"/>
-          </p:nvPr>
-        </p:nvSpPr>
-        <p:spPr>
-          <a:xfrm>
-            <a:off x="685800" y="4400550"/>
-            <a:ext cx="5486400" cy="3600450"/>
-          </a:xfrm>
-          <a:prstGeom prst="rect">
-            <a:avLst/>
-          </a:prstGeom>
-        </p:spPr>
-        <p:txBody>
-          <a:bodyPr vert="horz" lIns="91440" tIns="45720" rIns="91440" bIns="45720" rtlCol="0"/>
-          <a:lstStyle/>
-          <a:p>
-            <a:pPr lvl="0"/>
-            <a:r>
-              <a:rPr lang="en-US"/>
-              <a:t>Click to edit Master text styles</a:t>
-            </a:r>
-          </a:p>
-          <a:p>
-            <a:pPr lvl="1"/>
-            <a:r>
-              <a:rPr lang="en-US"/>
-              <a:t>Second level</a:t>
-            </a:r>
-          </a:p>
-          <a:p>
-            <a:pPr lvl="2"/>
-            <a:r>
-              <a:rPr lang="en-US"/>
-              <a:t>Third level</a:t>
-            </a:r>
-          </a:p>
-          <a:p>
-            <a:pPr lvl="3"/>
-            <a:r>
-              <a:rPr lang="en-US"/>
-              <a:t>Fourth level</a:t>
-            </a:r>
-          </a:p>
-          <a:p>
-            <a:pPr lvl="4"/>
-            <a:r>
-              <a:rPr lang="en-US"/>
-              <a:t>Fifth level</a:t>
-            </a:r>
-          </a:p>
-        </p:txBody>
-      </p:sp>
-      <p:sp>
-        <p:nvSpPr>
-          <p:cNvPr id="6" name="Footer Placeholder 5"/>
-          <p:cNvSpPr>
-            <a:spLocks noGrp="1"/>
-          </p:cNvSpPr>
-          <p:nvPr>
-            <p:ph type="ftr" sz="quarter" idx="4"/>
-          </p:nvPr>
-        </p:nvSpPr>
-        <p:spPr>
-          <a:xfrm>
-            <a:off x="0" y="8685213"/>
-            <a:ext cx="2971800" cy="458787"/>
-          </a:xfrm>
-          <a:prstGeom prst="rect">
-            <a:avLst/>
-          </a:prstGeom>
-        </p:spPr>
-        <p:txBody>
-          <a:bodyPr vert="horz" lIns="91440" tIns="45720" rIns="91440" bIns="45720" rtlCol="0" anchor="b"/>
-          <a:lstStyle>
-            <a:lvl1pPr algn="l">
-              <a:defRPr sz="1200"/>
-            </a:lvl1pPr>
-          </a:lstStyle>
-          <a:p>
-            <a:endParaRPr lang="en-US"/>
-          </a:p>
-        </p:txBody>
-      </p:sp>
-      <p:sp>
-        <p:nvSpPr>
-          <p:cNvPr id="7" name="Slide Number Placeholder 6"/>
-          <p:cNvSpPr>
-            <a:spLocks noGrp="1"/>
-          </p:cNvSpPr>
-          <p:nvPr>
-            <p:ph type="sldNum" sz="quarter" idx="5"/>
-          </p:nvPr>
-        </p:nvSpPr>
-        <p:spPr>
-          <a:xfrm>
-            <a:off x="3884613" y="8685213"/>
-            <a:ext cx="2971800" cy="458787"/>
-          </a:xfrm>
-          <a:prstGeom prst="rect">
-            <a:avLst/>
-          </a:prstGeom>
-        </p:spPr>
-        <p:txBody>
-          <a:bodyPr vert="horz" lIns="91440" tIns="45720" rIns="91440" bIns="45720" rtlCol="0" anchor="b"/>
-          <a:lstStyle>
-            <a:lvl1pPr algn="r">
-              <a:defRPr sz="1200"/>
-            </a:lvl1pPr>
-          </a:lstStyle>
-          <a:p>
-            <a:fld id="{CE5E9CC1-C706-0F49-92D6-E571CC5EEA8F}" type="slidenum">
-              <a:rPr lang="en-US"/>
-              <a:t>‹#›</a:t>
-            </a:fld>
-            <a:endParaRPr lang="en-US"/>
-          </a:p>
-        </p:txBody>
-      </p:sp>
     </p:spTree>
     <p:extLst>
       <p:ext uri="{BB962C8B-B14F-4D97-AF65-F5344CB8AC3E}">
-        <p14:creationId xmlns:p14="http://schemas.microsoft.com/office/powerpoint/2010/main" val="1024086991"/>
+        <p14:creationId xmlns:p14="http://schemas.microsoft.com/office/powerpoint/2010/main" val="634196834"/>
       </p:ext>
     </p:extLst>
   </p:cSld>
@@ -529,7 +310,6 @@
 Tell them what they'll walk out with: specific prompts, repeatable workflows, and real examples they can use at their desk tomorrow morning.
 Housekeeping: tell them whether you'll take questions throughout or at the end, mention the handouts (cheat sheet, exercises, licensing guide, follow-up email), and that a recording will follow if applicable. Keep this slide up ~60 seconds.</a:t>
             </a:r>
-            <a:endParaRPr lang="en-US" dirty="0"/>
           </a:p>
         </p:txBody>
       </p:sp>
@@ -617,7 +397,6 @@
               <a:rPr lang="en-US" dirty="0"/>
               <a:t>Transition to Word. The theme here is "shape, don't just shorten." Word is where unstructured mess becomes a presentable artifact: meeting notes into a one-pager, and long documents into key points. Brief signpost, keep it short.</a:t>
             </a:r>
-            <a:endParaRPr lang="en-US" dirty="0"/>
           </a:p>
         </p:txBody>
       </p:sp>
@@ -707,7 +486,6 @@
 Two phrases in the prompt are doing real work and you should call them out: "with owners" forces it to assign action items to people, and "don't invent anything / list unclear things under Open questions" is your guardrail against the model filling gaps with plausible fiction. That instruction matters any time accuracy counts.
 Then the practical bit: the result pastes straight into Word and keeps its heading/bullet structure. Mention you can follow up with "make it more formal" or "add a one-line summary at the top" before pasting. Same loop, new app. ~2 minutes.</a:t>
             </a:r>
-            <a:endParaRPr lang="en-US" dirty="0"/>
           </a:p>
         </p:txBody>
       </p:sp>
@@ -797,7 +575,6 @@
 The three tips on the right are the leverage. (1) Always set a length or you'll get more than you want. (2) Aim it at an audience, "summarize this for my CEO" vs "for a new hire" produces genuinely different, better-targeted summaries. (3) The honesty trick: ask it to QUOTE the exact sentence rather than paraphrase when accuracy matters. That lets you verify against the source and is your defense against the model smoothing over or inventing detail.
 Tie back to the file-size/plan point: very long documents may need a paid plan, note it's in the licensing guide. ~2 minutes.</a:t>
             </a:r>
-            <a:endParaRPr lang="en-US" dirty="0"/>
           </a:p>
         </p:txBody>
       </p:sp>
@@ -885,7 +662,6 @@
               <a:rPr lang="en-US" dirty="0"/>
               <a:t>Transition to PowerPoint. Set expectation: Claude won't design the slides for you in this copy-paste workflow, but it will do the hard part, the thinking and the structure. You get a slide-by-slide outline plus speaker notes that you drop into PowerPoint's outline view. Quick signpost.</a:t>
             </a:r>
-            <a:endParaRPr lang="en-US" dirty="0"/>
           </a:p>
         </p:txBody>
       </p:sp>
@@ -976,7 +752,6 @@
 Pro tip to share: PowerPoint's Outline View (View &gt; Outline) lets you paste a titles-and-bullets structure and it becomes real slides instantly. So the path is: Claude writes the outline, you paste into Outline View, you apply your template. Also mention they can ask "suggest a chart for slide 4" or "what image would fit here."
 Meta moment, if you want a laugh: the speaker notes under THIS deck were drafted exactly this way. ~2 minutes.</a:t>
             </a:r>
-            <a:endParaRPr lang="en-US" dirty="0"/>
           </a:p>
         </p:txBody>
       </p:sp>
@@ -1064,7 +839,6 @@
               <a:rPr lang="en-US" dirty="0"/>
               <a:t>Transition to Excel, often the most anxiety-inducing app for this audience, so frame it as relief. You no longer have to remember exact function syntax or nest IFs in your head. You describe the result; Claude writes the formula and explains it. Three moves coming: write a formula, fix a broken one, explain an inherited one. Quick signpost.</a:t>
             </a:r>
-            <a:endParaRPr lang="en-US" dirty="0"/>
           </a:p>
         </p:txBody>
       </p:sp>
@@ -1154,7 +928,6 @@
 Three habits make it reliable, shown on the right: describe the goal not the syntax; tell it your column layout so the formula references the right cells; and always ask it to explain the formula. The explain step does double duty, you learn, and you can catch a logic mismatch before trusting the number.
 Honest caveat to say aloud: Claude can't see your live spreadsheet in this copy-paste workflow, so it's working from your description. If your description is off, the formula will be too, paste the formula in, check the result against a row you can verify by hand. ~2 minutes.</a:t>
             </a:r>
-            <a:endParaRPr lang="en-US" dirty="0"/>
           </a:p>
         </p:txBody>
       </p:sp>
@@ -1245,7 +1018,6 @@
 Right, explain-it: this is the one that gets the biggest reaction. Everyone has inherited a workbook full of nested formulas they're terrified to touch. Paste the scary formula and ask for a step-by-step explanation "like I'm new to Excel." Now you understand it before you change it, that's confidence, not just convenience.
 Close the Excel section by reinforcing the verify habit: paste the fix back, confirm the result on a row you can check. ~2 minutes.</a:t>
             </a:r>
-            <a:endParaRPr lang="en-US" dirty="0"/>
           </a:p>
         </p:txBody>
       </p:sp>
@@ -1335,7 +1107,6 @@
 Three low-tech ways, no special tools: a prompt notebook (just a Word doc of your 5–10 favorites), fill-in-the-blank templates, and the discipline of saving the exact wording when something works great. Most people regenerate the same prompt from scratch every week, saving it is the whole productivity gain.
 The template at the bottom is on the cheat sheet they're taking home. Read it once: role, deliverable, audience, format, plus the "keep my facts" guardrail. Tell them to copy that into their notebook today. (If their org has Claude Team/Enterprise, mention Projects/custom instructions as a fancier version of the same idea.) ~90 seconds.</a:t>
             </a:r>
-            <a:endParaRPr lang="en-US" dirty="0"/>
           </a:p>
         </p:txBody>
       </p:sp>
@@ -1425,7 +1196,6 @@
 The real coaching point is the line at the bottom: don't try to use it for everything at once or you'll use it for nothing. Pick the ONE task you most dread, the weekly status email, the meeting recap, whatever, and hand only that to Claude every day for a week until it's a reflex. Then add a second. Habit-stacking beats enthusiasm.
 Invite them to write down their one task right now. That single commitment is what makes the hour pay off. ~75 seconds.</a:t>
             </a:r>
-            <a:endParaRPr lang="en-US" dirty="0"/>
           </a:p>
         </p:txBody>
       </p:sp>
@@ -1516,7 +1286,6 @@
 Set the rhythm expectation: each app demo follows the same loop, so once you see one you can predict the rest. Promise them the handouts cover everything here so they can just watch, not scramble to take notes.
 Keep to ~45 seconds.</a:t>
             </a:r>
-            <a:endParaRPr lang="en-US" dirty="0"/>
           </a:p>
         </p:txBody>
       </p:sp>
@@ -1608,7 +1377,6 @@
 The two rules at the bottom are the takeaway: (1) check YOUR company's AI policy first, policies vary and yours wins over anything I say; (2) when in doubt, anonymize or omit, and always read the output before you act on it.
 Mention the licensing guide covers the data/privacy details, e.g. that consumer plans have a setting controlling whether chats can be used to improve the models, and that business/enterprise plans are handled differently. Give exact current specifics from the guide rather than from memory. ~2 minutes.</a:t>
             </a:r>
-            <a:endParaRPr lang="en-US" dirty="0"/>
           </a:p>
         </p:txBody>
       </p:sp>
@@ -1700,7 +1468,6 @@
 Right card, Cowork: this is the part people get excited about. It's an agentic assistant in the Claude desktop app that works across your real files. You describe an outcome, step away, and come back to finished work, organized files, drafted docs, synthesized research. It can run multi-step jobs, use your connected tools, and even run on a schedule. It's on the paid plans (Pro, Max, Team, Enterprise).
 If you have a paid plan yourself, this is a great spot to show a 30-second live taste of the in-app panel or Cowork. If not, describe it and point to the licensing guide, which has links. Land on the bottom line: upgrades, not prerequisites. ~2 to 3 minutes.</a:t>
             </a:r>
-            <a:endParaRPr lang="en-US" dirty="0"/>
           </a:p>
         </p:txBody>
       </p:sp>
@@ -1790,7 +1557,6 @@
 Then the one-line takeaway in the dark bar, repeat the loop out loud and have them say it back if the room's game: Copy, Ask, Review, Paste back. Same four steps, every app, on the work they already do.
 Remind them all the handouts reinforce this: cheat sheet, exercises, licensing guide, and a follow-up email. Transition to Q&amp;A on the next slide. ~60 seconds.</a:t>
             </a:r>
-            <a:endParaRPr lang="en-US" dirty="0"/>
           </a:p>
         </p:txBody>
       </p:sp>
@@ -1881,7 +1647,6 @@
 Common questions to be ready for: Is it free? (Yes, the Free plan covers today.) Is my data safe? (Point to the licensing guide; consumer plans have a training setting, business plans differ; follow your company policy.) Does it work in my actual Excel? (Copy-paste today; the in-app add-in and Cowork if you're on a paid plan.) How is this different from Copilot? (Complementary; no license needed; you can start now.)
 Close warmly and end on the call to action: go hand something off.</a:t>
             </a:r>
-            <a:endParaRPr lang="en-US" dirty="0"/>
           </a:p>
         </p:txBody>
       </p:sp>
@@ -1971,7 +1736,6 @@
 Walk the three pillars left to right. The human keeps the judgment (what matters, what's confidential, what's good enough). Claude supplies speed. And, crucial for this audience, you don't have to leave your familiar apps or learn a new system. The whole workflow is paste-in, get-output, paste-back.
 Reassure the nervous: nothing here changes your files automatically, nothing is sent anywhere without you doing it, and you're always the last set of eyes before anything goes out. ~60 seconds.</a:t>
             </a:r>
-            <a:endParaRPr lang="en-US" dirty="0"/>
           </a:p>
         </p:txBody>
       </p:sp>
@@ -2062,7 +1826,6 @@
 Then point at the bottom strip: the exact same four steps work whether you're in Outlook, Word, Excel or PowerPoint. We're about to do one demo in each, and you'll see the loop repeat every time. Once you've got it in one app, you've got it in all of them.
 Optional aside: later we'll show an official Microsoft 365 connector that removes some of the copy-paste, but everything today works with plain copy-paste and a free account. ~70 seconds.</a:t>
             </a:r>
-            <a:endParaRPr lang="en-US" dirty="0"/>
           </a:p>
         </p:txBody>
       </p:sp>
@@ -2153,7 +1916,6 @@
 On plans (right panel): Free is fine to start. Pro is roughly $20/month for people who use it heavily every day, higher usage limits and the ability to work with longer documents. Team and Enterprise are the org-rollout tiers with admin controls and the official Microsoft 365 connector. Don't dwell on pricing live, tell them exact current numbers and the privacy details are in the Download &amp; Licensing Guide handout, because those change.
 If someone asks "is it safe to put work info in?", flag that we have a whole slide on that coming up, and park it. ~60 seconds.</a:t>
             </a:r>
-            <a:endParaRPr lang="en-US" dirty="0"/>
           </a:p>
         </p:txBody>
       </p:sp>
@@ -2244,7 +2006,6 @@
 Then relieve the pressure: you do NOT need all four every time, and you do NOT need to nail it on the first try. The amber bar is the key message, treat it as a conversation. Get a rough draft and steer it: "shorter," "warmer," "add a line about the deadline." That iterative steering is faster and easier than agonizing over one perfect prompt.
 Callback: tell them the cheat-sheet handout lists ready-made patterns built on exactly this structure. ~75 seconds.</a:t>
             </a:r>
-            <a:endParaRPr lang="en-US" dirty="0"/>
           </a:p>
         </p:txBody>
       </p:sp>
@@ -2332,7 +2093,6 @@
               <a:rPr lang="en-US" dirty="0"/>
               <a:t>Section transition, set the scene. Email is where most people feel the daily grind, so this is the demo that tends to land hardest. Tell them we'll do three things: turn a messy thread into a clean status update, then look at tone adjustment and quick replies. Keep this on screen only a few seconds, it's a signpost, not content.</a:t>
             </a:r>
-            <a:endParaRPr lang="en-US" dirty="0"/>
           </a:p>
         </p:txBody>
       </p:sp>
@@ -2423,7 +2183,6 @@
 The "wow" beat is the Risks / decisions line, point out that Claude pulled the buried blocker out of a wall of text and surfaced it as something a leader can act on. That's the real value: not just shorter, but reorganized around what the reader needs.
 Then demonstrate steering: "make it warmer," or "add one sentence of context at the top." Reinforce the loop. Before moving on, say out loud: "I'd read this, fix the one detail that's off, and send." Never blind-send. ~2.5 minutes.</a:t>
             </a:r>
-            <a:endParaRPr lang="en-US" dirty="0"/>
           </a:p>
         </p:txBody>
       </p:sp>
@@ -2514,7 +2273,6 @@
 Right, reply from bullets. This is the biggest daily time-saver: you already know WHAT you want to say, you just don't want to write the connective tissue. Give Claude three bullets and let it produce three tidy paragraphs. Stress that this keeps YOUR decisions intact, Claude isn't deciding anything, it's just phrasing.
 Reminder to the room: still your judgment, still your send button. Keep moving. ~2 minutes.</a:t>
             </a:r>
-            <a:endParaRPr lang="en-US" dirty="0"/>
           </a:p>
         </p:txBody>
       </p:sp>
@@ -2587,6 +2345,11 @@
 <file path=ppt/slideMasters/slideMaster1.xml><?xml version="1.0" encoding="utf-8"?>
 <p:sldMaster xmlns:a="http://schemas.openxmlformats.org/drawingml/2006/main" xmlns:r="http://schemas.openxmlformats.org/officeDocument/2006/relationships" xmlns:p="http://schemas.openxmlformats.org/presentationml/2006/main">
   <p:cSld>
+    <p:bg>
+      <p:bgRef idx="1001">
+        <a:schemeClr val="bg1"/>
+      </p:bgRef>
+    </p:bg>
     <p:spTree>
       <p:nvGrpSpPr>
         <p:cNvPr id="1" name=""/>
@@ -2869,6 +2632,7 @@
         <a:solidFill>
           <a:srgbClr val="1B2A4A"/>
         </a:solidFill>
+        <a:effectLst/>
       </p:bgPr>
     </p:bg>
     <p:spTree>
@@ -2904,6 +2668,13 @@
           </a:solidFill>
           <a:ln/>
         </p:spPr>
+        <p:txBody>
+          <a:bodyPr/>
+          <a:lstStyle/>
+          <a:p>
+            <a:endParaRPr lang="en-US"/>
+          </a:p>
+        </p:txBody>
       </p:sp>
       <p:sp>
         <p:nvSpPr>
@@ -2924,6 +2695,13 @@
           </a:solidFill>
           <a:ln/>
         </p:spPr>
+        <p:txBody>
+          <a:bodyPr/>
+          <a:lstStyle/>
+          <a:p>
+            <a:endParaRPr lang="en-US"/>
+          </a:p>
+        </p:txBody>
       </p:sp>
       <p:sp>
         <p:nvSpPr>
@@ -2944,6 +2722,13 @@
           </a:solidFill>
           <a:ln/>
         </p:spPr>
+        <p:txBody>
+          <a:bodyPr/>
+          <a:lstStyle/>
+          <a:p>
+            <a:endParaRPr lang="en-US"/>
+          </a:p>
+        </p:txBody>
       </p:sp>
       <p:sp>
         <p:nvSpPr>
@@ -2966,11 +2751,11 @@
           <a:bodyPr wrap="square" lIns="0" tIns="0" rIns="0" bIns="0" rtlCol="0" anchor="ctr"/>
           <a:lstStyle/>
           <a:p>
-            <a:pPr indent="0" marL="0">
-              <a:buNone/>
-            </a:pPr>
-            <a:r>
-              <a:rPr lang="en-US" sz="1400" b="1" spc="200" kern="0" dirty="0">
+            <a:pPr marL="0" indent="0">
+              <a:buNone/>
+            </a:pPr>
+            <a:r>
+              <a:rPr lang="en-US" sz="1400" b="1" kern="0" spc="200" dirty="0">
                 <a:solidFill>
                   <a:srgbClr val="5FB3B3"/>
                 </a:solidFill>
@@ -3005,7 +2790,7 @@
           <a:bodyPr wrap="square" lIns="0" tIns="0" rIns="0" bIns="0" rtlCol="0" anchor="ctr"/>
           <a:lstStyle/>
           <a:p>
-            <a:pPr indent="0" marL="0">
+            <a:pPr marL="0" indent="0">
               <a:buNone/>
             </a:pPr>
             <a:r>
@@ -3044,7 +2829,7 @@
           <a:bodyPr wrap="square" lIns="0" tIns="0" rIns="0" bIns="0" rtlCol="0" anchor="ctr"/>
           <a:lstStyle/>
           <a:p>
-            <a:pPr indent="0" marL="0">
+            <a:pPr marL="0" indent="0">
               <a:buNone/>
             </a:pPr>
             <a:r>
@@ -3083,7 +2868,7 @@
           <a:bodyPr wrap="square" lIns="0" tIns="0" rIns="0" bIns="0" rtlCol="0" anchor="ctr"/>
           <a:lstStyle/>
           <a:p>
-            <a:pPr indent="0" marL="0">
+            <a:pPr marL="0" indent="0">
               <a:lnSpc>
                 <a:spcPct val="115000"/>
               </a:lnSpc>
@@ -3103,7 +2888,7 @@
             <a:endParaRPr lang="en-US" sz="1700" dirty="0"/>
           </a:p>
           <a:p>
-            <a:pPr indent="0" marL="0">
+            <a:pPr marL="0" indent="0">
               <a:lnSpc>
                 <a:spcPct val="115000"/>
               </a:lnSpc>
@@ -3145,7 +2930,7 @@
           <a:bodyPr wrap="square" lIns="0" tIns="0" rIns="0" bIns="0" rtlCol="0" anchor="ctr"/>
           <a:lstStyle/>
           <a:p>
-            <a:pPr indent="0" marL="0">
+            <a:pPr marL="0" indent="0">
               <a:buNone/>
             </a:pPr>
             <a:r>
@@ -3159,9 +2944,6 @@
               </a:rPr>
               <a:t>No Copilot license</a:t>
             </a:r>
-            <a:pPr indent="0" marL="0">
-              <a:buNone/>
-            </a:pPr>
             <a:r>
               <a:rPr lang="en-US" sz="1500" dirty="0">
                 <a:solidFill>
@@ -3198,7 +2980,7 @@
           <a:bodyPr wrap="square" lIns="0" tIns="0" rIns="0" bIns="0" rtlCol="0" anchor="ctr"/>
           <a:lstStyle/>
           <a:p>
-            <a:pPr indent="0" marL="0">
+            <a:pPr marL="0" indent="0">
               <a:buNone/>
             </a:pPr>
             <a:r>
@@ -3237,7 +3019,7 @@
           <a:bodyPr wrap="square" lIns="0" tIns="0" rIns="0" bIns="0" rtlCol="0" anchor="ctr"/>
           <a:lstStyle/>
           <a:p>
-            <a:pPr algn="l" indent="0" marL="0">
+            <a:pPr marL="0" indent="0" algn="l">
               <a:buNone/>
             </a:pPr>
             <a:r>
@@ -3276,7 +3058,7 @@
           <a:bodyPr wrap="square" lIns="0" tIns="0" rIns="0" bIns="0" rtlCol="0" anchor="ctr"/>
           <a:lstStyle/>
           <a:p>
-            <a:pPr algn="r" indent="0" marL="0">
+            <a:pPr marL="0" indent="0" algn="r">
               <a:buNone/>
             </a:pPr>
             <a:r>
@@ -3310,6 +3092,7 @@
         <a:solidFill>
           <a:srgbClr val="1B2A4A"/>
         </a:solidFill>
+        <a:effectLst/>
       </p:bgPr>
     </p:bg>
     <p:spTree>
@@ -3345,6 +3128,13 @@
           </a:solidFill>
           <a:ln/>
         </p:spPr>
+        <p:txBody>
+          <a:bodyPr/>
+          <a:lstStyle/>
+          <a:p>
+            <a:endParaRPr lang="en-US"/>
+          </a:p>
+        </p:txBody>
       </p:sp>
       <p:sp>
         <p:nvSpPr>
@@ -3365,6 +3155,13 @@
           </a:solidFill>
           <a:ln/>
         </p:spPr>
+        <p:txBody>
+          <a:bodyPr/>
+          <a:lstStyle/>
+          <a:p>
+            <a:endParaRPr lang="en-US"/>
+          </a:p>
+        </p:txBody>
       </p:sp>
       <p:sp>
         <p:nvSpPr>
@@ -3385,17 +3182,24 @@
           </a:solidFill>
           <a:ln/>
         </p:spPr>
+        <p:txBody>
+          <a:bodyPr/>
+          <a:lstStyle/>
+          <a:p>
+            <a:endParaRPr lang="en-US"/>
+          </a:p>
+        </p:txBody>
       </p:sp>
       <p:pic>
         <p:nvPicPr>
-          <p:cNvPr id="5" name="Image 0" descr="preencoded.png">    </p:cNvPr>
+          <p:cNvPr id="5" name="Image 0" descr="preencoded.png"/>
           <p:cNvPicPr>
             <a:picLocks noChangeAspect="1"/>
           </p:cNvPicPr>
           <p:nvPr/>
         </p:nvPicPr>
         <p:blipFill>
-          <a:blip r:embed="rId1"/>
+          <a:blip r:embed="rId3"/>
           <a:stretch>
             <a:fillRect/>
           </a:stretch>
@@ -3431,11 +3235,11 @@
           <a:bodyPr wrap="square" lIns="0" tIns="0" rIns="0" bIns="0" rtlCol="0" anchor="ctr"/>
           <a:lstStyle/>
           <a:p>
-            <a:pPr indent="0" marL="0">
-              <a:buNone/>
-            </a:pPr>
-            <a:r>
-              <a:rPr lang="en-US" sz="1500" b="1" spc="200" kern="0" dirty="0">
+            <a:pPr marL="0" indent="0">
+              <a:buNone/>
+            </a:pPr>
+            <a:r>
+              <a:rPr lang="en-US" sz="1500" b="1" kern="0" spc="200" dirty="0">
                 <a:solidFill>
                   <a:srgbClr val="5FB3B3"/>
                 </a:solidFill>
@@ -3470,7 +3274,7 @@
           <a:bodyPr wrap="square" lIns="0" tIns="0" rIns="0" bIns="0" rtlCol="0" anchor="ctr"/>
           <a:lstStyle/>
           <a:p>
-            <a:pPr indent="0" marL="0">
+            <a:pPr marL="0" indent="0">
               <a:lnSpc>
                 <a:spcPct val="100000"/>
               </a:lnSpc>
@@ -3512,7 +3316,7 @@
           <a:bodyPr wrap="square" lIns="0" tIns="0" rIns="0" bIns="0" rtlCol="0" anchor="ctr"/>
           <a:lstStyle/>
           <a:p>
-            <a:pPr indent="0" marL="0">
+            <a:pPr marL="0" indent="0">
               <a:lnSpc>
                 <a:spcPct val="115000"/>
               </a:lnSpc>
@@ -3554,7 +3358,7 @@
           <a:bodyPr wrap="square" lIns="0" tIns="0" rIns="0" bIns="0" rtlCol="0" anchor="ctr"/>
           <a:lstStyle/>
           <a:p>
-            <a:pPr algn="l" indent="0" marL="0">
+            <a:pPr marL="0" indent="0" algn="l">
               <a:buNone/>
             </a:pPr>
             <a:r>
@@ -3593,7 +3397,7 @@
           <a:bodyPr wrap="square" lIns="0" tIns="0" rIns="0" bIns="0" rtlCol="0" anchor="ctr"/>
           <a:lstStyle/>
           <a:p>
-            <a:pPr algn="r" indent="0" marL="0">
+            <a:pPr marL="0" indent="0" algn="r">
               <a:buNone/>
             </a:pPr>
             <a:r>
@@ -3627,6 +3431,7 @@
         <a:solidFill>
           <a:srgbClr val="F5F7FA"/>
         </a:solidFill>
+        <a:effectLst/>
       </p:bgPr>
     </p:bg>
     <p:spTree>
@@ -3662,6 +3467,13 @@
           </a:solidFill>
           <a:ln/>
         </p:spPr>
+        <p:txBody>
+          <a:bodyPr/>
+          <a:lstStyle/>
+          <a:p>
+            <a:endParaRPr lang="en-US"/>
+          </a:p>
+        </p:txBody>
       </p:sp>
       <p:sp>
         <p:nvSpPr>
@@ -3684,11 +3496,11 @@
           <a:bodyPr wrap="square" lIns="0" tIns="0" rIns="0" bIns="0" rtlCol="0" anchor="ctr"/>
           <a:lstStyle/>
           <a:p>
-            <a:pPr indent="0" marL="0">
-              <a:buNone/>
-            </a:pPr>
-            <a:r>
-              <a:rPr lang="en-US" sz="1200" b="1" spc="200" kern="0" dirty="0">
+            <a:pPr marL="0" indent="0">
+              <a:buNone/>
+            </a:pPr>
+            <a:r>
+              <a:rPr lang="en-US" sz="1200" b="1" kern="0" spc="200" dirty="0">
                 <a:solidFill>
                   <a:srgbClr val="2C8C8C"/>
                 </a:solidFill>
@@ -3723,7 +3535,7 @@
           <a:bodyPr wrap="square" lIns="0" tIns="0" rIns="0" bIns="0" rtlCol="0" anchor="ctr"/>
           <a:lstStyle/>
           <a:p>
-            <a:pPr indent="0" marL="0">
+            <a:pPr marL="0" indent="0">
               <a:buNone/>
             </a:pPr>
             <a:r>
@@ -3762,13 +3574,20 @@
           </a:solidFill>
           <a:ln/>
           <a:effectLst>
-            <a:outerShdw sx="100000" sy="100000" kx="0" ky="0" algn="bl" rotWithShape="0" blurRad="88900" dist="38100" dir="8100000">
+            <a:outerShdw blurRad="88900" dist="38100" dir="8100000" algn="bl" rotWithShape="0">
               <a:srgbClr val="000000">
                 <a:alpha val="16000"/>
               </a:srgbClr>
             </a:outerShdw>
           </a:effectLst>
         </p:spPr>
+        <p:txBody>
+          <a:bodyPr/>
+          <a:lstStyle/>
+          <a:p>
+            <a:endParaRPr lang="en-US"/>
+          </a:p>
+        </p:txBody>
       </p:sp>
       <p:sp>
         <p:nvSpPr>
@@ -3791,11 +3610,11 @@
           <a:bodyPr wrap="square" lIns="0" tIns="0" rIns="0" bIns="0" rtlCol="0" anchor="ctr"/>
           <a:lstStyle/>
           <a:p>
-            <a:pPr indent="0" marL="0">
-              <a:buNone/>
-            </a:pPr>
-            <a:r>
-              <a:rPr lang="en-US" sz="1000" b="1" spc="150" kern="0" dirty="0">
+            <a:pPr marL="0" indent="0">
+              <a:buNone/>
+            </a:pPr>
+            <a:r>
+              <a:rPr lang="en-US" sz="1000" b="1" kern="0" spc="150" dirty="0">
                 <a:solidFill>
                   <a:srgbClr val="E8A33D"/>
                 </a:solidFill>
@@ -3830,7 +3649,7 @@
           <a:bodyPr wrap="square" lIns="0" tIns="0" rIns="0" bIns="0" rtlCol="0" anchor="t"/>
           <a:lstStyle/>
           <a:p>
-            <a:pPr indent="0" marL="0">
+            <a:pPr marL="0" indent="0">
               <a:lnSpc>
                 <a:spcPct val="108000"/>
               </a:lnSpc>
@@ -3853,7 +3672,7 @@
             <a:endParaRPr lang="en-US" sz="1250" dirty="0"/>
           </a:p>
           <a:p>
-            <a:pPr indent="0" marL="0">
+            <a:pPr marL="0" indent="0">
               <a:lnSpc>
                 <a:spcPct val="108000"/>
               </a:lnSpc>
@@ -3876,7 +3695,7 @@
             <a:endParaRPr lang="en-US" sz="1250" dirty="0"/>
           </a:p>
           <a:p>
-            <a:pPr indent="0" marL="0">
+            <a:pPr marL="0" indent="0">
               <a:lnSpc>
                 <a:spcPct val="108000"/>
               </a:lnSpc>
@@ -3899,7 +3718,7 @@
             <a:endParaRPr lang="en-US" sz="1250" dirty="0"/>
           </a:p>
           <a:p>
-            <a:pPr indent="0" marL="0">
+            <a:pPr marL="0" indent="0">
               <a:lnSpc>
                 <a:spcPct val="108000"/>
               </a:lnSpc>
@@ -3946,13 +3765,20 @@
             <a:prstDash val="solid"/>
           </a:ln>
           <a:effectLst>
-            <a:outerShdw sx="100000" sy="100000" kx="0" ky="0" algn="bl" rotWithShape="0" blurRad="88900" dist="38100" dir="8100000">
+            <a:outerShdw blurRad="88900" dist="38100" dir="8100000" algn="bl" rotWithShape="0">
               <a:srgbClr val="000000">
                 <a:alpha val="16000"/>
               </a:srgbClr>
             </a:outerShdw>
           </a:effectLst>
         </p:spPr>
+        <p:txBody>
+          <a:bodyPr/>
+          <a:lstStyle/>
+          <a:p>
+            <a:endParaRPr lang="en-US"/>
+          </a:p>
+        </p:txBody>
       </p:sp>
       <p:sp>
         <p:nvSpPr>
@@ -3975,11 +3801,11 @@
           <a:bodyPr wrap="square" lIns="0" tIns="0" rIns="0" bIns="0" rtlCol="0" anchor="ctr"/>
           <a:lstStyle/>
           <a:p>
-            <a:pPr indent="0" marL="0">
-              <a:buNone/>
-            </a:pPr>
-            <a:r>
-              <a:rPr lang="en-US" sz="1100" b="1" spc="150" kern="0" dirty="0">
+            <a:pPr marL="0" indent="0">
+              <a:buNone/>
+            </a:pPr>
+            <a:r>
+              <a:rPr lang="en-US" sz="1100" b="1" kern="0" spc="150" dirty="0">
                 <a:solidFill>
                   <a:srgbClr val="2C8C8C"/>
                 </a:solidFill>
@@ -4014,7 +3840,7 @@
           <a:bodyPr wrap="square" lIns="0" tIns="0" rIns="0" bIns="0" rtlCol="0" anchor="t"/>
           <a:lstStyle/>
           <a:p>
-            <a:pPr indent="0" marL="0">
+            <a:pPr marL="0" indent="0">
               <a:lnSpc>
                 <a:spcPct val="108000"/>
               </a:lnSpc>
@@ -4035,7 +3861,7 @@
             <a:endParaRPr lang="en-US" sz="1300" dirty="0"/>
           </a:p>
           <a:p>
-            <a:pPr indent="0" marL="0">
+            <a:pPr marL="0" indent="0">
               <a:lnSpc>
                 <a:spcPct val="108000"/>
               </a:lnSpc>
@@ -4057,7 +3883,7 @@
             <a:endParaRPr lang="en-US" sz="1300" dirty="0"/>
           </a:p>
           <a:p>
-            <a:pPr indent="0" marL="0">
+            <a:pPr marL="0" indent="0">
               <a:lnSpc>
                 <a:spcPct val="108000"/>
               </a:lnSpc>
@@ -4078,7 +3904,7 @@
             <a:endParaRPr lang="en-US" sz="1300" dirty="0"/>
           </a:p>
           <a:p>
-            <a:pPr indent="0" marL="0">
+            <a:pPr marL="0" indent="0">
               <a:lnSpc>
                 <a:spcPct val="108000"/>
               </a:lnSpc>
@@ -4101,7 +3927,7 @@
             <a:endParaRPr lang="en-US" sz="1300" dirty="0"/>
           </a:p>
           <a:p>
-            <a:pPr indent="0" marL="0">
+            <a:pPr marL="0" indent="0">
               <a:lnSpc>
                 <a:spcPct val="108000"/>
               </a:lnSpc>
@@ -4122,7 +3948,7 @@
             <a:endParaRPr lang="en-US" sz="1300" dirty="0"/>
           </a:p>
           <a:p>
-            <a:pPr indent="0" marL="0">
+            <a:pPr marL="0" indent="0">
               <a:lnSpc>
                 <a:spcPct val="108000"/>
               </a:lnSpc>
@@ -4164,7 +3990,7 @@
           <a:bodyPr wrap="square" lIns="0" tIns="0" rIns="0" bIns="0" rtlCol="0" anchor="ctr"/>
           <a:lstStyle/>
           <a:p>
-            <a:pPr algn="l" indent="0" marL="0">
+            <a:pPr marL="0" indent="0" algn="l">
               <a:buNone/>
             </a:pPr>
             <a:r>
@@ -4203,7 +4029,7 @@
           <a:bodyPr wrap="square" lIns="0" tIns="0" rIns="0" bIns="0" rtlCol="0" anchor="ctr"/>
           <a:lstStyle/>
           <a:p>
-            <a:pPr algn="r" indent="0" marL="0">
+            <a:pPr marL="0" indent="0" algn="r">
               <a:buNone/>
             </a:pPr>
             <a:r>
@@ -4237,6 +4063,7 @@
         <a:solidFill>
           <a:srgbClr val="F5F7FA"/>
         </a:solidFill>
+        <a:effectLst/>
       </p:bgPr>
     </p:bg>
     <p:spTree>
@@ -4272,6 +4099,13 @@
           </a:solidFill>
           <a:ln/>
         </p:spPr>
+        <p:txBody>
+          <a:bodyPr/>
+          <a:lstStyle/>
+          <a:p>
+            <a:endParaRPr lang="en-US"/>
+          </a:p>
+        </p:txBody>
       </p:sp>
       <p:sp>
         <p:nvSpPr>
@@ -4294,11 +4128,11 @@
           <a:bodyPr wrap="square" lIns="0" tIns="0" rIns="0" bIns="0" rtlCol="0" anchor="ctr"/>
           <a:lstStyle/>
           <a:p>
-            <a:pPr indent="0" marL="0">
-              <a:buNone/>
-            </a:pPr>
-            <a:r>
-              <a:rPr lang="en-US" sz="1200" b="1" spc="200" kern="0" dirty="0">
+            <a:pPr marL="0" indent="0">
+              <a:buNone/>
+            </a:pPr>
+            <a:r>
+              <a:rPr lang="en-US" sz="1200" b="1" kern="0" spc="200" dirty="0">
                 <a:solidFill>
                   <a:srgbClr val="2C8C8C"/>
                 </a:solidFill>
@@ -4333,7 +4167,7 @@
           <a:bodyPr wrap="square" lIns="0" tIns="0" rIns="0" bIns="0" rtlCol="0" anchor="ctr"/>
           <a:lstStyle/>
           <a:p>
-            <a:pPr indent="0" marL="0">
+            <a:pPr marL="0" indent="0">
               <a:buNone/>
             </a:pPr>
             <a:r>
@@ -4377,24 +4211,31 @@
             <a:prstDash val="solid"/>
           </a:ln>
           <a:effectLst>
-            <a:outerShdw sx="100000" sy="100000" kx="0" ky="0" algn="bl" rotWithShape="0" blurRad="88900" dist="38100" dir="8100000">
+            <a:outerShdw blurRad="88900" dist="38100" dir="8100000" algn="bl" rotWithShape="0">
               <a:srgbClr val="000000">
                 <a:alpha val="16000"/>
               </a:srgbClr>
             </a:outerShdw>
           </a:effectLst>
         </p:spPr>
+        <p:txBody>
+          <a:bodyPr/>
+          <a:lstStyle/>
+          <a:p>
+            <a:endParaRPr lang="en-US"/>
+          </a:p>
+        </p:txBody>
       </p:sp>
       <p:pic>
         <p:nvPicPr>
-          <p:cNvPr id="6" name="Image 0" descr="preencoded.png">    </p:cNvPr>
+          <p:cNvPr id="6" name="Image 0" descr="preencoded.png"/>
           <p:cNvPicPr>
             <a:picLocks noChangeAspect="1"/>
           </p:cNvPicPr>
           <p:nvPr/>
         </p:nvPicPr>
         <p:blipFill>
-          <a:blip r:embed="rId1"/>
+          <a:blip r:embed="rId3"/>
           <a:stretch>
             <a:fillRect/>
           </a:stretch>
@@ -4430,7 +4271,7 @@
           <a:bodyPr wrap="square" lIns="0" tIns="0" rIns="0" bIns="0" rtlCol="0" anchor="ctr"/>
           <a:lstStyle/>
           <a:p>
-            <a:pPr indent="0" marL="0">
+            <a:pPr marL="0" indent="0">
               <a:buNone/>
             </a:pPr>
             <a:r>
@@ -4469,7 +4310,7 @@
           <a:bodyPr wrap="square" lIns="0" tIns="0" rIns="0" bIns="0" rtlCol="0" anchor="ctr"/>
           <a:lstStyle/>
           <a:p>
-            <a:pPr indent="0" marL="0">
+            <a:pPr marL="0" indent="0">
               <a:lnSpc>
                 <a:spcPct val="112000"/>
               </a:lnSpc>
@@ -4511,7 +4352,7 @@
           <a:bodyPr wrap="square" lIns="0" tIns="0" rIns="0" bIns="0" rtlCol="0" anchor="t"/>
           <a:lstStyle/>
           <a:p>
-            <a:pPr indent="0" marL="0">
+            <a:pPr marL="0" indent="0">
               <a:lnSpc>
                 <a:spcPct val="125000"/>
               </a:lnSpc>
@@ -4532,7 +4373,7 @@
             <a:endParaRPr lang="en-US" sz="1300" dirty="0"/>
           </a:p>
           <a:p>
-            <a:pPr indent="0" marL="0">
+            <a:pPr marL="0" indent="0">
               <a:lnSpc>
                 <a:spcPct val="125000"/>
               </a:lnSpc>
@@ -4553,7 +4394,7 @@
             <a:endParaRPr lang="en-US" sz="1300" dirty="0"/>
           </a:p>
           <a:p>
-            <a:pPr indent="0" marL="0">
+            <a:pPr marL="0" indent="0">
               <a:lnSpc>
                 <a:spcPct val="125000"/>
               </a:lnSpc>
@@ -4574,7 +4415,7 @@
             <a:endParaRPr lang="en-US" sz="1300" dirty="0"/>
           </a:p>
           <a:p>
-            <a:pPr indent="0" marL="0">
+            <a:pPr marL="0" indent="0">
               <a:lnSpc>
                 <a:spcPct val="125000"/>
               </a:lnSpc>
@@ -4621,13 +4462,20 @@
             <a:prstDash val="solid"/>
           </a:ln>
           <a:effectLst>
-            <a:outerShdw sx="100000" sy="100000" kx="0" ky="0" algn="bl" rotWithShape="0" blurRad="88900" dist="38100" dir="8100000">
+            <a:outerShdw blurRad="88900" dist="38100" dir="8100000" algn="bl" rotWithShape="0">
               <a:srgbClr val="000000">
                 <a:alpha val="16000"/>
               </a:srgbClr>
             </a:outerShdw>
           </a:effectLst>
         </p:spPr>
+        <p:txBody>
+          <a:bodyPr/>
+          <a:lstStyle/>
+          <a:p>
+            <a:endParaRPr lang="en-US"/>
+          </a:p>
+        </p:txBody>
       </p:sp>
       <p:sp>
         <p:nvSpPr>
@@ -4648,17 +4496,24 @@
           </a:solidFill>
           <a:ln/>
         </p:spPr>
+        <p:txBody>
+          <a:bodyPr/>
+          <a:lstStyle/>
+          <a:p>
+            <a:endParaRPr lang="en-US"/>
+          </a:p>
+        </p:txBody>
       </p:sp>
       <p:pic>
         <p:nvPicPr>
-          <p:cNvPr id="12" name="Image 1" descr="preencoded.png">    </p:cNvPr>
+          <p:cNvPr id="12" name="Image 1" descr="preencoded.png"/>
           <p:cNvPicPr>
             <a:picLocks noChangeAspect="1"/>
           </p:cNvPicPr>
           <p:nvPr/>
         </p:nvPicPr>
         <p:blipFill>
-          <a:blip r:embed="rId2"/>
+          <a:blip r:embed="rId4"/>
           <a:stretch>
             <a:fillRect/>
           </a:stretch>
@@ -4694,7 +4549,7 @@
           <a:bodyPr wrap="square" lIns="0" tIns="0" rIns="0" bIns="0" rtlCol="0" anchor="ctr"/>
           <a:lstStyle/>
           <a:p>
-            <a:pPr indent="0" marL="0">
+            <a:pPr marL="0" indent="0">
               <a:buNone/>
             </a:pPr>
             <a:r>
@@ -4733,7 +4588,7 @@
           <a:bodyPr wrap="square" lIns="0" tIns="0" rIns="0" bIns="0" rtlCol="0" anchor="ctr"/>
           <a:lstStyle/>
           <a:p>
-            <a:pPr indent="0" marL="0">
+            <a:pPr marL="0" indent="0">
               <a:lnSpc>
                 <a:spcPct val="105000"/>
               </a:lnSpc>
@@ -4780,13 +4635,20 @@
             <a:prstDash val="solid"/>
           </a:ln>
           <a:effectLst>
-            <a:outerShdw sx="100000" sy="100000" kx="0" ky="0" algn="bl" rotWithShape="0" blurRad="88900" dist="38100" dir="8100000">
+            <a:outerShdw blurRad="88900" dist="38100" dir="8100000" algn="bl" rotWithShape="0">
               <a:srgbClr val="000000">
                 <a:alpha val="16000"/>
               </a:srgbClr>
             </a:outerShdw>
           </a:effectLst>
         </p:spPr>
+        <p:txBody>
+          <a:bodyPr/>
+          <a:lstStyle/>
+          <a:p>
+            <a:endParaRPr lang="en-US"/>
+          </a:p>
+        </p:txBody>
       </p:sp>
       <p:sp>
         <p:nvSpPr>
@@ -4807,17 +4669,24 @@
           </a:solidFill>
           <a:ln/>
         </p:spPr>
+        <p:txBody>
+          <a:bodyPr/>
+          <a:lstStyle/>
+          <a:p>
+            <a:endParaRPr lang="en-US"/>
+          </a:p>
+        </p:txBody>
       </p:sp>
       <p:pic>
         <p:nvPicPr>
-          <p:cNvPr id="17" name="Image 2" descr="preencoded.png">    </p:cNvPr>
+          <p:cNvPr id="17" name="Image 2" descr="preencoded.png"/>
           <p:cNvPicPr>
             <a:picLocks noChangeAspect="1"/>
           </p:cNvPicPr>
           <p:nvPr/>
         </p:nvPicPr>
         <p:blipFill>
-          <a:blip r:embed="rId3"/>
+          <a:blip r:embed="rId5"/>
           <a:stretch>
             <a:fillRect/>
           </a:stretch>
@@ -4853,7 +4722,7 @@
           <a:bodyPr wrap="square" lIns="0" tIns="0" rIns="0" bIns="0" rtlCol="0" anchor="ctr"/>
           <a:lstStyle/>
           <a:p>
-            <a:pPr indent="0" marL="0">
+            <a:pPr marL="0" indent="0">
               <a:buNone/>
             </a:pPr>
             <a:r>
@@ -4892,7 +4761,7 @@
           <a:bodyPr wrap="square" lIns="0" tIns="0" rIns="0" bIns="0" rtlCol="0" anchor="ctr"/>
           <a:lstStyle/>
           <a:p>
-            <a:pPr indent="0" marL="0">
+            <a:pPr marL="0" indent="0">
               <a:lnSpc>
                 <a:spcPct val="105000"/>
               </a:lnSpc>
@@ -4939,13 +4808,20 @@
             <a:prstDash val="solid"/>
           </a:ln>
           <a:effectLst>
-            <a:outerShdw sx="100000" sy="100000" kx="0" ky="0" algn="bl" rotWithShape="0" blurRad="88900" dist="38100" dir="8100000">
+            <a:outerShdw blurRad="88900" dist="38100" dir="8100000" algn="bl" rotWithShape="0">
               <a:srgbClr val="000000">
                 <a:alpha val="16000"/>
               </a:srgbClr>
             </a:outerShdw>
           </a:effectLst>
         </p:spPr>
+        <p:txBody>
+          <a:bodyPr/>
+          <a:lstStyle/>
+          <a:p>
+            <a:endParaRPr lang="en-US"/>
+          </a:p>
+        </p:txBody>
       </p:sp>
       <p:sp>
         <p:nvSpPr>
@@ -4966,17 +4842,24 @@
           </a:solidFill>
           <a:ln/>
         </p:spPr>
+        <p:txBody>
+          <a:bodyPr/>
+          <a:lstStyle/>
+          <a:p>
+            <a:endParaRPr lang="en-US"/>
+          </a:p>
+        </p:txBody>
       </p:sp>
       <p:pic>
         <p:nvPicPr>
-          <p:cNvPr id="22" name="Image 3" descr="preencoded.png">    </p:cNvPr>
+          <p:cNvPr id="22" name="Image 3" descr="preencoded.png"/>
           <p:cNvPicPr>
             <a:picLocks noChangeAspect="1"/>
           </p:cNvPicPr>
           <p:nvPr/>
         </p:nvPicPr>
         <p:blipFill>
-          <a:blip r:embed="rId4"/>
+          <a:blip r:embed="rId6"/>
           <a:stretch>
             <a:fillRect/>
           </a:stretch>
@@ -5012,7 +4895,7 @@
           <a:bodyPr wrap="square" lIns="0" tIns="0" rIns="0" bIns="0" rtlCol="0" anchor="ctr"/>
           <a:lstStyle/>
           <a:p>
-            <a:pPr indent="0" marL="0">
+            <a:pPr marL="0" indent="0">
               <a:buNone/>
             </a:pPr>
             <a:r>
@@ -5051,7 +4934,7 @@
           <a:bodyPr wrap="square" lIns="0" tIns="0" rIns="0" bIns="0" rtlCol="0" anchor="ctr"/>
           <a:lstStyle/>
           <a:p>
-            <a:pPr indent="0" marL="0">
+            <a:pPr marL="0" indent="0">
               <a:lnSpc>
                 <a:spcPct val="105000"/>
               </a:lnSpc>
@@ -5093,7 +4976,7 @@
           <a:bodyPr wrap="square" lIns="0" tIns="0" rIns="0" bIns="0" rtlCol="0" anchor="ctr"/>
           <a:lstStyle/>
           <a:p>
-            <a:pPr algn="l" indent="0" marL="0">
+            <a:pPr marL="0" indent="0" algn="l">
               <a:buNone/>
             </a:pPr>
             <a:r>
@@ -5132,7 +5015,7 @@
           <a:bodyPr wrap="square" lIns="0" tIns="0" rIns="0" bIns="0" rtlCol="0" anchor="ctr"/>
           <a:lstStyle/>
           <a:p>
-            <a:pPr algn="r" indent="0" marL="0">
+            <a:pPr marL="0" indent="0" algn="r">
               <a:buNone/>
             </a:pPr>
             <a:r>
@@ -5166,6 +5049,7 @@
         <a:solidFill>
           <a:srgbClr val="1B2A4A"/>
         </a:solidFill>
+        <a:effectLst/>
       </p:bgPr>
     </p:bg>
     <p:spTree>
@@ -5201,6 +5085,13 @@
           </a:solidFill>
           <a:ln/>
         </p:spPr>
+        <p:txBody>
+          <a:bodyPr/>
+          <a:lstStyle/>
+          <a:p>
+            <a:endParaRPr lang="en-US"/>
+          </a:p>
+        </p:txBody>
       </p:sp>
       <p:sp>
         <p:nvSpPr>
@@ -5221,6 +5112,13 @@
           </a:solidFill>
           <a:ln/>
         </p:spPr>
+        <p:txBody>
+          <a:bodyPr/>
+          <a:lstStyle/>
+          <a:p>
+            <a:endParaRPr lang="en-US"/>
+          </a:p>
+        </p:txBody>
       </p:sp>
       <p:sp>
         <p:nvSpPr>
@@ -5241,17 +5139,24 @@
           </a:solidFill>
           <a:ln/>
         </p:spPr>
+        <p:txBody>
+          <a:bodyPr/>
+          <a:lstStyle/>
+          <a:p>
+            <a:endParaRPr lang="en-US"/>
+          </a:p>
+        </p:txBody>
       </p:sp>
       <p:pic>
         <p:nvPicPr>
-          <p:cNvPr id="5" name="Image 0" descr="preencoded.png">    </p:cNvPr>
+          <p:cNvPr id="5" name="Image 0" descr="preencoded.png"/>
           <p:cNvPicPr>
             <a:picLocks noChangeAspect="1"/>
           </p:cNvPicPr>
           <p:nvPr/>
         </p:nvPicPr>
         <p:blipFill>
-          <a:blip r:embed="rId1"/>
+          <a:blip r:embed="rId3"/>
           <a:stretch>
             <a:fillRect/>
           </a:stretch>
@@ -5287,11 +5192,11 @@
           <a:bodyPr wrap="square" lIns="0" tIns="0" rIns="0" bIns="0" rtlCol="0" anchor="ctr"/>
           <a:lstStyle/>
           <a:p>
-            <a:pPr indent="0" marL="0">
-              <a:buNone/>
-            </a:pPr>
-            <a:r>
-              <a:rPr lang="en-US" sz="1500" b="1" spc="200" kern="0" dirty="0">
+            <a:pPr marL="0" indent="0">
+              <a:buNone/>
+            </a:pPr>
+            <a:r>
+              <a:rPr lang="en-US" sz="1500" b="1" kern="0" spc="200" dirty="0">
                 <a:solidFill>
                   <a:srgbClr val="5FB3B3"/>
                 </a:solidFill>
@@ -5326,7 +5231,7 @@
           <a:bodyPr wrap="square" lIns="0" tIns="0" rIns="0" bIns="0" rtlCol="0" anchor="ctr"/>
           <a:lstStyle/>
           <a:p>
-            <a:pPr indent="0" marL="0">
+            <a:pPr marL="0" indent="0">
               <a:lnSpc>
                 <a:spcPct val="100000"/>
               </a:lnSpc>
@@ -5368,7 +5273,7 @@
           <a:bodyPr wrap="square" lIns="0" tIns="0" rIns="0" bIns="0" rtlCol="0" anchor="ctr"/>
           <a:lstStyle/>
           <a:p>
-            <a:pPr indent="0" marL="0">
+            <a:pPr marL="0" indent="0">
               <a:lnSpc>
                 <a:spcPct val="115000"/>
               </a:lnSpc>
@@ -5410,7 +5315,7 @@
           <a:bodyPr wrap="square" lIns="0" tIns="0" rIns="0" bIns="0" rtlCol="0" anchor="ctr"/>
           <a:lstStyle/>
           <a:p>
-            <a:pPr algn="l" indent="0" marL="0">
+            <a:pPr marL="0" indent="0" algn="l">
               <a:buNone/>
             </a:pPr>
             <a:r>
@@ -5449,7 +5354,7 @@
           <a:bodyPr wrap="square" lIns="0" tIns="0" rIns="0" bIns="0" rtlCol="0" anchor="ctr"/>
           <a:lstStyle/>
           <a:p>
-            <a:pPr algn="r" indent="0" marL="0">
+            <a:pPr marL="0" indent="0" algn="r">
               <a:buNone/>
             </a:pPr>
             <a:r>
@@ -5483,6 +5388,7 @@
         <a:solidFill>
           <a:srgbClr val="F5F7FA"/>
         </a:solidFill>
+        <a:effectLst/>
       </p:bgPr>
     </p:bg>
     <p:spTree>
@@ -5518,6 +5424,13 @@
           </a:solidFill>
           <a:ln/>
         </p:spPr>
+        <p:txBody>
+          <a:bodyPr/>
+          <a:lstStyle/>
+          <a:p>
+            <a:endParaRPr lang="en-US"/>
+          </a:p>
+        </p:txBody>
       </p:sp>
       <p:sp>
         <p:nvSpPr>
@@ -5540,11 +5453,11 @@
           <a:bodyPr wrap="square" lIns="0" tIns="0" rIns="0" bIns="0" rtlCol="0" anchor="ctr"/>
           <a:lstStyle/>
           <a:p>
-            <a:pPr indent="0" marL="0">
-              <a:buNone/>
-            </a:pPr>
-            <a:r>
-              <a:rPr lang="en-US" sz="1200" b="1" spc="200" kern="0" dirty="0">
+            <a:pPr marL="0" indent="0">
+              <a:buNone/>
+            </a:pPr>
+            <a:r>
+              <a:rPr lang="en-US" sz="1200" b="1" kern="0" spc="200" dirty="0">
                 <a:solidFill>
                   <a:srgbClr val="2C8C8C"/>
                 </a:solidFill>
@@ -5579,7 +5492,7 @@
           <a:bodyPr wrap="square" lIns="0" tIns="0" rIns="0" bIns="0" rtlCol="0" anchor="ctr"/>
           <a:lstStyle/>
           <a:p>
-            <a:pPr indent="0" marL="0">
+            <a:pPr marL="0" indent="0">
               <a:buNone/>
             </a:pPr>
             <a:r>
@@ -5618,13 +5531,20 @@
           </a:solidFill>
           <a:ln/>
           <a:effectLst>
-            <a:outerShdw sx="100000" sy="100000" kx="0" ky="0" algn="bl" rotWithShape="0" blurRad="88900" dist="38100" dir="8100000">
+            <a:outerShdw blurRad="88900" dist="38100" dir="8100000" algn="bl" rotWithShape="0">
               <a:srgbClr val="000000">
                 <a:alpha val="16000"/>
               </a:srgbClr>
             </a:outerShdw>
           </a:effectLst>
         </p:spPr>
+        <p:txBody>
+          <a:bodyPr/>
+          <a:lstStyle/>
+          <a:p>
+            <a:endParaRPr lang="en-US"/>
+          </a:p>
+        </p:txBody>
       </p:sp>
       <p:sp>
         <p:nvSpPr>
@@ -5647,11 +5567,11 @@
           <a:bodyPr wrap="square" lIns="0" tIns="0" rIns="0" bIns="0" rtlCol="0" anchor="ctr"/>
           <a:lstStyle/>
           <a:p>
-            <a:pPr indent="0" marL="0">
-              <a:buNone/>
-            </a:pPr>
-            <a:r>
-              <a:rPr lang="en-US" sz="1000" b="1" spc="150" kern="0" dirty="0">
+            <a:pPr marL="0" indent="0">
+              <a:buNone/>
+            </a:pPr>
+            <a:r>
+              <a:rPr lang="en-US" sz="1000" b="1" kern="0" spc="150" dirty="0">
                 <a:solidFill>
                   <a:srgbClr val="E8A33D"/>
                 </a:solidFill>
@@ -5686,7 +5606,7 @@
           <a:bodyPr wrap="square" lIns="0" tIns="0" rIns="0" bIns="0" rtlCol="0" anchor="t"/>
           <a:lstStyle/>
           <a:p>
-            <a:pPr indent="0" marL="0">
+            <a:pPr marL="0" indent="0">
               <a:lnSpc>
                 <a:spcPct val="108000"/>
               </a:lnSpc>
@@ -5708,7 +5628,7 @@
             <a:endParaRPr lang="en-US" sz="1250" dirty="0"/>
           </a:p>
           <a:p>
-            <a:pPr indent="0" marL="0">
+            <a:pPr marL="0" indent="0">
               <a:lnSpc>
                 <a:spcPct val="108000"/>
               </a:lnSpc>
@@ -5732,7 +5652,7 @@
             <a:endParaRPr lang="en-US" sz="1250" dirty="0"/>
           </a:p>
           <a:p>
-            <a:pPr indent="0" marL="0">
+            <a:pPr marL="0" indent="0">
               <a:lnSpc>
                 <a:spcPct val="108000"/>
               </a:lnSpc>
@@ -5754,7 +5674,7 @@
             <a:endParaRPr lang="en-US" sz="1250" dirty="0"/>
           </a:p>
           <a:p>
-            <a:pPr indent="0" marL="0">
+            <a:pPr marL="0" indent="0">
               <a:lnSpc>
                 <a:spcPct val="108000"/>
               </a:lnSpc>
@@ -5801,13 +5721,20 @@
             <a:prstDash val="solid"/>
           </a:ln>
           <a:effectLst>
-            <a:outerShdw sx="100000" sy="100000" kx="0" ky="0" algn="bl" rotWithShape="0" blurRad="88900" dist="38100" dir="8100000">
+            <a:outerShdw blurRad="88900" dist="38100" dir="8100000" algn="bl" rotWithShape="0">
               <a:srgbClr val="000000">
                 <a:alpha val="16000"/>
               </a:srgbClr>
             </a:outerShdw>
           </a:effectLst>
         </p:spPr>
+        <p:txBody>
+          <a:bodyPr/>
+          <a:lstStyle/>
+          <a:p>
+            <a:endParaRPr lang="en-US"/>
+          </a:p>
+        </p:txBody>
       </p:sp>
       <p:sp>
         <p:nvSpPr>
@@ -5830,11 +5757,11 @@
           <a:bodyPr wrap="square" lIns="0" tIns="0" rIns="0" bIns="0" rtlCol="0" anchor="ctr"/>
           <a:lstStyle/>
           <a:p>
-            <a:pPr indent="0" marL="0">
-              <a:buNone/>
-            </a:pPr>
-            <a:r>
-              <a:rPr lang="en-US" sz="1100" b="1" spc="150" kern="0" dirty="0">
+            <a:pPr marL="0" indent="0">
+              <a:buNone/>
+            </a:pPr>
+            <a:r>
+              <a:rPr lang="en-US" sz="1100" b="1" kern="0" spc="150" dirty="0">
                 <a:solidFill>
                   <a:srgbClr val="2C8C8C"/>
                 </a:solidFill>
@@ -5869,7 +5796,7 @@
           <a:bodyPr wrap="square" lIns="0" tIns="0" rIns="0" bIns="0" rtlCol="0" anchor="t"/>
           <a:lstStyle/>
           <a:p>
-            <a:pPr indent="0" marL="0">
+            <a:pPr marL="0" indent="0">
               <a:lnSpc>
                 <a:spcPct val="110000"/>
               </a:lnSpc>
@@ -5890,7 +5817,7 @@
             <a:endParaRPr lang="en-US" sz="1300" dirty="0"/>
           </a:p>
           <a:p>
-            <a:pPr indent="0" marL="0">
+            <a:pPr marL="0" indent="0">
               <a:lnSpc>
                 <a:spcPct val="110000"/>
               </a:lnSpc>
@@ -5913,7 +5840,7 @@
             <a:endParaRPr lang="en-US" sz="1300" dirty="0"/>
           </a:p>
           <a:p>
-            <a:pPr indent="0" marL="0">
+            <a:pPr marL="0" indent="0">
               <a:lnSpc>
                 <a:spcPct val="110000"/>
               </a:lnSpc>
@@ -5934,7 +5861,7 @@
             <a:endParaRPr lang="en-US" sz="1300" dirty="0"/>
           </a:p>
           <a:p>
-            <a:pPr indent="0" marL="0">
+            <a:pPr marL="0" indent="0">
               <a:lnSpc>
                 <a:spcPct val="110000"/>
               </a:lnSpc>
@@ -5976,7 +5903,7 @@
           <a:bodyPr wrap="square" lIns="0" tIns="0" rIns="0" bIns="0" rtlCol="0" anchor="ctr"/>
           <a:lstStyle/>
           <a:p>
-            <a:pPr algn="l" indent="0" marL="0">
+            <a:pPr marL="0" indent="0" algn="l">
               <a:buNone/>
             </a:pPr>
             <a:r>
@@ -6015,7 +5942,7 @@
           <a:bodyPr wrap="square" lIns="0" tIns="0" rIns="0" bIns="0" rtlCol="0" anchor="ctr"/>
           <a:lstStyle/>
           <a:p>
-            <a:pPr algn="r" indent="0" marL="0">
+            <a:pPr marL="0" indent="0" algn="r">
               <a:buNone/>
             </a:pPr>
             <a:r>
@@ -6049,6 +5976,7 @@
         <a:solidFill>
           <a:srgbClr val="1B2A4A"/>
         </a:solidFill>
+        <a:effectLst/>
       </p:bgPr>
     </p:bg>
     <p:spTree>
@@ -6084,6 +6012,13 @@
           </a:solidFill>
           <a:ln/>
         </p:spPr>
+        <p:txBody>
+          <a:bodyPr/>
+          <a:lstStyle/>
+          <a:p>
+            <a:endParaRPr lang="en-US"/>
+          </a:p>
+        </p:txBody>
       </p:sp>
       <p:sp>
         <p:nvSpPr>
@@ -6104,6 +6039,13 @@
           </a:solidFill>
           <a:ln/>
         </p:spPr>
+        <p:txBody>
+          <a:bodyPr/>
+          <a:lstStyle/>
+          <a:p>
+            <a:endParaRPr lang="en-US"/>
+          </a:p>
+        </p:txBody>
       </p:sp>
       <p:sp>
         <p:nvSpPr>
@@ -6124,17 +6066,24 @@
           </a:solidFill>
           <a:ln/>
         </p:spPr>
+        <p:txBody>
+          <a:bodyPr/>
+          <a:lstStyle/>
+          <a:p>
+            <a:endParaRPr lang="en-US"/>
+          </a:p>
+        </p:txBody>
       </p:sp>
       <p:pic>
         <p:nvPicPr>
-          <p:cNvPr id="5" name="Image 0" descr="preencoded.png">    </p:cNvPr>
+          <p:cNvPr id="5" name="Image 0" descr="preencoded.png"/>
           <p:cNvPicPr>
             <a:picLocks noChangeAspect="1"/>
           </p:cNvPicPr>
           <p:nvPr/>
         </p:nvPicPr>
         <p:blipFill>
-          <a:blip r:embed="rId1"/>
+          <a:blip r:embed="rId3"/>
           <a:stretch>
             <a:fillRect/>
           </a:stretch>
@@ -6170,11 +6119,11 @@
           <a:bodyPr wrap="square" lIns="0" tIns="0" rIns="0" bIns="0" rtlCol="0" anchor="ctr"/>
           <a:lstStyle/>
           <a:p>
-            <a:pPr indent="0" marL="0">
-              <a:buNone/>
-            </a:pPr>
-            <a:r>
-              <a:rPr lang="en-US" sz="1500" b="1" spc="200" kern="0" dirty="0">
+            <a:pPr marL="0" indent="0">
+              <a:buNone/>
+            </a:pPr>
+            <a:r>
+              <a:rPr lang="en-US" sz="1500" b="1" kern="0" spc="200" dirty="0">
                 <a:solidFill>
                   <a:srgbClr val="5FB3B3"/>
                 </a:solidFill>
@@ -6209,7 +6158,7 @@
           <a:bodyPr wrap="square" lIns="0" tIns="0" rIns="0" bIns="0" rtlCol="0" anchor="ctr"/>
           <a:lstStyle/>
           <a:p>
-            <a:pPr indent="0" marL="0">
+            <a:pPr marL="0" indent="0">
               <a:lnSpc>
                 <a:spcPct val="100000"/>
               </a:lnSpc>
@@ -6251,7 +6200,7 @@
           <a:bodyPr wrap="square" lIns="0" tIns="0" rIns="0" bIns="0" rtlCol="0" anchor="ctr"/>
           <a:lstStyle/>
           <a:p>
-            <a:pPr indent="0" marL="0">
+            <a:pPr marL="0" indent="0">
               <a:lnSpc>
                 <a:spcPct val="115000"/>
               </a:lnSpc>
@@ -6293,7 +6242,7 @@
           <a:bodyPr wrap="square" lIns="0" tIns="0" rIns="0" bIns="0" rtlCol="0" anchor="ctr"/>
           <a:lstStyle/>
           <a:p>
-            <a:pPr algn="l" indent="0" marL="0">
+            <a:pPr marL="0" indent="0" algn="l">
               <a:buNone/>
             </a:pPr>
             <a:r>
@@ -6332,7 +6281,7 @@
           <a:bodyPr wrap="square" lIns="0" tIns="0" rIns="0" bIns="0" rtlCol="0" anchor="ctr"/>
           <a:lstStyle/>
           <a:p>
-            <a:pPr algn="r" indent="0" marL="0">
+            <a:pPr marL="0" indent="0" algn="r">
               <a:buNone/>
             </a:pPr>
             <a:r>
@@ -6366,6 +6315,7 @@
         <a:solidFill>
           <a:srgbClr val="F5F7FA"/>
         </a:solidFill>
+        <a:effectLst/>
       </p:bgPr>
     </p:bg>
     <p:spTree>
@@ -6401,6 +6351,13 @@
           </a:solidFill>
           <a:ln/>
         </p:spPr>
+        <p:txBody>
+          <a:bodyPr/>
+          <a:lstStyle/>
+          <a:p>
+            <a:endParaRPr lang="en-US"/>
+          </a:p>
+        </p:txBody>
       </p:sp>
       <p:sp>
         <p:nvSpPr>
@@ -6423,11 +6380,11 @@
           <a:bodyPr wrap="square" lIns="0" tIns="0" rIns="0" bIns="0" rtlCol="0" anchor="ctr"/>
           <a:lstStyle/>
           <a:p>
-            <a:pPr indent="0" marL="0">
-              <a:buNone/>
-            </a:pPr>
-            <a:r>
-              <a:rPr lang="en-US" sz="1200" b="1" spc="200" kern="0" dirty="0">
+            <a:pPr marL="0" indent="0">
+              <a:buNone/>
+            </a:pPr>
+            <a:r>
+              <a:rPr lang="en-US" sz="1200" b="1" kern="0" spc="200" dirty="0">
                 <a:solidFill>
                   <a:srgbClr val="2C8C8C"/>
                 </a:solidFill>
@@ -6462,7 +6419,7 @@
           <a:bodyPr wrap="square" lIns="0" tIns="0" rIns="0" bIns="0" rtlCol="0" anchor="ctr"/>
           <a:lstStyle/>
           <a:p>
-            <a:pPr indent="0" marL="0">
+            <a:pPr marL="0" indent="0">
               <a:buNone/>
             </a:pPr>
             <a:r>
@@ -6501,13 +6458,20 @@
           </a:solidFill>
           <a:ln/>
           <a:effectLst>
-            <a:outerShdw sx="100000" sy="100000" kx="0" ky="0" algn="bl" rotWithShape="0" blurRad="88900" dist="38100" dir="8100000">
+            <a:outerShdw blurRad="88900" dist="38100" dir="8100000" algn="bl" rotWithShape="0">
               <a:srgbClr val="000000">
                 <a:alpha val="16000"/>
               </a:srgbClr>
             </a:outerShdw>
           </a:effectLst>
         </p:spPr>
+        <p:txBody>
+          <a:bodyPr/>
+          <a:lstStyle/>
+          <a:p>
+            <a:endParaRPr lang="en-US"/>
+          </a:p>
+        </p:txBody>
       </p:sp>
       <p:sp>
         <p:nvSpPr>
@@ -6530,11 +6494,11 @@
           <a:bodyPr wrap="square" lIns="0" tIns="0" rIns="0" bIns="0" rtlCol="0" anchor="ctr"/>
           <a:lstStyle/>
           <a:p>
-            <a:pPr indent="0" marL="0">
-              <a:buNone/>
-            </a:pPr>
-            <a:r>
-              <a:rPr lang="en-US" sz="1000" b="1" spc="150" kern="0" dirty="0">
+            <a:pPr marL="0" indent="0">
+              <a:buNone/>
+            </a:pPr>
+            <a:r>
+              <a:rPr lang="en-US" sz="1000" b="1" kern="0" spc="150" dirty="0">
                 <a:solidFill>
                   <a:srgbClr val="E8A33D"/>
                 </a:solidFill>
@@ -6569,7 +6533,7 @@
           <a:bodyPr wrap="square" lIns="0" tIns="0" rIns="0" bIns="0" rtlCol="0" anchor="t"/>
           <a:lstStyle/>
           <a:p>
-            <a:pPr indent="0" marL="0">
+            <a:pPr marL="0" indent="0">
               <a:lnSpc>
                 <a:spcPct val="108000"/>
               </a:lnSpc>
@@ -6591,7 +6555,7 @@
             <a:endParaRPr lang="en-US" sz="1250" dirty="0"/>
           </a:p>
           <a:p>
-            <a:pPr indent="0" marL="0">
+            <a:pPr marL="0" indent="0">
               <a:lnSpc>
                 <a:spcPct val="108000"/>
               </a:lnSpc>
@@ -6611,7 +6575,7 @@
             <a:endParaRPr lang="en-US" sz="1250" dirty="0"/>
           </a:p>
           <a:p>
-            <a:pPr indent="0" marL="0">
+            <a:pPr marL="0" indent="0">
               <a:lnSpc>
                 <a:spcPct val="108000"/>
               </a:lnSpc>
@@ -6631,7 +6595,7 @@
             <a:endParaRPr lang="en-US" sz="1250" dirty="0"/>
           </a:p>
           <a:p>
-            <a:pPr indent="0" marL="0">
+            <a:pPr marL="0" indent="0">
               <a:lnSpc>
                 <a:spcPct val="108000"/>
               </a:lnSpc>
@@ -6673,13 +6637,20 @@
           </a:solidFill>
           <a:ln/>
           <a:effectLst>
-            <a:outerShdw sx="100000" sy="100000" kx="0" ky="0" algn="bl" rotWithShape="0" blurRad="88900" dist="38100" dir="8100000">
+            <a:outerShdw blurRad="88900" dist="38100" dir="8100000" algn="bl" rotWithShape="0">
               <a:srgbClr val="000000">
                 <a:alpha val="16000"/>
               </a:srgbClr>
             </a:outerShdw>
           </a:effectLst>
         </p:spPr>
+        <p:txBody>
+          <a:bodyPr/>
+          <a:lstStyle/>
+          <a:p>
+            <a:endParaRPr lang="en-US"/>
+          </a:p>
+        </p:txBody>
       </p:sp>
       <p:sp>
         <p:nvSpPr>
@@ -6702,11 +6673,11 @@
           <a:bodyPr wrap="square" lIns="0" tIns="0" rIns="0" bIns="0" rtlCol="0" anchor="ctr"/>
           <a:lstStyle/>
           <a:p>
-            <a:pPr indent="0" marL="0">
-              <a:buNone/>
-            </a:pPr>
-            <a:r>
-              <a:rPr lang="en-US" sz="1000" b="1" spc="150" kern="0" dirty="0">
+            <a:pPr marL="0" indent="0">
+              <a:buNone/>
+            </a:pPr>
+            <a:r>
+              <a:rPr lang="en-US" sz="1000" b="1" kern="0" spc="150" dirty="0">
                 <a:solidFill>
                   <a:srgbClr val="E8A33D"/>
                 </a:solidFill>
@@ -6741,7 +6712,7 @@
           <a:bodyPr wrap="square" lIns="0" tIns="0" rIns="0" bIns="0" rtlCol="0" anchor="t"/>
           <a:lstStyle/>
           <a:p>
-            <a:pPr indent="0" marL="0">
+            <a:pPr marL="0" indent="0">
               <a:lnSpc>
                 <a:spcPct val="108000"/>
               </a:lnSpc>
@@ -6762,7 +6733,7 @@
             <a:endParaRPr lang="en-US" sz="1250" dirty="0"/>
           </a:p>
           <a:p>
-            <a:pPr indent="0" marL="0">
+            <a:pPr marL="0" indent="0">
               <a:lnSpc>
                 <a:spcPct val="108000"/>
               </a:lnSpc>
@@ -6809,13 +6780,20 @@
             <a:prstDash val="solid"/>
           </a:ln>
           <a:effectLst>
-            <a:outerShdw sx="100000" sy="100000" kx="0" ky="0" algn="bl" rotWithShape="0" blurRad="88900" dist="38100" dir="8100000">
+            <a:outerShdw blurRad="88900" dist="38100" dir="8100000" algn="bl" rotWithShape="0">
               <a:srgbClr val="000000">
                 <a:alpha val="16000"/>
               </a:srgbClr>
             </a:outerShdw>
           </a:effectLst>
         </p:spPr>
+        <p:txBody>
+          <a:bodyPr/>
+          <a:lstStyle/>
+          <a:p>
+            <a:endParaRPr lang="en-US"/>
+          </a:p>
+        </p:txBody>
       </p:sp>
       <p:sp>
         <p:nvSpPr>
@@ -6838,7 +6816,7 @@
           <a:bodyPr wrap="square" lIns="0" tIns="0" rIns="0" bIns="0" rtlCol="0" anchor="ctr"/>
           <a:lstStyle/>
           <a:p>
-            <a:pPr indent="0" marL="0">
+            <a:pPr marL="0" indent="0">
               <a:buNone/>
             </a:pPr>
             <a:r>
@@ -6875,6 +6853,13 @@
           </a:solidFill>
           <a:ln/>
         </p:spPr>
+        <p:txBody>
+          <a:bodyPr/>
+          <a:lstStyle/>
+          <a:p>
+            <a:endParaRPr lang="en-US"/>
+          </a:p>
+        </p:txBody>
       </p:sp>
       <p:sp>
         <p:nvSpPr>
@@ -6897,7 +6882,7 @@
           <a:bodyPr wrap="square" lIns="0" tIns="0" rIns="0" bIns="0" rtlCol="0" anchor="ctr"/>
           <a:lstStyle/>
           <a:p>
-            <a:pPr indent="0" marL="0">
+            <a:pPr marL="0" indent="0">
               <a:buNone/>
             </a:pPr>
             <a:r>
@@ -6936,7 +6921,7 @@
           <a:bodyPr wrap="square" lIns="0" tIns="0" rIns="0" bIns="0" rtlCol="0" anchor="ctr"/>
           <a:lstStyle/>
           <a:p>
-            <a:pPr indent="0" marL="0">
+            <a:pPr marL="0" indent="0">
               <a:lnSpc>
                 <a:spcPct val="108000"/>
               </a:lnSpc>
@@ -6976,6 +6961,13 @@
           </a:solidFill>
           <a:ln/>
         </p:spPr>
+        <p:txBody>
+          <a:bodyPr/>
+          <a:lstStyle/>
+          <a:p>
+            <a:endParaRPr lang="en-US"/>
+          </a:p>
+        </p:txBody>
       </p:sp>
       <p:sp>
         <p:nvSpPr>
@@ -6998,7 +6990,7 @@
           <a:bodyPr wrap="square" lIns="0" tIns="0" rIns="0" bIns="0" rtlCol="0" anchor="ctr"/>
           <a:lstStyle/>
           <a:p>
-            <a:pPr indent="0" marL="0">
+            <a:pPr marL="0" indent="0">
               <a:buNone/>
             </a:pPr>
             <a:r>
@@ -7037,7 +7029,7 @@
           <a:bodyPr wrap="square" lIns="0" tIns="0" rIns="0" bIns="0" rtlCol="0" anchor="ctr"/>
           <a:lstStyle/>
           <a:p>
-            <a:pPr indent="0" marL="0">
+            <a:pPr marL="0" indent="0">
               <a:lnSpc>
                 <a:spcPct val="108000"/>
               </a:lnSpc>
@@ -7077,6 +7069,13 @@
           </a:solidFill>
           <a:ln/>
         </p:spPr>
+        <p:txBody>
+          <a:bodyPr/>
+          <a:lstStyle/>
+          <a:p>
+            <a:endParaRPr lang="en-US"/>
+          </a:p>
+        </p:txBody>
       </p:sp>
       <p:sp>
         <p:nvSpPr>
@@ -7099,7 +7098,7 @@
           <a:bodyPr wrap="square" lIns="0" tIns="0" rIns="0" bIns="0" rtlCol="0" anchor="ctr"/>
           <a:lstStyle/>
           <a:p>
-            <a:pPr indent="0" marL="0">
+            <a:pPr marL="0" indent="0">
               <a:buNone/>
             </a:pPr>
             <a:r>
@@ -7138,7 +7137,7 @@
           <a:bodyPr wrap="square" lIns="0" tIns="0" rIns="0" bIns="0" rtlCol="0" anchor="ctr"/>
           <a:lstStyle/>
           <a:p>
-            <a:pPr indent="0" marL="0">
+            <a:pPr marL="0" indent="0">
               <a:lnSpc>
                 <a:spcPct val="108000"/>
               </a:lnSpc>
@@ -7180,7 +7179,7 @@
           <a:bodyPr wrap="square" lIns="0" tIns="0" rIns="0" bIns="0" rtlCol="0" anchor="ctr"/>
           <a:lstStyle/>
           <a:p>
-            <a:pPr algn="l" indent="0" marL="0">
+            <a:pPr marL="0" indent="0" algn="l">
               <a:buNone/>
             </a:pPr>
             <a:r>
@@ -7219,7 +7218,7 @@
           <a:bodyPr wrap="square" lIns="0" tIns="0" rIns="0" bIns="0" rtlCol="0" anchor="ctr"/>
           <a:lstStyle/>
           <a:p>
-            <a:pPr algn="r" indent="0" marL="0">
+            <a:pPr marL="0" indent="0" algn="r">
               <a:buNone/>
             </a:pPr>
             <a:r>
@@ -7253,6 +7252,7 @@
         <a:solidFill>
           <a:srgbClr val="F5F7FA"/>
         </a:solidFill>
+        <a:effectLst/>
       </p:bgPr>
     </p:bg>
     <p:spTree>
@@ -7288,6 +7288,13 @@
           </a:solidFill>
           <a:ln/>
         </p:spPr>
+        <p:txBody>
+          <a:bodyPr/>
+          <a:lstStyle/>
+          <a:p>
+            <a:endParaRPr lang="en-US"/>
+          </a:p>
+        </p:txBody>
       </p:sp>
       <p:sp>
         <p:nvSpPr>
@@ -7310,11 +7317,11 @@
           <a:bodyPr wrap="square" lIns="0" tIns="0" rIns="0" bIns="0" rtlCol="0" anchor="ctr"/>
           <a:lstStyle/>
           <a:p>
-            <a:pPr indent="0" marL="0">
-              <a:buNone/>
-            </a:pPr>
-            <a:r>
-              <a:rPr lang="en-US" sz="1200" b="1" spc="200" kern="0" dirty="0">
+            <a:pPr marL="0" indent="0">
+              <a:buNone/>
+            </a:pPr>
+            <a:r>
+              <a:rPr lang="en-US" sz="1200" b="1" kern="0" spc="200" dirty="0">
                 <a:solidFill>
                   <a:srgbClr val="2C8C8C"/>
                 </a:solidFill>
@@ -7349,7 +7356,7 @@
           <a:bodyPr wrap="square" lIns="0" tIns="0" rIns="0" bIns="0" rtlCol="0" anchor="ctr"/>
           <a:lstStyle/>
           <a:p>
-            <a:pPr indent="0" marL="0">
+            <a:pPr marL="0" indent="0">
               <a:buNone/>
             </a:pPr>
             <a:r>
@@ -7393,13 +7400,20 @@
             <a:prstDash val="solid"/>
           </a:ln>
           <a:effectLst>
-            <a:outerShdw sx="100000" sy="100000" kx="0" ky="0" algn="bl" rotWithShape="0" blurRad="88900" dist="38100" dir="8100000">
+            <a:outerShdw blurRad="88900" dist="38100" dir="8100000" algn="bl" rotWithShape="0">
               <a:srgbClr val="000000">
                 <a:alpha val="16000"/>
               </a:srgbClr>
             </a:outerShdw>
           </a:effectLst>
         </p:spPr>
+        <p:txBody>
+          <a:bodyPr/>
+          <a:lstStyle/>
+          <a:p>
+            <a:endParaRPr lang="en-US"/>
+          </a:p>
+        </p:txBody>
       </p:sp>
       <p:sp>
         <p:nvSpPr>
@@ -7420,17 +7434,24 @@
           </a:solidFill>
           <a:ln/>
         </p:spPr>
+        <p:txBody>
+          <a:bodyPr/>
+          <a:lstStyle/>
+          <a:p>
+            <a:endParaRPr lang="en-US"/>
+          </a:p>
+        </p:txBody>
       </p:sp>
       <p:pic>
         <p:nvPicPr>
-          <p:cNvPr id="7" name="Image 0" descr="preencoded.png">    </p:cNvPr>
+          <p:cNvPr id="7" name="Image 0" descr="preencoded.png"/>
           <p:cNvPicPr>
             <a:picLocks noChangeAspect="1"/>
           </p:cNvPicPr>
           <p:nvPr/>
         </p:nvPicPr>
         <p:blipFill>
-          <a:blip r:embed="rId1"/>
+          <a:blip r:embed="rId3"/>
           <a:stretch>
             <a:fillRect/>
           </a:stretch>
@@ -7466,7 +7487,7 @@
           <a:bodyPr wrap="square" lIns="0" tIns="0" rIns="0" bIns="0" rtlCol="0" anchor="ctr"/>
           <a:lstStyle/>
           <a:p>
-            <a:pPr indent="0" marL="0">
+            <a:pPr marL="0" indent="0">
               <a:buNone/>
             </a:pPr>
             <a:r>
@@ -7505,13 +7526,20 @@
           </a:solidFill>
           <a:ln/>
           <a:effectLst>
-            <a:outerShdw sx="100000" sy="100000" kx="0" ky="0" algn="bl" rotWithShape="0" blurRad="88900" dist="38100" dir="8100000">
+            <a:outerShdw blurRad="88900" dist="38100" dir="8100000" algn="bl" rotWithShape="0">
               <a:srgbClr val="000000">
                 <a:alpha val="16000"/>
               </a:srgbClr>
             </a:outerShdw>
           </a:effectLst>
         </p:spPr>
+        <p:txBody>
+          <a:bodyPr/>
+          <a:lstStyle/>
+          <a:p>
+            <a:endParaRPr lang="en-US"/>
+          </a:p>
+        </p:txBody>
       </p:sp>
       <p:sp>
         <p:nvSpPr>
@@ -7534,11 +7562,11 @@
           <a:bodyPr wrap="square" lIns="0" tIns="0" rIns="0" bIns="0" rtlCol="0" anchor="ctr"/>
           <a:lstStyle/>
           <a:p>
-            <a:pPr indent="0" marL="0">
-              <a:buNone/>
-            </a:pPr>
-            <a:r>
-              <a:rPr lang="en-US" sz="1000" b="1" spc="150" kern="0" dirty="0">
+            <a:pPr marL="0" indent="0">
+              <a:buNone/>
+            </a:pPr>
+            <a:r>
+              <a:rPr lang="en-US" sz="1000" b="1" kern="0" spc="150" dirty="0">
                 <a:solidFill>
                   <a:srgbClr val="E8A33D"/>
                 </a:solidFill>
@@ -7573,7 +7601,7 @@
           <a:bodyPr wrap="square" lIns="0" tIns="0" rIns="0" bIns="0" rtlCol="0" anchor="t"/>
           <a:lstStyle/>
           <a:p>
-            <a:pPr indent="0" marL="0">
+            <a:pPr marL="0" indent="0">
               <a:lnSpc>
                 <a:spcPct val="108000"/>
               </a:lnSpc>
@@ -7593,7 +7621,7 @@
             <a:endParaRPr lang="en-US" sz="1250" dirty="0"/>
           </a:p>
           <a:p>
-            <a:pPr indent="0" marL="0">
+            <a:pPr marL="0" indent="0">
               <a:lnSpc>
                 <a:spcPct val="108000"/>
               </a:lnSpc>
@@ -7613,7 +7641,7 @@
             <a:endParaRPr lang="en-US" sz="1250" dirty="0"/>
           </a:p>
           <a:p>
-            <a:pPr indent="0" marL="0">
+            <a:pPr marL="0" indent="0">
               <a:lnSpc>
                 <a:spcPct val="108000"/>
               </a:lnSpc>
@@ -7622,7 +7650,7 @@
             <a:endParaRPr lang="en-US" sz="1250" dirty="0"/>
           </a:p>
           <a:p>
-            <a:pPr indent="0" marL="0">
+            <a:pPr marL="0" indent="0">
               <a:lnSpc>
                 <a:spcPct val="108000"/>
               </a:lnSpc>
@@ -7664,7 +7692,7 @@
           <a:bodyPr wrap="square" lIns="0" tIns="0" rIns="0" bIns="0" rtlCol="0" anchor="t"/>
           <a:lstStyle/>
           <a:p>
-            <a:pPr indent="0" marL="0">
+            <a:pPr marL="0" indent="0">
               <a:lnSpc>
                 <a:spcPct val="112000"/>
               </a:lnSpc>
@@ -7681,12 +7709,6 @@
               </a:rPr>
               <a:t>Claude spots the problem </a:t>
             </a:r>
-            <a:pPr indent="0" marL="0">
-              <a:lnSpc>
-                <a:spcPct val="112000"/>
-              </a:lnSpc>
-              <a:buNone/>
-            </a:pPr>
             <a:r>
               <a:rPr lang="en-US" sz="1350" b="1" dirty="0">
                 <a:solidFill>
@@ -7698,12 +7720,6 @@
               </a:rPr>
               <a:t>(you can't multiply by a text word), </a:t>
             </a:r>
-            <a:pPr indent="0" marL="0">
-              <a:lnSpc>
-                <a:spcPct val="112000"/>
-              </a:lnSpc>
-              <a:buNone/>
-            </a:pPr>
             <a:r>
               <a:rPr lang="en-US" sz="1350" dirty="0">
                 <a:solidFill>
@@ -7745,13 +7761,20 @@
             <a:prstDash val="solid"/>
           </a:ln>
           <a:effectLst>
-            <a:outerShdw sx="100000" sy="100000" kx="0" ky="0" algn="bl" rotWithShape="0" blurRad="88900" dist="38100" dir="8100000">
+            <a:outerShdw blurRad="88900" dist="38100" dir="8100000" algn="bl" rotWithShape="0">
               <a:srgbClr val="000000">
                 <a:alpha val="16000"/>
               </a:srgbClr>
             </a:outerShdw>
           </a:effectLst>
         </p:spPr>
+        <p:txBody>
+          <a:bodyPr/>
+          <a:lstStyle/>
+          <a:p>
+            <a:endParaRPr lang="en-US"/>
+          </a:p>
+        </p:txBody>
       </p:sp>
       <p:sp>
         <p:nvSpPr>
@@ -7772,17 +7795,24 @@
           </a:solidFill>
           <a:ln/>
         </p:spPr>
+        <p:txBody>
+          <a:bodyPr/>
+          <a:lstStyle/>
+          <a:p>
+            <a:endParaRPr lang="en-US"/>
+          </a:p>
+        </p:txBody>
       </p:sp>
       <p:pic>
         <p:nvPicPr>
-          <p:cNvPr id="15" name="Image 1" descr="preencoded.png">    </p:cNvPr>
+          <p:cNvPr id="15" name="Image 1" descr="preencoded.png"/>
           <p:cNvPicPr>
             <a:picLocks noChangeAspect="1"/>
           </p:cNvPicPr>
           <p:nvPr/>
         </p:nvPicPr>
         <p:blipFill>
-          <a:blip r:embed="rId2"/>
+          <a:blip r:embed="rId4"/>
           <a:stretch>
             <a:fillRect/>
           </a:stretch>
@@ -7818,7 +7848,7 @@
           <a:bodyPr wrap="square" lIns="0" tIns="0" rIns="0" bIns="0" rtlCol="0" anchor="ctr"/>
           <a:lstStyle/>
           <a:p>
-            <a:pPr indent="0" marL="0">
+            <a:pPr marL="0" indent="0">
               <a:buNone/>
             </a:pPr>
             <a:r>
@@ -7857,13 +7887,20 @@
           </a:solidFill>
           <a:ln/>
           <a:effectLst>
-            <a:outerShdw sx="100000" sy="100000" kx="0" ky="0" algn="bl" rotWithShape="0" blurRad="88900" dist="38100" dir="8100000">
+            <a:outerShdw blurRad="88900" dist="38100" dir="8100000" algn="bl" rotWithShape="0">
               <a:srgbClr val="000000">
                 <a:alpha val="16000"/>
               </a:srgbClr>
             </a:outerShdw>
           </a:effectLst>
         </p:spPr>
+        <p:txBody>
+          <a:bodyPr/>
+          <a:lstStyle/>
+          <a:p>
+            <a:endParaRPr lang="en-US"/>
+          </a:p>
+        </p:txBody>
       </p:sp>
       <p:sp>
         <p:nvSpPr>
@@ -7886,11 +7923,11 @@
           <a:bodyPr wrap="square" lIns="0" tIns="0" rIns="0" bIns="0" rtlCol="0" anchor="ctr"/>
           <a:lstStyle/>
           <a:p>
-            <a:pPr indent="0" marL="0">
-              <a:buNone/>
-            </a:pPr>
-            <a:r>
-              <a:rPr lang="en-US" sz="1000" b="1" spc="150" kern="0" dirty="0">
+            <a:pPr marL="0" indent="0">
+              <a:buNone/>
+            </a:pPr>
+            <a:r>
+              <a:rPr lang="en-US" sz="1000" b="1" kern="0" spc="150" dirty="0">
                 <a:solidFill>
                   <a:srgbClr val="E8A33D"/>
                 </a:solidFill>
@@ -7925,7 +7962,7 @@
           <a:bodyPr wrap="square" lIns="0" tIns="0" rIns="0" bIns="0" rtlCol="0" anchor="t"/>
           <a:lstStyle/>
           <a:p>
-            <a:pPr indent="0" marL="0">
+            <a:pPr marL="0" indent="0">
               <a:lnSpc>
                 <a:spcPct val="108000"/>
               </a:lnSpc>
@@ -7945,7 +7982,7 @@
             <a:endParaRPr lang="en-US" sz="1250" dirty="0"/>
           </a:p>
           <a:p>
-            <a:pPr indent="0" marL="0">
+            <a:pPr marL="0" indent="0">
               <a:lnSpc>
                 <a:spcPct val="108000"/>
               </a:lnSpc>
@@ -7965,7 +8002,7 @@
             <a:endParaRPr lang="en-US" sz="1250" dirty="0"/>
           </a:p>
           <a:p>
-            <a:pPr indent="0" marL="0">
+            <a:pPr marL="0" indent="0">
               <a:lnSpc>
                 <a:spcPct val="108000"/>
               </a:lnSpc>
@@ -7974,7 +8011,7 @@
             <a:endParaRPr lang="en-US" sz="1250" dirty="0"/>
           </a:p>
           <a:p>
-            <a:pPr indent="0" marL="0">
+            <a:pPr marL="0" indent="0">
               <a:lnSpc>
                 <a:spcPct val="108000"/>
               </a:lnSpc>
@@ -8016,7 +8053,7 @@
           <a:bodyPr wrap="square" lIns="0" tIns="0" rIns="0" bIns="0" rtlCol="0" anchor="t"/>
           <a:lstStyle/>
           <a:p>
-            <a:pPr indent="0" marL="0">
+            <a:pPr marL="0" indent="0">
               <a:lnSpc>
                 <a:spcPct val="112000"/>
               </a:lnSpc>
@@ -8033,12 +8070,6 @@
               </a:rPr>
               <a:t>Perfect for the spreadsheet you inherited </a:t>
             </a:r>
-            <a:pPr indent="0" marL="0">
-              <a:lnSpc>
-                <a:spcPct val="112000"/>
-              </a:lnSpc>
-              <a:buNone/>
-            </a:pPr>
             <a:r>
               <a:rPr lang="en-US" sz="1350" b="1" dirty="0">
                 <a:solidFill>
@@ -8050,12 +8081,6 @@
               </a:rPr>
               <a:t>and are afraid to touch. </a:t>
             </a:r>
-            <a:pPr indent="0" marL="0">
-              <a:lnSpc>
-                <a:spcPct val="112000"/>
-              </a:lnSpc>
-              <a:buNone/>
-            </a:pPr>
             <a:r>
               <a:rPr lang="en-US" sz="1350" dirty="0">
                 <a:solidFill>
@@ -8092,7 +8117,7 @@
           <a:bodyPr wrap="square" lIns="0" tIns="0" rIns="0" bIns="0" rtlCol="0" anchor="ctr"/>
           <a:lstStyle/>
           <a:p>
-            <a:pPr algn="l" indent="0" marL="0">
+            <a:pPr marL="0" indent="0" algn="l">
               <a:buNone/>
             </a:pPr>
             <a:r>
@@ -8131,7 +8156,7 @@
           <a:bodyPr wrap="square" lIns="0" tIns="0" rIns="0" bIns="0" rtlCol="0" anchor="ctr"/>
           <a:lstStyle/>
           <a:p>
-            <a:pPr algn="r" indent="0" marL="0">
+            <a:pPr marL="0" indent="0" algn="r">
               <a:buNone/>
             </a:pPr>
             <a:r>
@@ -8165,6 +8190,7 @@
         <a:solidFill>
           <a:srgbClr val="F5F7FA"/>
         </a:solidFill>
+        <a:effectLst/>
       </p:bgPr>
     </p:bg>
     <p:spTree>
@@ -8200,6 +8226,13 @@
           </a:solidFill>
           <a:ln/>
         </p:spPr>
+        <p:txBody>
+          <a:bodyPr/>
+          <a:lstStyle/>
+          <a:p>
+            <a:endParaRPr lang="en-US"/>
+          </a:p>
+        </p:txBody>
       </p:sp>
       <p:sp>
         <p:nvSpPr>
@@ -8222,11 +8255,11 @@
           <a:bodyPr wrap="square" lIns="0" tIns="0" rIns="0" bIns="0" rtlCol="0" anchor="ctr"/>
           <a:lstStyle/>
           <a:p>
-            <a:pPr indent="0" marL="0">
-              <a:buNone/>
-            </a:pPr>
-            <a:r>
-              <a:rPr lang="en-US" sz="1200" b="1" spc="200" kern="0" dirty="0">
+            <a:pPr marL="0" indent="0">
+              <a:buNone/>
+            </a:pPr>
+            <a:r>
+              <a:rPr lang="en-US" sz="1200" b="1" kern="0" spc="200" dirty="0">
                 <a:solidFill>
                   <a:srgbClr val="2C8C8C"/>
                 </a:solidFill>
@@ -8261,7 +8294,7 @@
           <a:bodyPr wrap="square" lIns="0" tIns="0" rIns="0" bIns="0" rtlCol="0" anchor="ctr"/>
           <a:lstStyle/>
           <a:p>
-            <a:pPr indent="0" marL="0">
+            <a:pPr marL="0" indent="0">
               <a:buNone/>
             </a:pPr>
             <a:r>
@@ -8300,7 +8333,7 @@
           <a:bodyPr wrap="square" lIns="0" tIns="0" rIns="0" bIns="0" rtlCol="0" anchor="ctr"/>
           <a:lstStyle/>
           <a:p>
-            <a:pPr indent="0" marL="0">
+            <a:pPr marL="0" indent="0">
               <a:buNone/>
             </a:pPr>
             <a:r>
@@ -8344,13 +8377,20 @@
             <a:prstDash val="solid"/>
           </a:ln>
           <a:effectLst>
-            <a:outerShdw sx="100000" sy="100000" kx="0" ky="0" algn="bl" rotWithShape="0" blurRad="88900" dist="38100" dir="8100000">
+            <a:outerShdw blurRad="88900" dist="38100" dir="8100000" algn="bl" rotWithShape="0">
               <a:srgbClr val="000000">
                 <a:alpha val="16000"/>
               </a:srgbClr>
             </a:outerShdw>
           </a:effectLst>
         </p:spPr>
+        <p:txBody>
+          <a:bodyPr/>
+          <a:lstStyle/>
+          <a:p>
+            <a:endParaRPr lang="en-US"/>
+          </a:p>
+        </p:txBody>
       </p:sp>
       <p:sp>
         <p:nvSpPr>
@@ -8371,17 +8411,24 @@
           </a:solidFill>
           <a:ln/>
         </p:spPr>
+        <p:txBody>
+          <a:bodyPr/>
+          <a:lstStyle/>
+          <a:p>
+            <a:endParaRPr lang="en-US"/>
+          </a:p>
+        </p:txBody>
       </p:sp>
       <p:pic>
         <p:nvPicPr>
-          <p:cNvPr id="8" name="Image 0" descr="preencoded.png">    </p:cNvPr>
+          <p:cNvPr id="8" name="Image 0" descr="preencoded.png"/>
           <p:cNvPicPr>
             <a:picLocks noChangeAspect="1"/>
           </p:cNvPicPr>
           <p:nvPr/>
         </p:nvPicPr>
         <p:blipFill>
-          <a:blip r:embed="rId1"/>
+          <a:blip r:embed="rId3"/>
           <a:stretch>
             <a:fillRect/>
           </a:stretch>
@@ -8417,7 +8464,7 @@
           <a:bodyPr wrap="square" lIns="0" tIns="0" rIns="0" bIns="0" rtlCol="0" anchor="ctr"/>
           <a:lstStyle/>
           <a:p>
-            <a:pPr indent="0" marL="0">
+            <a:pPr marL="0" indent="0">
               <a:buNone/>
             </a:pPr>
             <a:r>
@@ -8456,7 +8503,7 @@
           <a:bodyPr wrap="square" lIns="0" tIns="0" rIns="0" bIns="0" rtlCol="0" anchor="ctr"/>
           <a:lstStyle/>
           <a:p>
-            <a:pPr indent="0" marL="0">
+            <a:pPr marL="0" indent="0">
               <a:lnSpc>
                 <a:spcPct val="108000"/>
               </a:lnSpc>
@@ -8503,13 +8550,20 @@
             <a:prstDash val="solid"/>
           </a:ln>
           <a:effectLst>
-            <a:outerShdw sx="100000" sy="100000" kx="0" ky="0" algn="bl" rotWithShape="0" blurRad="88900" dist="38100" dir="8100000">
+            <a:outerShdw blurRad="88900" dist="38100" dir="8100000" algn="bl" rotWithShape="0">
               <a:srgbClr val="000000">
                 <a:alpha val="16000"/>
               </a:srgbClr>
             </a:outerShdw>
           </a:effectLst>
         </p:spPr>
+        <p:txBody>
+          <a:bodyPr/>
+          <a:lstStyle/>
+          <a:p>
+            <a:endParaRPr lang="en-US"/>
+          </a:p>
+        </p:txBody>
       </p:sp>
       <p:sp>
         <p:nvSpPr>
@@ -8530,17 +8584,24 @@
           </a:solidFill>
           <a:ln/>
         </p:spPr>
+        <p:txBody>
+          <a:bodyPr/>
+          <a:lstStyle/>
+          <a:p>
+            <a:endParaRPr lang="en-US"/>
+          </a:p>
+        </p:txBody>
       </p:sp>
       <p:pic>
         <p:nvPicPr>
-          <p:cNvPr id="13" name="Image 1" descr="preencoded.png">    </p:cNvPr>
+          <p:cNvPr id="13" name="Image 1" descr="preencoded.png"/>
           <p:cNvPicPr>
             <a:picLocks noChangeAspect="1"/>
           </p:cNvPicPr>
           <p:nvPr/>
         </p:nvPicPr>
         <p:blipFill>
-          <a:blip r:embed="rId2"/>
+          <a:blip r:embed="rId4"/>
           <a:stretch>
             <a:fillRect/>
           </a:stretch>
@@ -8576,7 +8637,7 @@
           <a:bodyPr wrap="square" lIns="0" tIns="0" rIns="0" bIns="0" rtlCol="0" anchor="ctr"/>
           <a:lstStyle/>
           <a:p>
-            <a:pPr indent="0" marL="0">
+            <a:pPr marL="0" indent="0">
               <a:buNone/>
             </a:pPr>
             <a:r>
@@ -8615,7 +8676,7 @@
           <a:bodyPr wrap="square" lIns="0" tIns="0" rIns="0" bIns="0" rtlCol="0" anchor="ctr"/>
           <a:lstStyle/>
           <a:p>
-            <a:pPr indent="0" marL="0">
+            <a:pPr marL="0" indent="0">
               <a:lnSpc>
                 <a:spcPct val="108000"/>
               </a:lnSpc>
@@ -8662,13 +8723,20 @@
             <a:prstDash val="solid"/>
           </a:ln>
           <a:effectLst>
-            <a:outerShdw sx="100000" sy="100000" kx="0" ky="0" algn="bl" rotWithShape="0" blurRad="88900" dist="38100" dir="8100000">
+            <a:outerShdw blurRad="88900" dist="38100" dir="8100000" algn="bl" rotWithShape="0">
               <a:srgbClr val="000000">
                 <a:alpha val="16000"/>
               </a:srgbClr>
             </a:outerShdw>
           </a:effectLst>
         </p:spPr>
+        <p:txBody>
+          <a:bodyPr/>
+          <a:lstStyle/>
+          <a:p>
+            <a:endParaRPr lang="en-US"/>
+          </a:p>
+        </p:txBody>
       </p:sp>
       <p:sp>
         <p:nvSpPr>
@@ -8689,17 +8757,24 @@
           </a:solidFill>
           <a:ln/>
         </p:spPr>
+        <p:txBody>
+          <a:bodyPr/>
+          <a:lstStyle/>
+          <a:p>
+            <a:endParaRPr lang="en-US"/>
+          </a:p>
+        </p:txBody>
       </p:sp>
       <p:pic>
         <p:nvPicPr>
-          <p:cNvPr id="18" name="Image 2" descr="preencoded.png">    </p:cNvPr>
+          <p:cNvPr id="18" name="Image 2" descr="preencoded.png"/>
           <p:cNvPicPr>
             <a:picLocks noChangeAspect="1"/>
           </p:cNvPicPr>
           <p:nvPr/>
         </p:nvPicPr>
         <p:blipFill>
-          <a:blip r:embed="rId3"/>
+          <a:blip r:embed="rId5"/>
           <a:stretch>
             <a:fillRect/>
           </a:stretch>
@@ -8735,7 +8810,7 @@
           <a:bodyPr wrap="square" lIns="0" tIns="0" rIns="0" bIns="0" rtlCol="0" anchor="ctr"/>
           <a:lstStyle/>
           <a:p>
-            <a:pPr indent="0" marL="0">
+            <a:pPr marL="0" indent="0">
               <a:buNone/>
             </a:pPr>
             <a:r>
@@ -8774,7 +8849,7 @@
           <a:bodyPr wrap="square" lIns="0" tIns="0" rIns="0" bIns="0" rtlCol="0" anchor="ctr"/>
           <a:lstStyle/>
           <a:p>
-            <a:pPr indent="0" marL="0">
+            <a:pPr marL="0" indent="0">
               <a:lnSpc>
                 <a:spcPct val="108000"/>
               </a:lnSpc>
@@ -8816,6 +8891,13 @@
           </a:solidFill>
           <a:ln/>
         </p:spPr>
+        <p:txBody>
+          <a:bodyPr/>
+          <a:lstStyle/>
+          <a:p>
+            <a:endParaRPr lang="en-US"/>
+          </a:p>
+        </p:txBody>
       </p:sp>
       <p:sp>
         <p:nvSpPr>
@@ -8838,11 +8920,11 @@
           <a:bodyPr wrap="square" lIns="0" tIns="0" rIns="0" bIns="0" rtlCol="0" anchor="ctr"/>
           <a:lstStyle/>
           <a:p>
-            <a:pPr indent="0" marL="0">
-              <a:buNone/>
-            </a:pPr>
-            <a:r>
-              <a:rPr lang="en-US" sz="1000" b="1" spc="150" kern="0" dirty="0">
+            <a:pPr marL="0" indent="0">
+              <a:buNone/>
+            </a:pPr>
+            <a:r>
+              <a:rPr lang="en-US" sz="1000" b="1" kern="0" spc="150" dirty="0">
                 <a:solidFill>
                   <a:srgbClr val="E8A33D"/>
                 </a:solidFill>
@@ -8877,7 +8959,7 @@
           <a:bodyPr wrap="square" lIns="0" tIns="0" rIns="0" bIns="0" rtlCol="0" anchor="t"/>
           <a:lstStyle/>
           <a:p>
-            <a:pPr indent="0" marL="0">
+            <a:pPr marL="0" indent="0">
               <a:lnSpc>
                 <a:spcPct val="110000"/>
               </a:lnSpc>
@@ -8894,12 +8976,6 @@
               </a:rPr>
               <a:t>“You're my [role]. Using the text below, write a [deliverable] for [audience]. </a:t>
             </a:r>
-            <a:pPr indent="0" marL="0">
-              <a:lnSpc>
-                <a:spcPct val="110000"/>
-              </a:lnSpc>
-              <a:buNone/>
-            </a:pPr>
             <a:r>
               <a:rPr lang="en-US" sz="1450" dirty="0">
                 <a:solidFill>
@@ -8936,7 +9012,7 @@
           <a:bodyPr wrap="square" lIns="0" tIns="0" rIns="0" bIns="0" rtlCol="0" anchor="ctr"/>
           <a:lstStyle/>
           <a:p>
-            <a:pPr algn="l" indent="0" marL="0">
+            <a:pPr marL="0" indent="0" algn="l">
               <a:buNone/>
             </a:pPr>
             <a:r>
@@ -8975,7 +9051,7 @@
           <a:bodyPr wrap="square" lIns="0" tIns="0" rIns="0" bIns="0" rtlCol="0" anchor="ctr"/>
           <a:lstStyle/>
           <a:p>
-            <a:pPr algn="r" indent="0" marL="0">
+            <a:pPr marL="0" indent="0" algn="r">
               <a:buNone/>
             </a:pPr>
             <a:r>
@@ -9009,6 +9085,7 @@
         <a:solidFill>
           <a:srgbClr val="F5F7FA"/>
         </a:solidFill>
+        <a:effectLst/>
       </p:bgPr>
     </p:bg>
     <p:spTree>
@@ -9044,6 +9121,13 @@
           </a:solidFill>
           <a:ln/>
         </p:spPr>
+        <p:txBody>
+          <a:bodyPr/>
+          <a:lstStyle/>
+          <a:p>
+            <a:endParaRPr lang="en-US"/>
+          </a:p>
+        </p:txBody>
       </p:sp>
       <p:sp>
         <p:nvSpPr>
@@ -9066,11 +9150,11 @@
           <a:bodyPr wrap="square" lIns="0" tIns="0" rIns="0" bIns="0" rtlCol="0" anchor="ctr"/>
           <a:lstStyle/>
           <a:p>
-            <a:pPr indent="0" marL="0">
-              <a:buNone/>
-            </a:pPr>
-            <a:r>
-              <a:rPr lang="en-US" sz="1200" b="1" spc="200" kern="0" dirty="0">
+            <a:pPr marL="0" indent="0">
+              <a:buNone/>
+            </a:pPr>
+            <a:r>
+              <a:rPr lang="en-US" sz="1200" b="1" kern="0" spc="200" dirty="0">
                 <a:solidFill>
                   <a:srgbClr val="2C8C8C"/>
                 </a:solidFill>
@@ -9105,7 +9189,7 @@
           <a:bodyPr wrap="square" lIns="0" tIns="0" rIns="0" bIns="0" rtlCol="0" anchor="ctr"/>
           <a:lstStyle/>
           <a:p>
-            <a:pPr indent="0" marL="0">
+            <a:pPr marL="0" indent="0">
               <a:buNone/>
             </a:pPr>
             <a:r>
@@ -9149,13 +9233,20 @@
             <a:prstDash val="solid"/>
           </a:ln>
           <a:effectLst>
-            <a:outerShdw sx="100000" sy="100000" kx="0" ky="0" algn="bl" rotWithShape="0" blurRad="88900" dist="38100" dir="8100000">
+            <a:outerShdw blurRad="88900" dist="38100" dir="8100000" algn="bl" rotWithShape="0">
               <a:srgbClr val="000000">
                 <a:alpha val="16000"/>
               </a:srgbClr>
             </a:outerShdw>
           </a:effectLst>
         </p:spPr>
+        <p:txBody>
+          <a:bodyPr/>
+          <a:lstStyle/>
+          <a:p>
+            <a:endParaRPr lang="en-US"/>
+          </a:p>
+        </p:txBody>
       </p:sp>
       <p:sp>
         <p:nvSpPr>
@@ -9176,17 +9267,24 @@
           </a:solidFill>
           <a:ln/>
         </p:spPr>
+        <p:txBody>
+          <a:bodyPr/>
+          <a:lstStyle/>
+          <a:p>
+            <a:endParaRPr lang="en-US"/>
+          </a:p>
+        </p:txBody>
       </p:sp>
       <p:pic>
         <p:nvPicPr>
-          <p:cNvPr id="7" name="Image 0" descr="preencoded.png">    </p:cNvPr>
+          <p:cNvPr id="7" name="Image 0" descr="preencoded.png"/>
           <p:cNvPicPr>
             <a:picLocks noChangeAspect="1"/>
           </p:cNvPicPr>
           <p:nvPr/>
         </p:nvPicPr>
         <p:blipFill>
-          <a:blip r:embed="rId1"/>
+          <a:blip r:embed="rId3"/>
           <a:stretch>
             <a:fillRect/>
           </a:stretch>
@@ -9222,7 +9320,7 @@
           <a:bodyPr wrap="square" lIns="0" tIns="0" rIns="0" bIns="0" rtlCol="0" anchor="ctr"/>
           <a:lstStyle/>
           <a:p>
-            <a:pPr algn="ctr" indent="0" marL="0">
+            <a:pPr marL="0" indent="0" algn="ctr">
               <a:buNone/>
             </a:pPr>
             <a:r>
@@ -9261,7 +9359,7 @@
           <a:bodyPr wrap="square" lIns="0" tIns="0" rIns="0" bIns="0" rtlCol="0" anchor="ctr"/>
           <a:lstStyle/>
           <a:p>
-            <a:pPr algn="ctr" indent="0" marL="0">
+            <a:pPr marL="0" indent="0" algn="ctr">
               <a:lnSpc>
                 <a:spcPct val="110000"/>
               </a:lnSpc>
@@ -9281,7 +9379,7 @@
             <a:endParaRPr lang="en-US" sz="1250" dirty="0"/>
           </a:p>
           <a:p>
-            <a:pPr algn="ctr" indent="0" marL="0">
+            <a:pPr marL="0" indent="0" algn="ctr">
               <a:lnSpc>
                 <a:spcPct val="110000"/>
               </a:lnSpc>
@@ -9323,7 +9421,7 @@
           <a:bodyPr wrap="square" lIns="0" tIns="0" rIns="0" bIns="0" rtlCol="0" anchor="ctr"/>
           <a:lstStyle/>
           <a:p>
-            <a:pPr algn="ctr" indent="0" marL="0">
+            <a:pPr marL="0" indent="0" algn="ctr">
               <a:buNone/>
             </a:pPr>
             <a:r>
@@ -9367,13 +9465,20 @@
             <a:prstDash val="solid"/>
           </a:ln>
           <a:effectLst>
-            <a:outerShdw sx="100000" sy="100000" kx="0" ky="0" algn="bl" rotWithShape="0" blurRad="88900" dist="38100" dir="8100000">
+            <a:outerShdw blurRad="88900" dist="38100" dir="8100000" algn="bl" rotWithShape="0">
               <a:srgbClr val="000000">
                 <a:alpha val="16000"/>
               </a:srgbClr>
             </a:outerShdw>
           </a:effectLst>
         </p:spPr>
+        <p:txBody>
+          <a:bodyPr/>
+          <a:lstStyle/>
+          <a:p>
+            <a:endParaRPr lang="en-US"/>
+          </a:p>
+        </p:txBody>
       </p:sp>
       <p:sp>
         <p:nvSpPr>
@@ -9394,17 +9499,24 @@
           </a:solidFill>
           <a:ln/>
         </p:spPr>
+        <p:txBody>
+          <a:bodyPr/>
+          <a:lstStyle/>
+          <a:p>
+            <a:endParaRPr lang="en-US"/>
+          </a:p>
+        </p:txBody>
       </p:sp>
       <p:pic>
         <p:nvPicPr>
-          <p:cNvPr id="13" name="Image 1" descr="preencoded.png">    </p:cNvPr>
+          <p:cNvPr id="13" name="Image 1" descr="preencoded.png"/>
           <p:cNvPicPr>
             <a:picLocks noChangeAspect="1"/>
           </p:cNvPicPr>
           <p:nvPr/>
         </p:nvPicPr>
         <p:blipFill>
-          <a:blip r:embed="rId2"/>
+          <a:blip r:embed="rId4"/>
           <a:stretch>
             <a:fillRect/>
           </a:stretch>
@@ -9440,7 +9552,7 @@
           <a:bodyPr wrap="square" lIns="0" tIns="0" rIns="0" bIns="0" rtlCol="0" anchor="ctr"/>
           <a:lstStyle/>
           <a:p>
-            <a:pPr algn="ctr" indent="0" marL="0">
+            <a:pPr marL="0" indent="0" algn="ctr">
               <a:buNone/>
             </a:pPr>
             <a:r>
@@ -9479,7 +9591,7 @@
           <a:bodyPr wrap="square" lIns="0" tIns="0" rIns="0" bIns="0" rtlCol="0" anchor="ctr"/>
           <a:lstStyle/>
           <a:p>
-            <a:pPr algn="ctr" indent="0" marL="0">
+            <a:pPr marL="0" indent="0" algn="ctr">
               <a:lnSpc>
                 <a:spcPct val="110000"/>
               </a:lnSpc>
@@ -9521,7 +9633,7 @@
           <a:bodyPr wrap="square" lIns="0" tIns="0" rIns="0" bIns="0" rtlCol="0" anchor="ctr"/>
           <a:lstStyle/>
           <a:p>
-            <a:pPr algn="ctr" indent="0" marL="0">
+            <a:pPr marL="0" indent="0" algn="ctr">
               <a:buNone/>
             </a:pPr>
             <a:r>
@@ -9565,13 +9677,20 @@
             <a:prstDash val="solid"/>
           </a:ln>
           <a:effectLst>
-            <a:outerShdw sx="100000" sy="100000" kx="0" ky="0" algn="bl" rotWithShape="0" blurRad="88900" dist="38100" dir="8100000">
+            <a:outerShdw blurRad="88900" dist="38100" dir="8100000" algn="bl" rotWithShape="0">
               <a:srgbClr val="000000">
                 <a:alpha val="16000"/>
               </a:srgbClr>
             </a:outerShdw>
           </a:effectLst>
         </p:spPr>
+        <p:txBody>
+          <a:bodyPr/>
+          <a:lstStyle/>
+          <a:p>
+            <a:endParaRPr lang="en-US"/>
+          </a:p>
+        </p:txBody>
       </p:sp>
       <p:sp>
         <p:nvSpPr>
@@ -9592,17 +9711,24 @@
           </a:solidFill>
           <a:ln/>
         </p:spPr>
+        <p:txBody>
+          <a:bodyPr/>
+          <a:lstStyle/>
+          <a:p>
+            <a:endParaRPr lang="en-US"/>
+          </a:p>
+        </p:txBody>
       </p:sp>
       <p:pic>
         <p:nvPicPr>
-          <p:cNvPr id="19" name="Image 2" descr="preencoded.png">    </p:cNvPr>
+          <p:cNvPr id="19" name="Image 2" descr="preencoded.png"/>
           <p:cNvPicPr>
             <a:picLocks noChangeAspect="1"/>
           </p:cNvPicPr>
           <p:nvPr/>
         </p:nvPicPr>
         <p:blipFill>
-          <a:blip r:embed="rId3"/>
+          <a:blip r:embed="rId5"/>
           <a:stretch>
             <a:fillRect/>
           </a:stretch>
@@ -9638,7 +9764,7 @@
           <a:bodyPr wrap="square" lIns="0" tIns="0" rIns="0" bIns="0" rtlCol="0" anchor="ctr"/>
           <a:lstStyle/>
           <a:p>
-            <a:pPr algn="ctr" indent="0" marL="0">
+            <a:pPr marL="0" indent="0" algn="ctr">
               <a:buNone/>
             </a:pPr>
             <a:r>
@@ -9677,7 +9803,7 @@
           <a:bodyPr wrap="square" lIns="0" tIns="0" rIns="0" bIns="0" rtlCol="0" anchor="ctr"/>
           <a:lstStyle/>
           <a:p>
-            <a:pPr algn="ctr" indent="0" marL="0">
+            <a:pPr marL="0" indent="0" algn="ctr">
               <a:lnSpc>
                 <a:spcPct val="110000"/>
               </a:lnSpc>
@@ -9719,7 +9845,7 @@
           <a:bodyPr wrap="square" lIns="0" tIns="0" rIns="0" bIns="0" rtlCol="0" anchor="ctr"/>
           <a:lstStyle/>
           <a:p>
-            <a:pPr indent="0" marL="0">
+            <a:pPr marL="0" indent="0">
               <a:lnSpc>
                 <a:spcPct val="112000"/>
               </a:lnSpc>
@@ -9736,12 +9862,6 @@
               </a:rPr>
               <a:t>Start with ONE habit. </a:t>
             </a:r>
-            <a:pPr indent="0" marL="0">
-              <a:lnSpc>
-                <a:spcPct val="112000"/>
-              </a:lnSpc>
-              <a:buNone/>
-            </a:pPr>
             <a:r>
               <a:rPr lang="en-US" sz="1500" dirty="0">
                 <a:solidFill>
@@ -9778,7 +9898,7 @@
           <a:bodyPr wrap="square" lIns="0" tIns="0" rIns="0" bIns="0" rtlCol="0" anchor="ctr"/>
           <a:lstStyle/>
           <a:p>
-            <a:pPr algn="l" indent="0" marL="0">
+            <a:pPr marL="0" indent="0" algn="l">
               <a:buNone/>
             </a:pPr>
             <a:r>
@@ -9817,7 +9937,7 @@
           <a:bodyPr wrap="square" lIns="0" tIns="0" rIns="0" bIns="0" rtlCol="0" anchor="ctr"/>
           <a:lstStyle/>
           <a:p>
-            <a:pPr algn="r" indent="0" marL="0">
+            <a:pPr marL="0" indent="0" algn="r">
               <a:buNone/>
             </a:pPr>
             <a:r>
@@ -9851,6 +9971,7 @@
         <a:solidFill>
           <a:srgbClr val="F5F7FA"/>
         </a:solidFill>
+        <a:effectLst/>
       </p:bgPr>
     </p:bg>
     <p:spTree>
@@ -9886,6 +10007,13 @@
           </a:solidFill>
           <a:ln/>
         </p:spPr>
+        <p:txBody>
+          <a:bodyPr/>
+          <a:lstStyle/>
+          <a:p>
+            <a:endParaRPr lang="en-US"/>
+          </a:p>
+        </p:txBody>
       </p:sp>
       <p:sp>
         <p:nvSpPr>
@@ -9908,11 +10036,11 @@
           <a:bodyPr wrap="square" lIns="0" tIns="0" rIns="0" bIns="0" rtlCol="0" anchor="ctr"/>
           <a:lstStyle/>
           <a:p>
-            <a:pPr indent="0" marL="0">
-              <a:buNone/>
-            </a:pPr>
-            <a:r>
-              <a:rPr lang="en-US" sz="1200" b="1" spc="200" kern="0" dirty="0">
+            <a:pPr marL="0" indent="0">
+              <a:buNone/>
+            </a:pPr>
+            <a:r>
+              <a:rPr lang="en-US" sz="1200" b="1" kern="0" spc="200" dirty="0">
                 <a:solidFill>
                   <a:srgbClr val="2C8C8C"/>
                 </a:solidFill>
@@ -9947,7 +10075,7 @@
           <a:bodyPr wrap="square" lIns="0" tIns="0" rIns="0" bIns="0" rtlCol="0" anchor="ctr"/>
           <a:lstStyle/>
           <a:p>
-            <a:pPr indent="0" marL="0">
+            <a:pPr marL="0" indent="0">
               <a:buNone/>
             </a:pPr>
             <a:r>
@@ -9991,13 +10119,20 @@
             <a:prstDash val="solid"/>
           </a:ln>
           <a:effectLst>
-            <a:outerShdw sx="100000" sy="100000" kx="0" ky="0" algn="bl" rotWithShape="0" blurRad="88900" dist="38100" dir="8100000">
+            <a:outerShdw blurRad="88900" dist="38100" dir="8100000" algn="bl" rotWithShape="0">
               <a:srgbClr val="000000">
                 <a:alpha val="16000"/>
               </a:srgbClr>
             </a:outerShdw>
           </a:effectLst>
         </p:spPr>
+        <p:txBody>
+          <a:bodyPr/>
+          <a:lstStyle/>
+          <a:p>
+            <a:endParaRPr lang="en-US"/>
+          </a:p>
+        </p:txBody>
       </p:sp>
       <p:sp>
         <p:nvSpPr>
@@ -10018,17 +10153,24 @@
           </a:solidFill>
           <a:ln/>
         </p:spPr>
+        <p:txBody>
+          <a:bodyPr/>
+          <a:lstStyle/>
+          <a:p>
+            <a:endParaRPr lang="en-US"/>
+          </a:p>
+        </p:txBody>
       </p:sp>
       <p:pic>
         <p:nvPicPr>
-          <p:cNvPr id="7" name="Image 0" descr="preencoded.png">    </p:cNvPr>
+          <p:cNvPr id="7" name="Image 0" descr="preencoded.png"/>
           <p:cNvPicPr>
             <a:picLocks noChangeAspect="1"/>
           </p:cNvPicPr>
           <p:nvPr/>
         </p:nvPicPr>
         <p:blipFill>
-          <a:blip r:embed="rId1"/>
+          <a:blip r:embed="rId3"/>
           <a:stretch>
             <a:fillRect/>
           </a:stretch>
@@ -10064,7 +10206,7 @@
           <a:bodyPr wrap="square" lIns="0" tIns="0" rIns="0" bIns="0" rtlCol="0" anchor="ctr"/>
           <a:lstStyle/>
           <a:p>
-            <a:pPr algn="r" indent="0" marL="0">
+            <a:pPr marL="0" indent="0" algn="r">
               <a:buNone/>
             </a:pPr>
             <a:r>
@@ -10103,7 +10245,7 @@
           <a:bodyPr wrap="square" lIns="0" tIns="0" rIns="0" bIns="0" rtlCol="0" anchor="ctr"/>
           <a:lstStyle/>
           <a:p>
-            <a:pPr indent="0" marL="0">
+            <a:pPr marL="0" indent="0">
               <a:buNone/>
             </a:pPr>
             <a:r>
@@ -10142,7 +10284,7 @@
           <a:bodyPr wrap="square" lIns="0" tIns="0" rIns="0" bIns="0" rtlCol="0" anchor="ctr"/>
           <a:lstStyle/>
           <a:p>
-            <a:pPr indent="0" marL="0">
+            <a:pPr marL="0" indent="0">
               <a:lnSpc>
                 <a:spcPct val="105000"/>
               </a:lnSpc>
@@ -10189,13 +10331,20 @@
             <a:prstDash val="solid"/>
           </a:ln>
           <a:effectLst>
-            <a:outerShdw sx="100000" sy="100000" kx="0" ky="0" algn="bl" rotWithShape="0" blurRad="88900" dist="38100" dir="8100000">
+            <a:outerShdw blurRad="88900" dist="38100" dir="8100000" algn="bl" rotWithShape="0">
               <a:srgbClr val="000000">
                 <a:alpha val="16000"/>
               </a:srgbClr>
             </a:outerShdw>
           </a:effectLst>
         </p:spPr>
+        <p:txBody>
+          <a:bodyPr/>
+          <a:lstStyle/>
+          <a:p>
+            <a:endParaRPr lang="en-US"/>
+          </a:p>
+        </p:txBody>
       </p:sp>
       <p:sp>
         <p:nvSpPr>
@@ -10216,17 +10365,24 @@
           </a:solidFill>
           <a:ln/>
         </p:spPr>
+        <p:txBody>
+          <a:bodyPr/>
+          <a:lstStyle/>
+          <a:p>
+            <a:endParaRPr lang="en-US"/>
+          </a:p>
+        </p:txBody>
       </p:sp>
       <p:pic>
         <p:nvPicPr>
-          <p:cNvPr id="13" name="Image 1" descr="preencoded.png">    </p:cNvPr>
+          <p:cNvPr id="13" name="Image 1" descr="preencoded.png"/>
           <p:cNvPicPr>
             <a:picLocks noChangeAspect="1"/>
           </p:cNvPicPr>
           <p:nvPr/>
         </p:nvPicPr>
         <p:blipFill>
-          <a:blip r:embed="rId2"/>
+          <a:blip r:embed="rId4"/>
           <a:stretch>
             <a:fillRect/>
           </a:stretch>
@@ -10262,7 +10418,7 @@
           <a:bodyPr wrap="square" lIns="0" tIns="0" rIns="0" bIns="0" rtlCol="0" anchor="ctr"/>
           <a:lstStyle/>
           <a:p>
-            <a:pPr algn="r" indent="0" marL="0">
+            <a:pPr marL="0" indent="0" algn="r">
               <a:buNone/>
             </a:pPr>
             <a:r>
@@ -10301,7 +10457,7 @@
           <a:bodyPr wrap="square" lIns="0" tIns="0" rIns="0" bIns="0" rtlCol="0" anchor="ctr"/>
           <a:lstStyle/>
           <a:p>
-            <a:pPr indent="0" marL="0">
+            <a:pPr marL="0" indent="0">
               <a:buNone/>
             </a:pPr>
             <a:r>
@@ -10340,7 +10496,7 @@
           <a:bodyPr wrap="square" lIns="0" tIns="0" rIns="0" bIns="0" rtlCol="0" anchor="ctr"/>
           <a:lstStyle/>
           <a:p>
-            <a:pPr indent="0" marL="0">
+            <a:pPr marL="0" indent="0">
               <a:lnSpc>
                 <a:spcPct val="105000"/>
               </a:lnSpc>
@@ -10387,13 +10543,20 @@
             <a:prstDash val="solid"/>
           </a:ln>
           <a:effectLst>
-            <a:outerShdw sx="100000" sy="100000" kx="0" ky="0" algn="bl" rotWithShape="0" blurRad="88900" dist="38100" dir="8100000">
+            <a:outerShdw blurRad="88900" dist="38100" dir="8100000" algn="bl" rotWithShape="0">
               <a:srgbClr val="000000">
                 <a:alpha val="16000"/>
               </a:srgbClr>
             </a:outerShdw>
           </a:effectLst>
         </p:spPr>
+        <p:txBody>
+          <a:bodyPr/>
+          <a:lstStyle/>
+          <a:p>
+            <a:endParaRPr lang="en-US"/>
+          </a:p>
+        </p:txBody>
       </p:sp>
       <p:sp>
         <p:nvSpPr>
@@ -10414,17 +10577,24 @@
           </a:solidFill>
           <a:ln/>
         </p:spPr>
+        <p:txBody>
+          <a:bodyPr/>
+          <a:lstStyle/>
+          <a:p>
+            <a:endParaRPr lang="en-US"/>
+          </a:p>
+        </p:txBody>
       </p:sp>
       <p:pic>
         <p:nvPicPr>
-          <p:cNvPr id="19" name="Image 2" descr="preencoded.png">    </p:cNvPr>
+          <p:cNvPr id="19" name="Image 2" descr="preencoded.png"/>
           <p:cNvPicPr>
             <a:picLocks noChangeAspect="1"/>
           </p:cNvPicPr>
           <p:nvPr/>
         </p:nvPicPr>
         <p:blipFill>
-          <a:blip r:embed="rId3"/>
+          <a:blip r:embed="rId5"/>
           <a:stretch>
             <a:fillRect/>
           </a:stretch>
@@ -10460,7 +10630,7 @@
           <a:bodyPr wrap="square" lIns="0" tIns="0" rIns="0" bIns="0" rtlCol="0" anchor="ctr"/>
           <a:lstStyle/>
           <a:p>
-            <a:pPr algn="r" indent="0" marL="0">
+            <a:pPr marL="0" indent="0" algn="r">
               <a:buNone/>
             </a:pPr>
             <a:r>
@@ -10499,7 +10669,7 @@
           <a:bodyPr wrap="square" lIns="0" tIns="0" rIns="0" bIns="0" rtlCol="0" anchor="ctr"/>
           <a:lstStyle/>
           <a:p>
-            <a:pPr indent="0" marL="0">
+            <a:pPr marL="0" indent="0">
               <a:buNone/>
             </a:pPr>
             <a:r>
@@ -10538,7 +10708,7 @@
           <a:bodyPr wrap="square" lIns="0" tIns="0" rIns="0" bIns="0" rtlCol="0" anchor="ctr"/>
           <a:lstStyle/>
           <a:p>
-            <a:pPr indent="0" marL="0">
+            <a:pPr marL="0" indent="0">
               <a:lnSpc>
                 <a:spcPct val="105000"/>
               </a:lnSpc>
@@ -10585,13 +10755,20 @@
             <a:prstDash val="solid"/>
           </a:ln>
           <a:effectLst>
-            <a:outerShdw sx="100000" sy="100000" kx="0" ky="0" algn="bl" rotWithShape="0" blurRad="88900" dist="38100" dir="8100000">
+            <a:outerShdw blurRad="88900" dist="38100" dir="8100000" algn="bl" rotWithShape="0">
               <a:srgbClr val="000000">
                 <a:alpha val="16000"/>
               </a:srgbClr>
             </a:outerShdw>
           </a:effectLst>
         </p:spPr>
+        <p:txBody>
+          <a:bodyPr/>
+          <a:lstStyle/>
+          <a:p>
+            <a:endParaRPr lang="en-US"/>
+          </a:p>
+        </p:txBody>
       </p:sp>
       <p:sp>
         <p:nvSpPr>
@@ -10612,17 +10789,24 @@
           </a:solidFill>
           <a:ln/>
         </p:spPr>
+        <p:txBody>
+          <a:bodyPr/>
+          <a:lstStyle/>
+          <a:p>
+            <a:endParaRPr lang="en-US"/>
+          </a:p>
+        </p:txBody>
       </p:sp>
       <p:pic>
         <p:nvPicPr>
-          <p:cNvPr id="25" name="Image 3" descr="preencoded.png">    </p:cNvPr>
+          <p:cNvPr id="25" name="Image 3" descr="preencoded.png"/>
           <p:cNvPicPr>
             <a:picLocks noChangeAspect="1"/>
           </p:cNvPicPr>
           <p:nvPr/>
         </p:nvPicPr>
         <p:blipFill>
-          <a:blip r:embed="rId4"/>
+          <a:blip r:embed="rId6"/>
           <a:stretch>
             <a:fillRect/>
           </a:stretch>
@@ -10658,7 +10842,7 @@
           <a:bodyPr wrap="square" lIns="0" tIns="0" rIns="0" bIns="0" rtlCol="0" anchor="ctr"/>
           <a:lstStyle/>
           <a:p>
-            <a:pPr algn="r" indent="0" marL="0">
+            <a:pPr marL="0" indent="0" algn="r">
               <a:buNone/>
             </a:pPr>
             <a:r>
@@ -10697,7 +10881,7 @@
           <a:bodyPr wrap="square" lIns="0" tIns="0" rIns="0" bIns="0" rtlCol="0" anchor="ctr"/>
           <a:lstStyle/>
           <a:p>
-            <a:pPr indent="0" marL="0">
+            <a:pPr marL="0" indent="0">
               <a:buNone/>
             </a:pPr>
             <a:r>
@@ -10736,7 +10920,7 @@
           <a:bodyPr wrap="square" lIns="0" tIns="0" rIns="0" bIns="0" rtlCol="0" anchor="ctr"/>
           <a:lstStyle/>
           <a:p>
-            <a:pPr indent="0" marL="0">
+            <a:pPr marL="0" indent="0">
               <a:lnSpc>
                 <a:spcPct val="105000"/>
               </a:lnSpc>
@@ -10783,13 +10967,20 @@
             <a:prstDash val="solid"/>
           </a:ln>
           <a:effectLst>
-            <a:outerShdw sx="100000" sy="100000" kx="0" ky="0" algn="bl" rotWithShape="0" blurRad="88900" dist="38100" dir="8100000">
+            <a:outerShdw blurRad="88900" dist="38100" dir="8100000" algn="bl" rotWithShape="0">
               <a:srgbClr val="000000">
                 <a:alpha val="16000"/>
               </a:srgbClr>
             </a:outerShdw>
           </a:effectLst>
         </p:spPr>
+        <p:txBody>
+          <a:bodyPr/>
+          <a:lstStyle/>
+          <a:p>
+            <a:endParaRPr lang="en-US"/>
+          </a:p>
+        </p:txBody>
       </p:sp>
       <p:sp>
         <p:nvSpPr>
@@ -10810,17 +11001,24 @@
           </a:solidFill>
           <a:ln/>
         </p:spPr>
+        <p:txBody>
+          <a:bodyPr/>
+          <a:lstStyle/>
+          <a:p>
+            <a:endParaRPr lang="en-US"/>
+          </a:p>
+        </p:txBody>
       </p:sp>
       <p:pic>
         <p:nvPicPr>
-          <p:cNvPr id="31" name="Image 4" descr="preencoded.png">    </p:cNvPr>
+          <p:cNvPr id="31" name="Image 4" descr="preencoded.png"/>
           <p:cNvPicPr>
             <a:picLocks noChangeAspect="1"/>
           </p:cNvPicPr>
           <p:nvPr/>
         </p:nvPicPr>
         <p:blipFill>
-          <a:blip r:embed="rId5"/>
+          <a:blip r:embed="rId7"/>
           <a:stretch>
             <a:fillRect/>
           </a:stretch>
@@ -10856,7 +11054,7 @@
           <a:bodyPr wrap="square" lIns="0" tIns="0" rIns="0" bIns="0" rtlCol="0" anchor="ctr"/>
           <a:lstStyle/>
           <a:p>
-            <a:pPr algn="r" indent="0" marL="0">
+            <a:pPr marL="0" indent="0" algn="r">
               <a:buNone/>
             </a:pPr>
             <a:r>
@@ -10895,7 +11093,7 @@
           <a:bodyPr wrap="square" lIns="0" tIns="0" rIns="0" bIns="0" rtlCol="0" anchor="ctr"/>
           <a:lstStyle/>
           <a:p>
-            <a:pPr indent="0" marL="0">
+            <a:pPr marL="0" indent="0">
               <a:buNone/>
             </a:pPr>
             <a:r>
@@ -10934,7 +11132,7 @@
           <a:bodyPr wrap="square" lIns="0" tIns="0" rIns="0" bIns="0" rtlCol="0" anchor="ctr"/>
           <a:lstStyle/>
           <a:p>
-            <a:pPr indent="0" marL="0">
+            <a:pPr marL="0" indent="0">
               <a:lnSpc>
                 <a:spcPct val="105000"/>
               </a:lnSpc>
@@ -10981,13 +11179,20 @@
             <a:prstDash val="solid"/>
           </a:ln>
           <a:effectLst>
-            <a:outerShdw sx="100000" sy="100000" kx="0" ky="0" algn="bl" rotWithShape="0" blurRad="88900" dist="38100" dir="8100000">
+            <a:outerShdw blurRad="88900" dist="38100" dir="8100000" algn="bl" rotWithShape="0">
               <a:srgbClr val="000000">
                 <a:alpha val="16000"/>
               </a:srgbClr>
             </a:outerShdw>
           </a:effectLst>
         </p:spPr>
+        <p:txBody>
+          <a:bodyPr/>
+          <a:lstStyle/>
+          <a:p>
+            <a:endParaRPr lang="en-US"/>
+          </a:p>
+        </p:txBody>
       </p:sp>
       <p:sp>
         <p:nvSpPr>
@@ -11008,17 +11213,24 @@
           </a:solidFill>
           <a:ln/>
         </p:spPr>
+        <p:txBody>
+          <a:bodyPr/>
+          <a:lstStyle/>
+          <a:p>
+            <a:endParaRPr lang="en-US"/>
+          </a:p>
+        </p:txBody>
       </p:sp>
       <p:pic>
         <p:nvPicPr>
-          <p:cNvPr id="37" name="Image 5" descr="preencoded.png">    </p:cNvPr>
+          <p:cNvPr id="37" name="Image 5" descr="preencoded.png"/>
           <p:cNvPicPr>
             <a:picLocks noChangeAspect="1"/>
           </p:cNvPicPr>
           <p:nvPr/>
         </p:nvPicPr>
         <p:blipFill>
-          <a:blip r:embed="rId6"/>
+          <a:blip r:embed="rId8"/>
           <a:stretch>
             <a:fillRect/>
           </a:stretch>
@@ -11054,7 +11266,7 @@
           <a:bodyPr wrap="square" lIns="0" tIns="0" rIns="0" bIns="0" rtlCol="0" anchor="ctr"/>
           <a:lstStyle/>
           <a:p>
-            <a:pPr algn="r" indent="0" marL="0">
+            <a:pPr marL="0" indent="0" algn="r">
               <a:buNone/>
             </a:pPr>
             <a:r>
@@ -11093,7 +11305,7 @@
           <a:bodyPr wrap="square" lIns="0" tIns="0" rIns="0" bIns="0" rtlCol="0" anchor="ctr"/>
           <a:lstStyle/>
           <a:p>
-            <a:pPr indent="0" marL="0">
+            <a:pPr marL="0" indent="0">
               <a:buNone/>
             </a:pPr>
             <a:r>
@@ -11132,7 +11344,7 @@
           <a:bodyPr wrap="square" lIns="0" tIns="0" rIns="0" bIns="0" rtlCol="0" anchor="ctr"/>
           <a:lstStyle/>
           <a:p>
-            <a:pPr indent="0" marL="0">
+            <a:pPr marL="0" indent="0">
               <a:lnSpc>
                 <a:spcPct val="105000"/>
               </a:lnSpc>
@@ -11179,13 +11391,20 @@
             <a:prstDash val="solid"/>
           </a:ln>
           <a:effectLst>
-            <a:outerShdw sx="100000" sy="100000" kx="0" ky="0" algn="bl" rotWithShape="0" blurRad="88900" dist="38100" dir="8100000">
+            <a:outerShdw blurRad="88900" dist="38100" dir="8100000" algn="bl" rotWithShape="0">
               <a:srgbClr val="000000">
                 <a:alpha val="16000"/>
               </a:srgbClr>
             </a:outerShdw>
           </a:effectLst>
         </p:spPr>
+        <p:txBody>
+          <a:bodyPr/>
+          <a:lstStyle/>
+          <a:p>
+            <a:endParaRPr lang="en-US"/>
+          </a:p>
+        </p:txBody>
       </p:sp>
       <p:sp>
         <p:nvSpPr>
@@ -11206,17 +11425,24 @@
           </a:solidFill>
           <a:ln/>
         </p:spPr>
+        <p:txBody>
+          <a:bodyPr/>
+          <a:lstStyle/>
+          <a:p>
+            <a:endParaRPr lang="en-US"/>
+          </a:p>
+        </p:txBody>
       </p:sp>
       <p:pic>
         <p:nvPicPr>
-          <p:cNvPr id="43" name="Image 6" descr="preencoded.png">    </p:cNvPr>
+          <p:cNvPr id="43" name="Image 6" descr="preencoded.png"/>
           <p:cNvPicPr>
             <a:picLocks noChangeAspect="1"/>
           </p:cNvPicPr>
           <p:nvPr/>
         </p:nvPicPr>
         <p:blipFill>
-          <a:blip r:embed="rId7"/>
+          <a:blip r:embed="rId9"/>
           <a:stretch>
             <a:fillRect/>
           </a:stretch>
@@ -11252,7 +11478,7 @@
           <a:bodyPr wrap="square" lIns="0" tIns="0" rIns="0" bIns="0" rtlCol="0" anchor="ctr"/>
           <a:lstStyle/>
           <a:p>
-            <a:pPr algn="r" indent="0" marL="0">
+            <a:pPr marL="0" indent="0" algn="r">
               <a:buNone/>
             </a:pPr>
             <a:r>
@@ -11291,7 +11517,7 @@
           <a:bodyPr wrap="square" lIns="0" tIns="0" rIns="0" bIns="0" rtlCol="0" anchor="ctr"/>
           <a:lstStyle/>
           <a:p>
-            <a:pPr indent="0" marL="0">
+            <a:pPr marL="0" indent="0">
               <a:buNone/>
             </a:pPr>
             <a:r>
@@ -11330,7 +11556,7 @@
           <a:bodyPr wrap="square" lIns="0" tIns="0" rIns="0" bIns="0" rtlCol="0" anchor="ctr"/>
           <a:lstStyle/>
           <a:p>
-            <a:pPr indent="0" marL="0">
+            <a:pPr marL="0" indent="0">
               <a:lnSpc>
                 <a:spcPct val="105000"/>
               </a:lnSpc>
@@ -11377,13 +11603,20 @@
             <a:prstDash val="solid"/>
           </a:ln>
           <a:effectLst>
-            <a:outerShdw sx="100000" sy="100000" kx="0" ky="0" algn="bl" rotWithShape="0" blurRad="88900" dist="38100" dir="8100000">
+            <a:outerShdw blurRad="88900" dist="38100" dir="8100000" algn="bl" rotWithShape="0">
               <a:srgbClr val="000000">
                 <a:alpha val="16000"/>
               </a:srgbClr>
             </a:outerShdw>
           </a:effectLst>
         </p:spPr>
+        <p:txBody>
+          <a:bodyPr/>
+          <a:lstStyle/>
+          <a:p>
+            <a:endParaRPr lang="en-US"/>
+          </a:p>
+        </p:txBody>
       </p:sp>
       <p:sp>
         <p:nvSpPr>
@@ -11404,17 +11637,24 @@
           </a:solidFill>
           <a:ln/>
         </p:spPr>
+        <p:txBody>
+          <a:bodyPr/>
+          <a:lstStyle/>
+          <a:p>
+            <a:endParaRPr lang="en-US"/>
+          </a:p>
+        </p:txBody>
       </p:sp>
       <p:pic>
         <p:nvPicPr>
-          <p:cNvPr id="49" name="Image 7" descr="preencoded.png">    </p:cNvPr>
+          <p:cNvPr id="49" name="Image 7" descr="preencoded.png"/>
           <p:cNvPicPr>
             <a:picLocks noChangeAspect="1"/>
           </p:cNvPicPr>
           <p:nvPr/>
         </p:nvPicPr>
         <p:blipFill>
-          <a:blip r:embed="rId8"/>
+          <a:blip r:embed="rId10"/>
           <a:stretch>
             <a:fillRect/>
           </a:stretch>
@@ -11450,7 +11690,7 @@
           <a:bodyPr wrap="square" lIns="0" tIns="0" rIns="0" bIns="0" rtlCol="0" anchor="ctr"/>
           <a:lstStyle/>
           <a:p>
-            <a:pPr algn="r" indent="0" marL="0">
+            <a:pPr marL="0" indent="0" algn="r">
               <a:buNone/>
             </a:pPr>
             <a:r>
@@ -11489,7 +11729,7 @@
           <a:bodyPr wrap="square" lIns="0" tIns="0" rIns="0" bIns="0" rtlCol="0" anchor="ctr"/>
           <a:lstStyle/>
           <a:p>
-            <a:pPr indent="0" marL="0">
+            <a:pPr marL="0" indent="0">
               <a:buNone/>
             </a:pPr>
             <a:r>
@@ -11528,7 +11768,7 @@
           <a:bodyPr wrap="square" lIns="0" tIns="0" rIns="0" bIns="0" rtlCol="0" anchor="ctr"/>
           <a:lstStyle/>
           <a:p>
-            <a:pPr indent="0" marL="0">
+            <a:pPr marL="0" indent="0">
               <a:lnSpc>
                 <a:spcPct val="105000"/>
               </a:lnSpc>
@@ -11570,7 +11810,7 @@
           <a:bodyPr wrap="square" lIns="0" tIns="0" rIns="0" bIns="0" rtlCol="0" anchor="ctr"/>
           <a:lstStyle/>
           <a:p>
-            <a:pPr algn="l" indent="0" marL="0">
+            <a:pPr marL="0" indent="0" algn="l">
               <a:buNone/>
             </a:pPr>
             <a:r>
@@ -11609,7 +11849,7 @@
           <a:bodyPr wrap="square" lIns="0" tIns="0" rIns="0" bIns="0" rtlCol="0" anchor="ctr"/>
           <a:lstStyle/>
           <a:p>
-            <a:pPr algn="r" indent="0" marL="0">
+            <a:pPr marL="0" indent="0" algn="r">
               <a:buNone/>
             </a:pPr>
             <a:r>
@@ -11643,6 +11883,7 @@
         <a:solidFill>
           <a:srgbClr val="F5F7FA"/>
         </a:solidFill>
+        <a:effectLst/>
       </p:bgPr>
     </p:bg>
     <p:spTree>
@@ -11678,6 +11919,13 @@
           </a:solidFill>
           <a:ln/>
         </p:spPr>
+        <p:txBody>
+          <a:bodyPr/>
+          <a:lstStyle/>
+          <a:p>
+            <a:endParaRPr lang="en-US"/>
+          </a:p>
+        </p:txBody>
       </p:sp>
       <p:sp>
         <p:nvSpPr>
@@ -11700,11 +11948,11 @@
           <a:bodyPr wrap="square" lIns="0" tIns="0" rIns="0" bIns="0" rtlCol="0" anchor="ctr"/>
           <a:lstStyle/>
           <a:p>
-            <a:pPr indent="0" marL="0">
-              <a:buNone/>
-            </a:pPr>
-            <a:r>
-              <a:rPr lang="en-US" sz="1200" b="1" spc="200" kern="0" dirty="0">
+            <a:pPr marL="0" indent="0">
+              <a:buNone/>
+            </a:pPr>
+            <a:r>
+              <a:rPr lang="en-US" sz="1200" b="1" kern="0" spc="200" dirty="0">
                 <a:solidFill>
                   <a:srgbClr val="2C8C8C"/>
                 </a:solidFill>
@@ -11739,7 +11987,7 @@
           <a:bodyPr wrap="square" lIns="0" tIns="0" rIns="0" bIns="0" rtlCol="0" anchor="ctr"/>
           <a:lstStyle/>
           <a:p>
-            <a:pPr indent="0" marL="0">
+            <a:pPr marL="0" indent="0">
               <a:buNone/>
             </a:pPr>
             <a:r>
@@ -11783,17 +12031,24 @@
             <a:prstDash val="solid"/>
           </a:ln>
         </p:spPr>
+        <p:txBody>
+          <a:bodyPr/>
+          <a:lstStyle/>
+          <a:p>
+            <a:endParaRPr lang="en-US"/>
+          </a:p>
+        </p:txBody>
       </p:sp>
       <p:pic>
         <p:nvPicPr>
-          <p:cNvPr id="6" name="Image 0" descr="preencoded.png">    </p:cNvPr>
+          <p:cNvPr id="6" name="Image 0" descr="preencoded.png"/>
           <p:cNvPicPr>
             <a:picLocks noChangeAspect="1"/>
           </p:cNvPicPr>
           <p:nvPr/>
         </p:nvPicPr>
         <p:blipFill>
-          <a:blip r:embed="rId1"/>
+          <a:blip r:embed="rId3"/>
           <a:stretch>
             <a:fillRect/>
           </a:stretch>
@@ -11829,7 +12084,7 @@
           <a:bodyPr wrap="square" lIns="0" tIns="0" rIns="0" bIns="0" rtlCol="0" anchor="ctr"/>
           <a:lstStyle/>
           <a:p>
-            <a:pPr indent="0" marL="0">
+            <a:pPr marL="0" indent="0">
               <a:buNone/>
             </a:pPr>
             <a:r>
@@ -11887,8 +12142,7 @@
                 <a:ea typeface="Calibri" pitchFamily="34" charset="-122"/>
                 <a:cs typeface="Calibri" pitchFamily="34" charset="-120"/>
               </a:rPr>
-              <a:t>Public or already-shared material
-</a:t>
+              <a:t>Public or already-shared material</a:t>
             </a:r>
             <a:endParaRPr lang="en-US" sz="1400" dirty="0"/>
           </a:p>
@@ -11912,8 +12166,7 @@
                 <a:ea typeface="Calibri" pitchFamily="34" charset="-122"/>
                 <a:cs typeface="Calibri" pitchFamily="34" charset="-120"/>
               </a:rPr>
-              <a:t>General drafting, brainstorming, formatting
-</a:t>
+              <a:t>General drafting, brainstorming, formatting</a:t>
             </a:r>
             <a:endParaRPr lang="en-US" sz="1400" dirty="0"/>
           </a:p>
@@ -11937,8 +12190,7 @@
                 <a:ea typeface="Calibri" pitchFamily="34" charset="-122"/>
                 <a:cs typeface="Calibri" pitchFamily="34" charset="-120"/>
               </a:rPr>
-              <a:t>Made-up or anonymized example data
-</a:t>
+              <a:t>Made-up or anonymized example data</a:t>
             </a:r>
             <a:endParaRPr lang="en-US" sz="1400" dirty="0"/>
           </a:p>
@@ -11962,8 +12214,7 @@
                 <a:ea typeface="Calibri" pitchFamily="34" charset="-122"/>
                 <a:cs typeface="Calibri" pitchFamily="34" charset="-120"/>
               </a:rPr>
-              <a:t>Your own rough notes and ideas
-</a:t>
+              <a:t>Your own rough notes and ideas</a:t>
             </a:r>
             <a:endParaRPr lang="en-US" sz="1400" dirty="0"/>
           </a:p>
@@ -12019,17 +12270,24 @@
             <a:prstDash val="solid"/>
           </a:ln>
         </p:spPr>
+        <p:txBody>
+          <a:bodyPr/>
+          <a:lstStyle/>
+          <a:p>
+            <a:endParaRPr lang="en-US"/>
+          </a:p>
+        </p:txBody>
       </p:sp>
       <p:pic>
         <p:nvPicPr>
-          <p:cNvPr id="10" name="Image 1" descr="preencoded.png">    </p:cNvPr>
+          <p:cNvPr id="10" name="Image 1" descr="preencoded.png"/>
           <p:cNvPicPr>
             <a:picLocks noChangeAspect="1"/>
           </p:cNvPicPr>
           <p:nvPr/>
         </p:nvPicPr>
         <p:blipFill>
-          <a:blip r:embed="rId2"/>
+          <a:blip r:embed="rId4"/>
           <a:stretch>
             <a:fillRect/>
           </a:stretch>
@@ -12065,7 +12323,7 @@
           <a:bodyPr wrap="square" lIns="0" tIns="0" rIns="0" bIns="0" rtlCol="0" anchor="ctr"/>
           <a:lstStyle/>
           <a:p>
-            <a:pPr indent="0" marL="0">
+            <a:pPr marL="0" indent="0">
               <a:buNone/>
             </a:pPr>
             <a:r>
@@ -12123,8 +12381,7 @@
                 <a:ea typeface="Calibri" pitchFamily="34" charset="-122"/>
                 <a:cs typeface="Calibri" pitchFamily="34" charset="-120"/>
               </a:rPr>
-              <a:t>Customer / patient / employee personal data
-</a:t>
+              <a:t>Customer / patient / employee personal data</a:t>
             </a:r>
             <a:endParaRPr lang="en-US" sz="1400" dirty="0"/>
           </a:p>
@@ -12148,8 +12405,7 @@
                 <a:ea typeface="Calibri" pitchFamily="34" charset="-122"/>
                 <a:cs typeface="Calibri" pitchFamily="34" charset="-120"/>
               </a:rPr>
-              <a:t>Passwords, keys, financial account numbers
-</a:t>
+              <a:t>Passwords, keys, financial account numbers</a:t>
             </a:r>
             <a:endParaRPr lang="en-US" sz="1400" dirty="0"/>
           </a:p>
@@ -12173,8 +12429,7 @@
                 <a:ea typeface="Calibri" pitchFamily="34" charset="-122"/>
                 <a:cs typeface="Calibri" pitchFamily="34" charset="-120"/>
               </a:rPr>
-              <a:t>Trade secrets &amp; confidential contracts
-</a:t>
+              <a:t>Trade secrets &amp; confidential contracts</a:t>
             </a:r>
             <a:endParaRPr lang="en-US" sz="1400" dirty="0"/>
           </a:p>
@@ -12198,8 +12453,7 @@
                 <a:ea typeface="Calibri" pitchFamily="34" charset="-122"/>
                 <a:cs typeface="Calibri" pitchFamily="34" charset="-120"/>
               </a:rPr>
-              <a:t>Anything covered by an NDA or regulation
-</a:t>
+              <a:t>Anything covered by an NDA or regulation</a:t>
             </a:r>
             <a:endParaRPr lang="en-US" sz="1400" dirty="0"/>
           </a:p>
@@ -12250,6 +12504,13 @@
           </a:solidFill>
           <a:ln/>
         </p:spPr>
+        <p:txBody>
+          <a:bodyPr/>
+          <a:lstStyle/>
+          <a:p>
+            <a:endParaRPr lang="en-US"/>
+          </a:p>
+        </p:txBody>
       </p:sp>
       <p:sp>
         <p:nvSpPr>
@@ -12272,7 +12533,7 @@
           <a:bodyPr wrap="square" lIns="0" tIns="0" rIns="0" bIns="0" rtlCol="0" anchor="ctr"/>
           <a:lstStyle/>
           <a:p>
-            <a:pPr indent="0" marL="0">
+            <a:pPr marL="0" indent="0">
               <a:lnSpc>
                 <a:spcPct val="108000"/>
               </a:lnSpc>
@@ -12289,12 +12550,6 @@
               </a:rPr>
               <a:t>Two rules that cover most cases: </a:t>
             </a:r>
-            <a:pPr indent="0" marL="0">
-              <a:lnSpc>
-                <a:spcPct val="108000"/>
-              </a:lnSpc>
-              <a:buNone/>
-            </a:pPr>
             <a:r>
               <a:rPr lang="en-US" sz="1400" dirty="0">
                 <a:solidFill>
@@ -12331,7 +12586,7 @@
           <a:bodyPr wrap="square" lIns="0" tIns="0" rIns="0" bIns="0" rtlCol="0" anchor="ctr"/>
           <a:lstStyle/>
           <a:p>
-            <a:pPr algn="l" indent="0" marL="0">
+            <a:pPr marL="0" indent="0" algn="l">
               <a:buNone/>
             </a:pPr>
             <a:r>
@@ -12370,7 +12625,7 @@
           <a:bodyPr wrap="square" lIns="0" tIns="0" rIns="0" bIns="0" rtlCol="0" anchor="ctr"/>
           <a:lstStyle/>
           <a:p>
-            <a:pPr algn="r" indent="0" marL="0">
+            <a:pPr marL="0" indent="0" algn="r">
               <a:buNone/>
             </a:pPr>
             <a:r>
@@ -12404,6 +12659,7 @@
         <a:solidFill>
           <a:srgbClr val="1B2A4A"/>
         </a:solidFill>
+        <a:effectLst/>
       </p:bgPr>
     </p:bg>
     <p:spTree>
@@ -12439,6 +12695,13 @@
           </a:solidFill>
           <a:ln/>
         </p:spPr>
+        <p:txBody>
+          <a:bodyPr/>
+          <a:lstStyle/>
+          <a:p>
+            <a:endParaRPr lang="en-US"/>
+          </a:p>
+        </p:txBody>
       </p:sp>
       <p:sp>
         <p:nvSpPr>
@@ -12461,11 +12724,11 @@
           <a:bodyPr wrap="square" lIns="0" tIns="0" rIns="0" bIns="0" rtlCol="0" anchor="ctr"/>
           <a:lstStyle/>
           <a:p>
-            <a:pPr indent="0" marL="0">
-              <a:buNone/>
-            </a:pPr>
-            <a:r>
-              <a:rPr lang="en-US" sz="1200" b="1" spc="200" kern="0" dirty="0">
+            <a:pPr marL="0" indent="0">
+              <a:buNone/>
+            </a:pPr>
+            <a:r>
+              <a:rPr lang="en-US" sz="1200" b="1" kern="0" spc="200" dirty="0">
                 <a:solidFill>
                   <a:srgbClr val="5FB3B3"/>
                 </a:solidFill>
@@ -12500,7 +12763,7 @@
           <a:bodyPr wrap="square" lIns="0" tIns="0" rIns="0" bIns="0" rtlCol="0" anchor="ctr"/>
           <a:lstStyle/>
           <a:p>
-            <a:pPr indent="0" marL="0">
+            <a:pPr marL="0" indent="0">
               <a:buNone/>
             </a:pPr>
             <a:r>
@@ -12539,7 +12802,7 @@
           <a:bodyPr wrap="square" lIns="0" tIns="0" rIns="0" bIns="0" rtlCol="0" anchor="ctr"/>
           <a:lstStyle/>
           <a:p>
-            <a:pPr indent="0" marL="0">
+            <a:pPr marL="0" indent="0">
               <a:lnSpc>
                 <a:spcPct val="112000"/>
               </a:lnSpc>
@@ -12586,6 +12849,13 @@
             <a:prstDash val="solid"/>
           </a:ln>
         </p:spPr>
+        <p:txBody>
+          <a:bodyPr/>
+          <a:lstStyle/>
+          <a:p>
+            <a:endParaRPr lang="en-US"/>
+          </a:p>
+        </p:txBody>
       </p:sp>
       <p:sp>
         <p:nvSpPr>
@@ -12606,17 +12876,24 @@
           </a:solidFill>
           <a:ln/>
         </p:spPr>
+        <p:txBody>
+          <a:bodyPr/>
+          <a:lstStyle/>
+          <a:p>
+            <a:endParaRPr lang="en-US"/>
+          </a:p>
+        </p:txBody>
       </p:sp>
       <p:pic>
         <p:nvPicPr>
-          <p:cNvPr id="8" name="Image 0" descr="preencoded.png">    </p:cNvPr>
+          <p:cNvPr id="8" name="Image 0" descr="preencoded.png"/>
           <p:cNvPicPr>
             <a:picLocks noChangeAspect="1"/>
           </p:cNvPicPr>
           <p:nvPr/>
         </p:nvPicPr>
         <p:blipFill>
-          <a:blip r:embed="rId1"/>
+          <a:blip r:embed="rId3"/>
           <a:stretch>
             <a:fillRect/>
           </a:stretch>
@@ -12652,7 +12929,7 @@
           <a:bodyPr wrap="square" lIns="0" tIns="0" rIns="0" bIns="0" rtlCol="0" anchor="ctr"/>
           <a:lstStyle/>
           <a:p>
-            <a:pPr indent="0" marL="0">
+            <a:pPr marL="0" indent="0">
               <a:buNone/>
             </a:pPr>
             <a:r>
@@ -12691,7 +12968,7 @@
           <a:bodyPr wrap="square" lIns="0" tIns="0" rIns="0" bIns="0" rtlCol="0" anchor="ctr"/>
           <a:lstStyle/>
           <a:p>
-            <a:pPr indent="0" marL="0">
+            <a:pPr marL="0" indent="0">
               <a:buNone/>
             </a:pPr>
             <a:r>
@@ -12853,6 +13130,13 @@
             <a:prstDash val="solid"/>
           </a:ln>
         </p:spPr>
+        <p:txBody>
+          <a:bodyPr/>
+          <a:lstStyle/>
+          <a:p>
+            <a:endParaRPr lang="en-US"/>
+          </a:p>
+        </p:txBody>
       </p:sp>
       <p:sp>
         <p:nvSpPr>
@@ -12873,17 +13157,24 @@
           </a:solidFill>
           <a:ln/>
         </p:spPr>
+        <p:txBody>
+          <a:bodyPr/>
+          <a:lstStyle/>
+          <a:p>
+            <a:endParaRPr lang="en-US"/>
+          </a:p>
+        </p:txBody>
       </p:sp>
       <p:pic>
         <p:nvPicPr>
-          <p:cNvPr id="14" name="Image 1" descr="preencoded.png">    </p:cNvPr>
+          <p:cNvPr id="14" name="Image 1" descr="preencoded.png"/>
           <p:cNvPicPr>
             <a:picLocks noChangeAspect="1"/>
           </p:cNvPicPr>
           <p:nvPr/>
         </p:nvPicPr>
         <p:blipFill>
-          <a:blip r:embed="rId2"/>
+          <a:blip r:embed="rId4"/>
           <a:stretch>
             <a:fillRect/>
           </a:stretch>
@@ -12919,7 +13210,7 @@
           <a:bodyPr wrap="square" lIns="0" tIns="0" rIns="0" bIns="0" rtlCol="0" anchor="ctr"/>
           <a:lstStyle/>
           <a:p>
-            <a:pPr indent="0" marL="0">
+            <a:pPr marL="0" indent="0">
               <a:buNone/>
             </a:pPr>
             <a:r>
@@ -12958,7 +13249,7 @@
           <a:bodyPr wrap="square" lIns="0" tIns="0" rIns="0" bIns="0" rtlCol="0" anchor="ctr"/>
           <a:lstStyle/>
           <a:p>
-            <a:pPr indent="0" marL="0">
+            <a:pPr marL="0" indent="0">
               <a:buNone/>
             </a:pPr>
             <a:r>
@@ -13120,17 +13411,24 @@
             <a:prstDash val="solid"/>
           </a:ln>
         </p:spPr>
+        <p:txBody>
+          <a:bodyPr/>
+          <a:lstStyle/>
+          <a:p>
+            <a:endParaRPr lang="en-US"/>
+          </a:p>
+        </p:txBody>
       </p:sp>
       <p:pic>
         <p:nvPicPr>
-          <p:cNvPr id="19" name="Image 2" descr="preencoded.png">    </p:cNvPr>
+          <p:cNvPr id="19" name="Image 2" descr="preencoded.png"/>
           <p:cNvPicPr>
             <a:picLocks noChangeAspect="1"/>
           </p:cNvPicPr>
           <p:nvPr/>
         </p:nvPicPr>
         <p:blipFill>
-          <a:blip r:embed="rId3"/>
+          <a:blip r:embed="rId5"/>
           <a:stretch>
             <a:fillRect/>
           </a:stretch>
@@ -13166,7 +13464,7 @@
           <a:bodyPr wrap="square" lIns="0" tIns="0" rIns="0" bIns="0" rtlCol="0" anchor="ctr"/>
           <a:lstStyle/>
           <a:p>
-            <a:pPr indent="0" marL="0">
+            <a:pPr marL="0" indent="0">
               <a:lnSpc>
                 <a:spcPct val="105000"/>
               </a:lnSpc>
@@ -13183,12 +13481,6 @@
               </a:rPr>
               <a:t>These are upgrades, not prerequisites. </a:t>
             </a:r>
-            <a:pPr indent="0" marL="0">
-              <a:lnSpc>
-                <a:spcPct val="105000"/>
-              </a:lnSpc>
-              <a:buNone/>
-            </a:pPr>
             <a:r>
               <a:rPr lang="en-US" sz="1350" dirty="0">
                 <a:solidFill>
@@ -13225,7 +13517,7 @@
           <a:bodyPr wrap="square" lIns="0" tIns="0" rIns="0" bIns="0" rtlCol="0" anchor="ctr"/>
           <a:lstStyle/>
           <a:p>
-            <a:pPr algn="l" indent="0" marL="0">
+            <a:pPr marL="0" indent="0" algn="l">
               <a:buNone/>
             </a:pPr>
             <a:r>
@@ -13264,7 +13556,7 @@
           <a:bodyPr wrap="square" lIns="0" tIns="0" rIns="0" bIns="0" rtlCol="0" anchor="ctr"/>
           <a:lstStyle/>
           <a:p>
-            <a:pPr algn="r" indent="0" marL="0">
+            <a:pPr marL="0" indent="0" algn="r">
               <a:buNone/>
             </a:pPr>
             <a:r>
@@ -13298,6 +13590,7 @@
         <a:solidFill>
           <a:srgbClr val="F5F7FA"/>
         </a:solidFill>
+        <a:effectLst/>
       </p:bgPr>
     </p:bg>
     <p:spTree>
@@ -13333,6 +13626,13 @@
           </a:solidFill>
           <a:ln/>
         </p:spPr>
+        <p:txBody>
+          <a:bodyPr/>
+          <a:lstStyle/>
+          <a:p>
+            <a:endParaRPr lang="en-US"/>
+          </a:p>
+        </p:txBody>
       </p:sp>
       <p:sp>
         <p:nvSpPr>
@@ -13355,11 +13655,11 @@
           <a:bodyPr wrap="square" lIns="0" tIns="0" rIns="0" bIns="0" rtlCol="0" anchor="ctr"/>
           <a:lstStyle/>
           <a:p>
-            <a:pPr indent="0" marL="0">
-              <a:buNone/>
-            </a:pPr>
-            <a:r>
-              <a:rPr lang="en-US" sz="1200" b="1" spc="200" kern="0" dirty="0">
+            <a:pPr marL="0" indent="0">
+              <a:buNone/>
+            </a:pPr>
+            <a:r>
+              <a:rPr lang="en-US" sz="1200" b="1" kern="0" spc="200" dirty="0">
                 <a:solidFill>
                   <a:srgbClr val="2C8C8C"/>
                 </a:solidFill>
@@ -13394,7 +13694,7 @@
           <a:bodyPr wrap="square" lIns="0" tIns="0" rIns="0" bIns="0" rtlCol="0" anchor="ctr"/>
           <a:lstStyle/>
           <a:p>
-            <a:pPr indent="0" marL="0">
+            <a:pPr marL="0" indent="0">
               <a:buNone/>
             </a:pPr>
             <a:r>
@@ -13438,13 +13738,20 @@
             <a:prstDash val="solid"/>
           </a:ln>
           <a:effectLst>
-            <a:outerShdw sx="100000" sy="100000" kx="0" ky="0" algn="bl" rotWithShape="0" blurRad="88900" dist="38100" dir="8100000">
+            <a:outerShdw blurRad="88900" dist="38100" dir="8100000" algn="bl" rotWithShape="0">
               <a:srgbClr val="000000">
                 <a:alpha val="16000"/>
               </a:srgbClr>
             </a:outerShdw>
           </a:effectLst>
         </p:spPr>
+        <p:txBody>
+          <a:bodyPr/>
+          <a:lstStyle/>
+          <a:p>
+            <a:endParaRPr lang="en-US"/>
+          </a:p>
+        </p:txBody>
       </p:sp>
       <p:sp>
         <p:nvSpPr>
@@ -13465,6 +13772,13 @@
           </a:solidFill>
           <a:ln/>
         </p:spPr>
+        <p:txBody>
+          <a:bodyPr/>
+          <a:lstStyle/>
+          <a:p>
+            <a:endParaRPr lang="en-US"/>
+          </a:p>
+        </p:txBody>
       </p:sp>
       <p:sp>
         <p:nvSpPr>
@@ -13485,17 +13799,24 @@
           </a:solidFill>
           <a:ln/>
         </p:spPr>
+        <p:txBody>
+          <a:bodyPr/>
+          <a:lstStyle/>
+          <a:p>
+            <a:endParaRPr lang="en-US"/>
+          </a:p>
+        </p:txBody>
       </p:sp>
       <p:pic>
         <p:nvPicPr>
-          <p:cNvPr id="8" name="Image 0" descr="preencoded.png">    </p:cNvPr>
+          <p:cNvPr id="8" name="Image 0" descr="preencoded.png"/>
           <p:cNvPicPr>
             <a:picLocks noChangeAspect="1"/>
           </p:cNvPicPr>
           <p:nvPr/>
         </p:nvPicPr>
         <p:blipFill>
-          <a:blip r:embed="rId1"/>
+          <a:blip r:embed="rId3"/>
           <a:stretch>
             <a:fillRect/>
           </a:stretch>
@@ -13531,7 +13852,7 @@
           <a:bodyPr wrap="square" lIns="0" tIns="0" rIns="0" bIns="0" rtlCol="0" anchor="ctr"/>
           <a:lstStyle/>
           <a:p>
-            <a:pPr algn="ctr" indent="0" marL="0">
+            <a:pPr marL="0" indent="0" algn="ctr">
               <a:buNone/>
             </a:pPr>
             <a:r>
@@ -13570,7 +13891,7 @@
           <a:bodyPr wrap="square" lIns="0" tIns="0" rIns="0" bIns="0" rtlCol="0" anchor="ctr"/>
           <a:lstStyle/>
           <a:p>
-            <a:pPr algn="ctr" indent="0" marL="0">
+            <a:pPr marL="0" indent="0" algn="ctr">
               <a:lnSpc>
                 <a:spcPct val="110000"/>
               </a:lnSpc>
@@ -13617,13 +13938,20 @@
             <a:prstDash val="solid"/>
           </a:ln>
           <a:effectLst>
-            <a:outerShdw sx="100000" sy="100000" kx="0" ky="0" algn="bl" rotWithShape="0" blurRad="88900" dist="38100" dir="8100000">
+            <a:outerShdw blurRad="88900" dist="38100" dir="8100000" algn="bl" rotWithShape="0">
               <a:srgbClr val="000000">
                 <a:alpha val="16000"/>
               </a:srgbClr>
             </a:outerShdw>
           </a:effectLst>
         </p:spPr>
+        <p:txBody>
+          <a:bodyPr/>
+          <a:lstStyle/>
+          <a:p>
+            <a:endParaRPr lang="en-US"/>
+          </a:p>
+        </p:txBody>
       </p:sp>
       <p:sp>
         <p:nvSpPr>
@@ -13644,6 +13972,13 @@
           </a:solidFill>
           <a:ln/>
         </p:spPr>
+        <p:txBody>
+          <a:bodyPr/>
+          <a:lstStyle/>
+          <a:p>
+            <a:endParaRPr lang="en-US"/>
+          </a:p>
+        </p:txBody>
       </p:sp>
       <p:sp>
         <p:nvSpPr>
@@ -13664,17 +13999,24 @@
           </a:solidFill>
           <a:ln/>
         </p:spPr>
+        <p:txBody>
+          <a:bodyPr/>
+          <a:lstStyle/>
+          <a:p>
+            <a:endParaRPr lang="en-US"/>
+          </a:p>
+        </p:txBody>
       </p:sp>
       <p:pic>
         <p:nvPicPr>
-          <p:cNvPr id="14" name="Image 1" descr="preencoded.png">    </p:cNvPr>
+          <p:cNvPr id="14" name="Image 1" descr="preencoded.png"/>
           <p:cNvPicPr>
             <a:picLocks noChangeAspect="1"/>
           </p:cNvPicPr>
           <p:nvPr/>
         </p:nvPicPr>
         <p:blipFill>
-          <a:blip r:embed="rId2"/>
+          <a:blip r:embed="rId4"/>
           <a:stretch>
             <a:fillRect/>
           </a:stretch>
@@ -13710,7 +14052,7 @@
           <a:bodyPr wrap="square" lIns="0" tIns="0" rIns="0" bIns="0" rtlCol="0" anchor="ctr"/>
           <a:lstStyle/>
           <a:p>
-            <a:pPr algn="ctr" indent="0" marL="0">
+            <a:pPr marL="0" indent="0" algn="ctr">
               <a:buNone/>
             </a:pPr>
             <a:r>
@@ -13749,7 +14091,7 @@
           <a:bodyPr wrap="square" lIns="0" tIns="0" rIns="0" bIns="0" rtlCol="0" anchor="ctr"/>
           <a:lstStyle/>
           <a:p>
-            <a:pPr algn="ctr" indent="0" marL="0">
+            <a:pPr marL="0" indent="0" algn="ctr">
               <a:lnSpc>
                 <a:spcPct val="110000"/>
               </a:lnSpc>
@@ -13796,13 +14138,20 @@
             <a:prstDash val="solid"/>
           </a:ln>
           <a:effectLst>
-            <a:outerShdw sx="100000" sy="100000" kx="0" ky="0" algn="bl" rotWithShape="0" blurRad="88900" dist="38100" dir="8100000">
+            <a:outerShdw blurRad="88900" dist="38100" dir="8100000" algn="bl" rotWithShape="0">
               <a:srgbClr val="000000">
                 <a:alpha val="16000"/>
               </a:srgbClr>
             </a:outerShdw>
           </a:effectLst>
         </p:spPr>
+        <p:txBody>
+          <a:bodyPr/>
+          <a:lstStyle/>
+          <a:p>
+            <a:endParaRPr lang="en-US"/>
+          </a:p>
+        </p:txBody>
       </p:sp>
       <p:sp>
         <p:nvSpPr>
@@ -13823,6 +14172,13 @@
           </a:solidFill>
           <a:ln/>
         </p:spPr>
+        <p:txBody>
+          <a:bodyPr/>
+          <a:lstStyle/>
+          <a:p>
+            <a:endParaRPr lang="en-US"/>
+          </a:p>
+        </p:txBody>
       </p:sp>
       <p:sp>
         <p:nvSpPr>
@@ -13843,17 +14199,24 @@
           </a:solidFill>
           <a:ln/>
         </p:spPr>
+        <p:txBody>
+          <a:bodyPr/>
+          <a:lstStyle/>
+          <a:p>
+            <a:endParaRPr lang="en-US"/>
+          </a:p>
+        </p:txBody>
       </p:sp>
       <p:pic>
         <p:nvPicPr>
-          <p:cNvPr id="20" name="Image 2" descr="preencoded.png">    </p:cNvPr>
+          <p:cNvPr id="20" name="Image 2" descr="preencoded.png"/>
           <p:cNvPicPr>
             <a:picLocks noChangeAspect="1"/>
           </p:cNvPicPr>
           <p:nvPr/>
         </p:nvPicPr>
         <p:blipFill>
-          <a:blip r:embed="rId3"/>
+          <a:blip r:embed="rId5"/>
           <a:stretch>
             <a:fillRect/>
           </a:stretch>
@@ -13889,7 +14252,7 @@
           <a:bodyPr wrap="square" lIns="0" tIns="0" rIns="0" bIns="0" rtlCol="0" anchor="ctr"/>
           <a:lstStyle/>
           <a:p>
-            <a:pPr algn="ctr" indent="0" marL="0">
+            <a:pPr marL="0" indent="0" algn="ctr">
               <a:buNone/>
             </a:pPr>
             <a:r>
@@ -13928,7 +14291,7 @@
           <a:bodyPr wrap="square" lIns="0" tIns="0" rIns="0" bIns="0" rtlCol="0" anchor="ctr"/>
           <a:lstStyle/>
           <a:p>
-            <a:pPr algn="ctr" indent="0" marL="0">
+            <a:pPr marL="0" indent="0" algn="ctr">
               <a:lnSpc>
                 <a:spcPct val="110000"/>
               </a:lnSpc>
@@ -13970,6 +14333,13 @@
           </a:solidFill>
           <a:ln/>
         </p:spPr>
+        <p:txBody>
+          <a:bodyPr/>
+          <a:lstStyle/>
+          <a:p>
+            <a:endParaRPr lang="en-US"/>
+          </a:p>
+        </p:txBody>
       </p:sp>
       <p:sp>
         <p:nvSpPr>
@@ -13992,11 +14362,11 @@
           <a:bodyPr wrap="square" lIns="0" tIns="0" rIns="0" bIns="0" rtlCol="0" anchor="ctr"/>
           <a:lstStyle/>
           <a:p>
-            <a:pPr indent="0" marL="0">
-              <a:buNone/>
-            </a:pPr>
-            <a:r>
-              <a:rPr lang="en-US" sz="1100" b="1" spc="150" kern="0" dirty="0">
+            <a:pPr marL="0" indent="0">
+              <a:buNone/>
+            </a:pPr>
+            <a:r>
+              <a:rPr lang="en-US" sz="1100" b="1" kern="0" spc="150" dirty="0">
                 <a:solidFill>
                   <a:srgbClr val="E8A33D"/>
                 </a:solidFill>
@@ -14031,7 +14401,7 @@
           <a:bodyPr wrap="square" lIns="0" tIns="0" rIns="0" bIns="0" rtlCol="0" anchor="ctr"/>
           <a:lstStyle/>
           <a:p>
-            <a:pPr indent="0" marL="0">
+            <a:pPr marL="0" indent="0">
               <a:buNone/>
             </a:pPr>
             <a:r>
@@ -14070,7 +14440,7 @@
           <a:bodyPr wrap="square" lIns="0" tIns="0" rIns="0" bIns="0" rtlCol="0" anchor="ctr"/>
           <a:lstStyle/>
           <a:p>
-            <a:pPr algn="l" indent="0" marL="0">
+            <a:pPr marL="0" indent="0" algn="l">
               <a:buNone/>
             </a:pPr>
             <a:r>
@@ -14109,7 +14479,7 @@
           <a:bodyPr wrap="square" lIns="0" tIns="0" rIns="0" bIns="0" rtlCol="0" anchor="ctr"/>
           <a:lstStyle/>
           <a:p>
-            <a:pPr algn="r" indent="0" marL="0">
+            <a:pPr marL="0" indent="0" algn="r">
               <a:buNone/>
             </a:pPr>
             <a:r>
@@ -14143,6 +14513,7 @@
         <a:solidFill>
           <a:srgbClr val="1B2A4A"/>
         </a:solidFill>
+        <a:effectLst/>
       </p:bgPr>
     </p:bg>
     <p:spTree>
@@ -14178,6 +14549,13 @@
           </a:solidFill>
           <a:ln/>
         </p:spPr>
+        <p:txBody>
+          <a:bodyPr/>
+          <a:lstStyle/>
+          <a:p>
+            <a:endParaRPr lang="en-US"/>
+          </a:p>
+        </p:txBody>
       </p:sp>
       <p:sp>
         <p:nvSpPr>
@@ -14198,6 +14576,13 @@
           </a:solidFill>
           <a:ln/>
         </p:spPr>
+        <p:txBody>
+          <a:bodyPr/>
+          <a:lstStyle/>
+          <a:p>
+            <a:endParaRPr lang="en-US"/>
+          </a:p>
+        </p:txBody>
       </p:sp>
       <p:sp>
         <p:nvSpPr>
@@ -14220,7 +14605,7 @@
           <a:bodyPr wrap="square" lIns="0" tIns="0" rIns="0" bIns="0" rtlCol="0" anchor="ctr"/>
           <a:lstStyle/>
           <a:p>
-            <a:pPr indent="0" marL="0">
+            <a:pPr marL="0" indent="0">
               <a:buNone/>
             </a:pPr>
             <a:r>
@@ -14259,7 +14644,7 @@
           <a:bodyPr wrap="square" lIns="0" tIns="0" rIns="0" bIns="0" rtlCol="0" anchor="ctr"/>
           <a:lstStyle/>
           <a:p>
-            <a:pPr indent="0" marL="0">
+            <a:pPr marL="0" indent="0">
               <a:lnSpc>
                 <a:spcPct val="115000"/>
               </a:lnSpc>
@@ -14306,6 +14691,13 @@
             <a:prstDash val="solid"/>
           </a:ln>
         </p:spPr>
+        <p:txBody>
+          <a:bodyPr/>
+          <a:lstStyle/>
+          <a:p>
+            <a:endParaRPr lang="en-US"/>
+          </a:p>
+        </p:txBody>
       </p:sp>
       <p:sp>
         <p:nvSpPr>
@@ -14328,11 +14720,11 @@
           <a:bodyPr wrap="square" lIns="0" tIns="0" rIns="0" bIns="0" rtlCol="0" anchor="ctr"/>
           <a:lstStyle/>
           <a:p>
-            <a:pPr indent="0" marL="0">
-              <a:buNone/>
-            </a:pPr>
-            <a:r>
-              <a:rPr lang="en-US" sz="1200" b="1" spc="150" kern="0" dirty="0">
+            <a:pPr marL="0" indent="0">
+              <a:buNone/>
+            </a:pPr>
+            <a:r>
+              <a:rPr lang="en-US" sz="1200" b="1" kern="0" spc="150" dirty="0">
                 <a:solidFill>
                   <a:srgbClr val="E8A33D"/>
                 </a:solidFill>
@@ -14365,254 +14757,17 @@
           </a:solidFill>
           <a:ln/>
         </p:spPr>
+        <p:txBody>
+          <a:bodyPr/>
+          <a:lstStyle/>
+          <a:p>
+            <a:endParaRPr lang="en-US"/>
+          </a:p>
+        </p:txBody>
       </p:sp>
       <p:pic>
         <p:nvPicPr>
-          <p:cNvPr id="9" name="Image 0" descr="preencoded.png">    </p:cNvPr>
-          <p:cNvPicPr>
-            <a:picLocks noChangeAspect="1"/>
-          </p:cNvPicPr>
-          <p:nvPr/>
-        </p:nvPicPr>
-        <p:blipFill>
-          <a:blip r:embed="rId1"/>
-          <a:stretch>
-            <a:fillRect/>
-          </a:stretch>
-        </p:blipFill>
-        <p:spPr>
-          <a:xfrm>
-            <a:off x="1271016" y="3904488"/>
-            <a:ext cx="256032" cy="256032"/>
-          </a:xfrm>
-          <a:prstGeom prst="rect">
-            <a:avLst/>
-          </a:prstGeom>
-        </p:spPr>
-      </p:pic>
-      <p:sp>
-        <p:nvSpPr>
-          <p:cNvPr id="10" name="Text 7"/>
-          <p:cNvSpPr/>
-          <p:nvPr/>
-        </p:nvSpPr>
-        <p:spPr>
-          <a:xfrm>
-            <a:off x="1801368" y="3712464"/>
-            <a:ext cx="4343400" cy="329184"/>
-          </a:xfrm>
-          <a:prstGeom prst="rect">
-            <a:avLst/>
-          </a:prstGeom>
-          <a:noFill/>
-          <a:ln/>
-        </p:spPr>
-        <p:txBody>
-          <a:bodyPr wrap="square" lIns="0" tIns="0" rIns="0" bIns="0" rtlCol="0" anchor="ctr"/>
-          <a:lstStyle/>
-          <a:p>
-            <a:pPr indent="0" marL="0">
-              <a:buNone/>
-            </a:pPr>
-            <a:r>
-              <a:rPr lang="en-US" sz="1450" b="1" dirty="0">
-                <a:solidFill>
-                  <a:srgbClr val="FFFFFF"/>
-                </a:solidFill>
-                <a:latin typeface="Calibri" pitchFamily="34" charset="0"/>
-                <a:ea typeface="Calibri" pitchFamily="34" charset="-122"/>
-                <a:cs typeface="Calibri" pitchFamily="34" charset="-120"/>
-              </a:rPr>
-              <a:t>These slides</a:t>
-            </a:r>
-            <a:endParaRPr lang="en-US" sz="1450" dirty="0"/>
-          </a:p>
-        </p:txBody>
-      </p:sp>
-      <p:sp>
-        <p:nvSpPr>
-          <p:cNvPr id="11" name="Text 8"/>
-          <p:cNvSpPr/>
-          <p:nvPr/>
-        </p:nvSpPr>
-        <p:spPr>
-          <a:xfrm>
-            <a:off x="1801368" y="4032504"/>
-            <a:ext cx="4343400" cy="329184"/>
-          </a:xfrm>
-          <a:prstGeom prst="rect">
-            <a:avLst/>
-          </a:prstGeom>
-          <a:noFill/>
-          <a:ln/>
-        </p:spPr>
-        <p:txBody>
-          <a:bodyPr wrap="square" lIns="0" tIns="0" rIns="0" bIns="0" rtlCol="0" anchor="ctr"/>
-          <a:lstStyle/>
-          <a:p>
-            <a:pPr indent="0" marL="0">
-              <a:buNone/>
-            </a:pPr>
-            <a:r>
-              <a:rPr lang="en-US" sz="1100" dirty="0">
-                <a:solidFill>
-                  <a:srgbClr val="9FB0C9"/>
-                </a:solidFill>
-                <a:latin typeface="Calibri" pitchFamily="34" charset="0"/>
-                <a:ea typeface="Calibri" pitchFamily="34" charset="-122"/>
-                <a:cs typeface="Calibri" pitchFamily="34" charset="-120"/>
-              </a:rPr>
-              <a:t>With full speaker notes on every slide</a:t>
-            </a:r>
-            <a:endParaRPr lang="en-US" sz="1100" dirty="0"/>
-          </a:p>
-        </p:txBody>
-      </p:sp>
-      <p:sp>
-        <p:nvSpPr>
-          <p:cNvPr id="12" name="Shape 9"/>
-          <p:cNvSpPr/>
-          <p:nvPr/>
-        </p:nvSpPr>
-        <p:spPr>
-          <a:xfrm>
-            <a:off x="6263640" y="3785616"/>
-            <a:ext cx="502920" cy="502920"/>
-          </a:xfrm>
-          <a:prstGeom prst="ellipse">
-            <a:avLst/>
-          </a:prstGeom>
-          <a:solidFill>
-            <a:srgbClr val="E8A33D"/>
-          </a:solidFill>
-          <a:ln/>
-        </p:spPr>
-      </p:sp>
-      <p:pic>
-        <p:nvPicPr>
-          <p:cNvPr id="13" name="Image 1" descr="preencoded.png">    </p:cNvPr>
-          <p:cNvPicPr>
-            <a:picLocks noChangeAspect="1"/>
-          </p:cNvPicPr>
-          <p:nvPr/>
-        </p:nvPicPr>
-        <p:blipFill>
-          <a:blip r:embed="rId2"/>
-          <a:stretch>
-            <a:fillRect/>
-          </a:stretch>
-        </p:blipFill>
-        <p:spPr>
-          <a:xfrm>
-            <a:off x="6391656" y="3904488"/>
-            <a:ext cx="256032" cy="256032"/>
-          </a:xfrm>
-          <a:prstGeom prst="rect">
-            <a:avLst/>
-          </a:prstGeom>
-        </p:spPr>
-      </p:pic>
-      <p:sp>
-        <p:nvSpPr>
-          <p:cNvPr id="14" name="Text 10"/>
-          <p:cNvSpPr/>
-          <p:nvPr/>
-        </p:nvSpPr>
-        <p:spPr>
-          <a:xfrm>
-            <a:off x="6922008" y="3712464"/>
-            <a:ext cx="4343400" cy="329184"/>
-          </a:xfrm>
-          <a:prstGeom prst="rect">
-            <a:avLst/>
-          </a:prstGeom>
-          <a:noFill/>
-          <a:ln/>
-        </p:spPr>
-        <p:txBody>
-          <a:bodyPr wrap="square" lIns="0" tIns="0" rIns="0" bIns="0" rtlCol="0" anchor="ctr"/>
-          <a:lstStyle/>
-          <a:p>
-            <a:pPr indent="0" marL="0">
-              <a:buNone/>
-            </a:pPr>
-            <a:r>
-              <a:rPr lang="en-US" sz="1450" b="1" dirty="0">
-                <a:solidFill>
-                  <a:srgbClr val="FFFFFF"/>
-                </a:solidFill>
-                <a:latin typeface="Calibri" pitchFamily="34" charset="0"/>
-                <a:ea typeface="Calibri" pitchFamily="34" charset="-122"/>
-                <a:cs typeface="Calibri" pitchFamily="34" charset="-120"/>
-              </a:rPr>
-              <a:t>Demo Pack &amp; Slide Map</a:t>
-            </a:r>
-            <a:endParaRPr lang="en-US" sz="1450" dirty="0"/>
-          </a:p>
-        </p:txBody>
-      </p:sp>
-      <p:sp>
-        <p:nvSpPr>
-          <p:cNvPr id="15" name="Text 11"/>
-          <p:cNvSpPr/>
-          <p:nvPr/>
-        </p:nvSpPr>
-        <p:spPr>
-          <a:xfrm>
-            <a:off x="6922008" y="4032504"/>
-            <a:ext cx="4343400" cy="329184"/>
-          </a:xfrm>
-          <a:prstGeom prst="rect">
-            <a:avLst/>
-          </a:prstGeom>
-          <a:noFill/>
-          <a:ln/>
-        </p:spPr>
-        <p:txBody>
-          <a:bodyPr wrap="square" lIns="0" tIns="0" rIns="0" bIns="0" rtlCol="0" anchor="ctr"/>
-          <a:lstStyle/>
-          <a:p>
-            <a:pPr indent="0" marL="0">
-              <a:buNone/>
-            </a:pPr>
-            <a:r>
-              <a:rPr lang="en-US" sz="1100" dirty="0">
-                <a:solidFill>
-                  <a:srgbClr val="9FB0C9"/>
-                </a:solidFill>
-                <a:latin typeface="Calibri" pitchFamily="34" charset="0"/>
-                <a:ea typeface="Calibri" pitchFamily="34" charset="-122"/>
-                <a:cs typeface="Calibri" pitchFamily="34" charset="-120"/>
-              </a:rPr>
-              <a:t>Every demo's prompt + sample, mapped to slides</a:t>
-            </a:r>
-            <a:endParaRPr lang="en-US" sz="1100" dirty="0"/>
-          </a:p>
-        </p:txBody>
-      </p:sp>
-      <p:sp>
-        <p:nvSpPr>
-          <p:cNvPr id="16" name="Shape 12"/>
-          <p:cNvSpPr/>
-          <p:nvPr/>
-        </p:nvSpPr>
-        <p:spPr>
-          <a:xfrm>
-            <a:off x="1143000" y="4498848"/>
-            <a:ext cx="502920" cy="502920"/>
-          </a:xfrm>
-          <a:prstGeom prst="ellipse">
-            <a:avLst/>
-          </a:prstGeom>
-          <a:solidFill>
-            <a:srgbClr val="E8A33D"/>
-          </a:solidFill>
-          <a:ln/>
-        </p:spPr>
-      </p:sp>
-      <p:pic>
-        <p:nvPicPr>
-          <p:cNvPr id="17" name="Image 2" descr="preencoded.png">    </p:cNvPr>
+          <p:cNvPr id="9" name="Image 0" descr="preencoded.png"/>
           <p:cNvPicPr>
             <a:picLocks noChangeAspect="1"/>
           </p:cNvPicPr>
@@ -14626,7 +14781,7 @@
         </p:blipFill>
         <p:spPr>
           <a:xfrm>
-            <a:off x="1271016" y="4617720"/>
+            <a:off x="1271016" y="3904488"/>
             <a:ext cx="256032" cy="256032"/>
           </a:xfrm>
           <a:prstGeom prst="rect">
@@ -14636,13 +14791,13 @@
       </p:pic>
       <p:sp>
         <p:nvSpPr>
-          <p:cNvPr id="18" name="Text 13"/>
-          <p:cNvSpPr/>
-          <p:nvPr/>
-        </p:nvSpPr>
-        <p:spPr>
-          <a:xfrm>
-            <a:off x="1801368" y="4425696"/>
+          <p:cNvPr id="10" name="Text 7"/>
+          <p:cNvSpPr/>
+          <p:nvPr/>
+        </p:nvSpPr>
+        <p:spPr>
+          <a:xfrm>
+            <a:off x="1801368" y="3712464"/>
             <a:ext cx="4343400" cy="329184"/>
           </a:xfrm>
           <a:prstGeom prst="rect">
@@ -14655,7 +14810,7 @@
           <a:bodyPr wrap="square" lIns="0" tIns="0" rIns="0" bIns="0" rtlCol="0" anchor="ctr"/>
           <a:lstStyle/>
           <a:p>
-            <a:pPr indent="0" marL="0">
+            <a:pPr marL="0" indent="0">
               <a:buNone/>
             </a:pPr>
             <a:r>
@@ -14667,7 +14822,7 @@
                 <a:ea typeface="Calibri" pitchFamily="34" charset="-122"/>
                 <a:cs typeface="Calibri" pitchFamily="34" charset="-120"/>
               </a:rPr>
-              <a:t>Sample files</a:t>
+              <a:t>These slides</a:t>
             </a:r>
             <a:endParaRPr lang="en-US" sz="1450" dirty="0"/>
           </a:p>
@@ -14675,13 +14830,13 @@
       </p:sp>
       <p:sp>
         <p:nvSpPr>
-          <p:cNvPr id="19" name="Text 14"/>
-          <p:cNvSpPr/>
-          <p:nvPr/>
-        </p:nvSpPr>
-        <p:spPr>
-          <a:xfrm>
-            <a:off x="1801368" y="4745736"/>
+          <p:cNvPr id="11" name="Text 8"/>
+          <p:cNvSpPr/>
+          <p:nvPr/>
+        </p:nvSpPr>
+        <p:spPr>
+          <a:xfrm>
+            <a:off x="1801368" y="4032504"/>
             <a:ext cx="4343400" cy="329184"/>
           </a:xfrm>
           <a:prstGeom prst="rect">
@@ -14694,7 +14849,7 @@
           <a:bodyPr wrap="square" lIns="0" tIns="0" rIns="0" bIns="0" rtlCol="0" anchor="ctr"/>
           <a:lstStyle/>
           <a:p>
-            <a:pPr indent="0" marL="0">
+            <a:pPr marL="0" indent="0">
               <a:buNone/>
             </a:pPr>
             <a:r>
@@ -14706,7 +14861,7 @@
                 <a:ea typeface="Calibri" pitchFamily="34" charset="-122"/>
                 <a:cs typeface="Calibri" pitchFamily="34" charset="-120"/>
               </a:rPr>
-              <a:t>Fictional spreadsheet + document to demo with</a:t>
+              <a:t>With full speaker notes on every slide</a:t>
             </a:r>
             <a:endParaRPr lang="en-US" sz="1100" dirty="0"/>
           </a:p>
@@ -14714,13 +14869,13 @@
       </p:sp>
       <p:sp>
         <p:nvSpPr>
-          <p:cNvPr id="20" name="Shape 15"/>
-          <p:cNvSpPr/>
-          <p:nvPr/>
-        </p:nvSpPr>
-        <p:spPr>
-          <a:xfrm>
-            <a:off x="6263640" y="4498848"/>
+          <p:cNvPr id="12" name="Shape 9"/>
+          <p:cNvSpPr/>
+          <p:nvPr/>
+        </p:nvSpPr>
+        <p:spPr>
+          <a:xfrm>
+            <a:off x="6263640" y="3785616"/>
             <a:ext cx="502920" cy="502920"/>
           </a:xfrm>
           <a:prstGeom prst="ellipse">
@@ -14731,10 +14886,17 @@
           </a:solidFill>
           <a:ln/>
         </p:spPr>
+        <p:txBody>
+          <a:bodyPr/>
+          <a:lstStyle/>
+          <a:p>
+            <a:endParaRPr lang="en-US"/>
+          </a:p>
+        </p:txBody>
       </p:sp>
       <p:pic>
         <p:nvPicPr>
-          <p:cNvPr id="21" name="Image 3" descr="preencoded.png">    </p:cNvPr>
+          <p:cNvPr id="13" name="Image 1" descr="preencoded.png"/>
           <p:cNvPicPr>
             <a:picLocks noChangeAspect="1"/>
           </p:cNvPicPr>
@@ -14748,7 +14910,7 @@
         </p:blipFill>
         <p:spPr>
           <a:xfrm>
-            <a:off x="6391656" y="4617720"/>
+            <a:off x="6391656" y="3904488"/>
             <a:ext cx="256032" cy="256032"/>
           </a:xfrm>
           <a:prstGeom prst="rect">
@@ -14758,13 +14920,13 @@
       </p:pic>
       <p:sp>
         <p:nvSpPr>
-          <p:cNvPr id="22" name="Text 16"/>
-          <p:cNvSpPr/>
-          <p:nvPr/>
-        </p:nvSpPr>
-        <p:spPr>
-          <a:xfrm>
-            <a:off x="6922008" y="4425696"/>
+          <p:cNvPr id="14" name="Text 10"/>
+          <p:cNvSpPr/>
+          <p:nvPr/>
+        </p:nvSpPr>
+        <p:spPr>
+          <a:xfrm>
+            <a:off x="6922008" y="3712464"/>
             <a:ext cx="4343400" cy="329184"/>
           </a:xfrm>
           <a:prstGeom prst="rect">
@@ -14777,7 +14939,7 @@
           <a:bodyPr wrap="square" lIns="0" tIns="0" rIns="0" bIns="0" rtlCol="0" anchor="ctr"/>
           <a:lstStyle/>
           <a:p>
-            <a:pPr indent="0" marL="0">
+            <a:pPr marL="0" indent="0">
               <a:buNone/>
             </a:pPr>
             <a:r>
@@ -14789,7 +14951,7 @@
                 <a:ea typeface="Calibri" pitchFamily="34" charset="-122"/>
                 <a:cs typeface="Calibri" pitchFamily="34" charset="-120"/>
               </a:rPr>
-              <a:t>Quick-Start Cheat Sheet</a:t>
+              <a:t>Demo Pack &amp; Slide Map</a:t>
             </a:r>
             <a:endParaRPr lang="en-US" sz="1450" dirty="0"/>
           </a:p>
@@ -14797,13 +14959,13 @@
       </p:sp>
       <p:sp>
         <p:nvSpPr>
-          <p:cNvPr id="23" name="Text 17"/>
-          <p:cNvSpPr/>
-          <p:nvPr/>
-        </p:nvSpPr>
-        <p:spPr>
-          <a:xfrm>
-            <a:off x="6922008" y="4745736"/>
+          <p:cNvPr id="15" name="Text 11"/>
+          <p:cNvSpPr/>
+          <p:nvPr/>
+        </p:nvSpPr>
+        <p:spPr>
+          <a:xfrm>
+            <a:off x="6922008" y="4032504"/>
             <a:ext cx="4343400" cy="329184"/>
           </a:xfrm>
           <a:prstGeom prst="rect">
@@ -14816,7 +14978,7 @@
           <a:bodyPr wrap="square" lIns="0" tIns="0" rIns="0" bIns="0" rtlCol="0" anchor="ctr"/>
           <a:lstStyle/>
           <a:p>
-            <a:pPr indent="0" marL="0">
+            <a:pPr marL="0" indent="0">
               <a:buNone/>
             </a:pPr>
             <a:r>
@@ -14828,7 +14990,7 @@
                 <a:ea typeface="Calibri" pitchFamily="34" charset="-122"/>
                 <a:cs typeface="Calibri" pitchFamily="34" charset="-120"/>
               </a:rPr>
-              <a:t>Prompt patterns + do/don't, one page</a:t>
+              <a:t>Every demo's prompt + sample, mapped to slides</a:t>
             </a:r>
             <a:endParaRPr lang="en-US" sz="1100" dirty="0"/>
           </a:p>
@@ -14836,13 +14998,13 @@
       </p:sp>
       <p:sp>
         <p:nvSpPr>
-          <p:cNvPr id="24" name="Shape 18"/>
-          <p:cNvSpPr/>
-          <p:nvPr/>
-        </p:nvSpPr>
-        <p:spPr>
-          <a:xfrm>
-            <a:off x="1143000" y="5212080"/>
+          <p:cNvPr id="16" name="Shape 12"/>
+          <p:cNvSpPr/>
+          <p:nvPr/>
+        </p:nvSpPr>
+        <p:spPr>
+          <a:xfrm>
+            <a:off x="1143000" y="4498848"/>
             <a:ext cx="502920" cy="502920"/>
           </a:xfrm>
           <a:prstGeom prst="ellipse">
@@ -14853,10 +15015,17 @@
           </a:solidFill>
           <a:ln/>
         </p:spPr>
+        <p:txBody>
+          <a:bodyPr/>
+          <a:lstStyle/>
+          <a:p>
+            <a:endParaRPr lang="en-US"/>
+          </a:p>
+        </p:txBody>
       </p:sp>
       <p:pic>
         <p:nvPicPr>
-          <p:cNvPr id="25" name="Image 4" descr="preencoded.png">    </p:cNvPr>
+          <p:cNvPr id="17" name="Image 2" descr="preencoded.png"/>
           <p:cNvPicPr>
             <a:picLocks noChangeAspect="1"/>
           </p:cNvPicPr>
@@ -14870,7 +15039,7 @@
         </p:blipFill>
         <p:spPr>
           <a:xfrm>
-            <a:off x="1271016" y="5330952"/>
+            <a:off x="1271016" y="4617720"/>
             <a:ext cx="256032" cy="256032"/>
           </a:xfrm>
           <a:prstGeom prst="rect">
@@ -14880,13 +15049,13 @@
       </p:pic>
       <p:sp>
         <p:nvSpPr>
-          <p:cNvPr id="26" name="Text 19"/>
-          <p:cNvSpPr/>
-          <p:nvPr/>
-        </p:nvSpPr>
-        <p:spPr>
-          <a:xfrm>
-            <a:off x="1801368" y="5138928"/>
+          <p:cNvPr id="18" name="Text 13"/>
+          <p:cNvSpPr/>
+          <p:nvPr/>
+        </p:nvSpPr>
+        <p:spPr>
+          <a:xfrm>
+            <a:off x="1801368" y="4425696"/>
             <a:ext cx="4343400" cy="329184"/>
           </a:xfrm>
           <a:prstGeom prst="rect">
@@ -14899,7 +15068,7 @@
           <a:bodyPr wrap="square" lIns="0" tIns="0" rIns="0" bIns="0" rtlCol="0" anchor="ctr"/>
           <a:lstStyle/>
           <a:p>
-            <a:pPr indent="0" marL="0">
+            <a:pPr marL="0" indent="0">
               <a:buNone/>
             </a:pPr>
             <a:r>
@@ -14911,7 +15080,7 @@
                 <a:ea typeface="Calibri" pitchFamily="34" charset="-122"/>
                 <a:cs typeface="Calibri" pitchFamily="34" charset="-120"/>
               </a:rPr>
-              <a:t>Hands-On Exercises</a:t>
+              <a:t>Sample files</a:t>
             </a:r>
             <a:endParaRPr lang="en-US" sz="1450" dirty="0"/>
           </a:p>
@@ -14919,13 +15088,13 @@
       </p:sp>
       <p:sp>
         <p:nvSpPr>
-          <p:cNvPr id="27" name="Text 20"/>
-          <p:cNvSpPr/>
-          <p:nvPr/>
-        </p:nvSpPr>
-        <p:spPr>
-          <a:xfrm>
-            <a:off x="1801368" y="5458968"/>
+          <p:cNvPr id="19" name="Text 14"/>
+          <p:cNvSpPr/>
+          <p:nvPr/>
+        </p:nvSpPr>
+        <p:spPr>
+          <a:xfrm>
+            <a:off x="1801368" y="4745736"/>
             <a:ext cx="4343400" cy="329184"/>
           </a:xfrm>
           <a:prstGeom prst="rect">
@@ -14938,7 +15107,7 @@
           <a:bodyPr wrap="square" lIns="0" tIns="0" rIns="0" bIns="0" rtlCol="0" anchor="ctr"/>
           <a:lstStyle/>
           <a:p>
-            <a:pPr indent="0" marL="0">
+            <a:pPr marL="0" indent="0">
               <a:buNone/>
             </a:pPr>
             <a:r>
@@ -14950,7 +15119,7 @@
                 <a:ea typeface="Calibri" pitchFamily="34" charset="-122"/>
                 <a:cs typeface="Calibri" pitchFamily="34" charset="-120"/>
               </a:rPr>
-              <a:t>Try-it tasks for each app, with sample text</a:t>
+              <a:t>Fictional spreadsheet + document to demo with</a:t>
             </a:r>
             <a:endParaRPr lang="en-US" sz="1100" dirty="0"/>
           </a:p>
@@ -14958,13 +15127,13 @@
       </p:sp>
       <p:sp>
         <p:nvSpPr>
-          <p:cNvPr id="28" name="Shape 21"/>
-          <p:cNvSpPr/>
-          <p:nvPr/>
-        </p:nvSpPr>
-        <p:spPr>
-          <a:xfrm>
-            <a:off x="6263640" y="5212080"/>
+          <p:cNvPr id="20" name="Shape 15"/>
+          <p:cNvSpPr/>
+          <p:nvPr/>
+        </p:nvSpPr>
+        <p:spPr>
+          <a:xfrm>
+            <a:off x="6263640" y="4498848"/>
             <a:ext cx="502920" cy="502920"/>
           </a:xfrm>
           <a:prstGeom prst="ellipse">
@@ -14975,10 +15144,17 @@
           </a:solidFill>
           <a:ln/>
         </p:spPr>
+        <p:txBody>
+          <a:bodyPr/>
+          <a:lstStyle/>
+          <a:p>
+            <a:endParaRPr lang="en-US"/>
+          </a:p>
+        </p:txBody>
       </p:sp>
       <p:pic>
         <p:nvPicPr>
-          <p:cNvPr id="29" name="Image 5" descr="preencoded.png">    </p:cNvPr>
+          <p:cNvPr id="21" name="Image 3" descr="preencoded.png"/>
           <p:cNvPicPr>
             <a:picLocks noChangeAspect="1"/>
           </p:cNvPicPr>
@@ -14992,6 +15168,264 @@
         </p:blipFill>
         <p:spPr>
           <a:xfrm>
+            <a:off x="6391656" y="4617720"/>
+            <a:ext cx="256032" cy="256032"/>
+          </a:xfrm>
+          <a:prstGeom prst="rect">
+            <a:avLst/>
+          </a:prstGeom>
+        </p:spPr>
+      </p:pic>
+      <p:sp>
+        <p:nvSpPr>
+          <p:cNvPr id="22" name="Text 16"/>
+          <p:cNvSpPr/>
+          <p:nvPr/>
+        </p:nvSpPr>
+        <p:spPr>
+          <a:xfrm>
+            <a:off x="6922008" y="4425696"/>
+            <a:ext cx="4343400" cy="329184"/>
+          </a:xfrm>
+          <a:prstGeom prst="rect">
+            <a:avLst/>
+          </a:prstGeom>
+          <a:noFill/>
+          <a:ln/>
+        </p:spPr>
+        <p:txBody>
+          <a:bodyPr wrap="square" lIns="0" tIns="0" rIns="0" bIns="0" rtlCol="0" anchor="ctr"/>
+          <a:lstStyle/>
+          <a:p>
+            <a:pPr marL="0" indent="0">
+              <a:buNone/>
+            </a:pPr>
+            <a:r>
+              <a:rPr lang="en-US" sz="1450" b="1" dirty="0">
+                <a:solidFill>
+                  <a:srgbClr val="FFFFFF"/>
+                </a:solidFill>
+                <a:latin typeface="Calibri" pitchFamily="34" charset="0"/>
+                <a:ea typeface="Calibri" pitchFamily="34" charset="-122"/>
+                <a:cs typeface="Calibri" pitchFamily="34" charset="-120"/>
+              </a:rPr>
+              <a:t>Quick-Start Cheat Sheet</a:t>
+            </a:r>
+            <a:endParaRPr lang="en-US" sz="1450" dirty="0"/>
+          </a:p>
+        </p:txBody>
+      </p:sp>
+      <p:sp>
+        <p:nvSpPr>
+          <p:cNvPr id="23" name="Text 17"/>
+          <p:cNvSpPr/>
+          <p:nvPr/>
+        </p:nvSpPr>
+        <p:spPr>
+          <a:xfrm>
+            <a:off x="6922008" y="4745736"/>
+            <a:ext cx="4343400" cy="329184"/>
+          </a:xfrm>
+          <a:prstGeom prst="rect">
+            <a:avLst/>
+          </a:prstGeom>
+          <a:noFill/>
+          <a:ln/>
+        </p:spPr>
+        <p:txBody>
+          <a:bodyPr wrap="square" lIns="0" tIns="0" rIns="0" bIns="0" rtlCol="0" anchor="ctr"/>
+          <a:lstStyle/>
+          <a:p>
+            <a:pPr marL="0" indent="0">
+              <a:buNone/>
+            </a:pPr>
+            <a:r>
+              <a:rPr lang="en-US" sz="1100" dirty="0">
+                <a:solidFill>
+                  <a:srgbClr val="9FB0C9"/>
+                </a:solidFill>
+                <a:latin typeface="Calibri" pitchFamily="34" charset="0"/>
+                <a:ea typeface="Calibri" pitchFamily="34" charset="-122"/>
+                <a:cs typeface="Calibri" pitchFamily="34" charset="-120"/>
+              </a:rPr>
+              <a:t>Prompt patterns + do/don't, one page</a:t>
+            </a:r>
+            <a:endParaRPr lang="en-US" sz="1100" dirty="0"/>
+          </a:p>
+        </p:txBody>
+      </p:sp>
+      <p:sp>
+        <p:nvSpPr>
+          <p:cNvPr id="24" name="Shape 18"/>
+          <p:cNvSpPr/>
+          <p:nvPr/>
+        </p:nvSpPr>
+        <p:spPr>
+          <a:xfrm>
+            <a:off x="1143000" y="5212080"/>
+            <a:ext cx="502920" cy="502920"/>
+          </a:xfrm>
+          <a:prstGeom prst="ellipse">
+            <a:avLst/>
+          </a:prstGeom>
+          <a:solidFill>
+            <a:srgbClr val="E8A33D"/>
+          </a:solidFill>
+          <a:ln/>
+        </p:spPr>
+        <p:txBody>
+          <a:bodyPr/>
+          <a:lstStyle/>
+          <a:p>
+            <a:endParaRPr lang="en-US"/>
+          </a:p>
+        </p:txBody>
+      </p:sp>
+      <p:pic>
+        <p:nvPicPr>
+          <p:cNvPr id="25" name="Image 4" descr="preencoded.png"/>
+          <p:cNvPicPr>
+            <a:picLocks noChangeAspect="1"/>
+          </p:cNvPicPr>
+          <p:nvPr/>
+        </p:nvPicPr>
+        <p:blipFill>
+          <a:blip r:embed="rId7"/>
+          <a:stretch>
+            <a:fillRect/>
+          </a:stretch>
+        </p:blipFill>
+        <p:spPr>
+          <a:xfrm>
+            <a:off x="1271016" y="5330952"/>
+            <a:ext cx="256032" cy="256032"/>
+          </a:xfrm>
+          <a:prstGeom prst="rect">
+            <a:avLst/>
+          </a:prstGeom>
+        </p:spPr>
+      </p:pic>
+      <p:sp>
+        <p:nvSpPr>
+          <p:cNvPr id="26" name="Text 19"/>
+          <p:cNvSpPr/>
+          <p:nvPr/>
+        </p:nvSpPr>
+        <p:spPr>
+          <a:xfrm>
+            <a:off x="1801368" y="5138928"/>
+            <a:ext cx="4343400" cy="329184"/>
+          </a:xfrm>
+          <a:prstGeom prst="rect">
+            <a:avLst/>
+          </a:prstGeom>
+          <a:noFill/>
+          <a:ln/>
+        </p:spPr>
+        <p:txBody>
+          <a:bodyPr wrap="square" lIns="0" tIns="0" rIns="0" bIns="0" rtlCol="0" anchor="ctr"/>
+          <a:lstStyle/>
+          <a:p>
+            <a:pPr marL="0" indent="0">
+              <a:buNone/>
+            </a:pPr>
+            <a:r>
+              <a:rPr lang="en-US" sz="1450" b="1" dirty="0">
+                <a:solidFill>
+                  <a:srgbClr val="FFFFFF"/>
+                </a:solidFill>
+                <a:latin typeface="Calibri" pitchFamily="34" charset="0"/>
+                <a:ea typeface="Calibri" pitchFamily="34" charset="-122"/>
+                <a:cs typeface="Calibri" pitchFamily="34" charset="-120"/>
+              </a:rPr>
+              <a:t>Hands-On Exercises</a:t>
+            </a:r>
+            <a:endParaRPr lang="en-US" sz="1450" dirty="0"/>
+          </a:p>
+        </p:txBody>
+      </p:sp>
+      <p:sp>
+        <p:nvSpPr>
+          <p:cNvPr id="27" name="Text 20"/>
+          <p:cNvSpPr/>
+          <p:nvPr/>
+        </p:nvSpPr>
+        <p:spPr>
+          <a:xfrm>
+            <a:off x="1801368" y="5458968"/>
+            <a:ext cx="4343400" cy="329184"/>
+          </a:xfrm>
+          <a:prstGeom prst="rect">
+            <a:avLst/>
+          </a:prstGeom>
+          <a:noFill/>
+          <a:ln/>
+        </p:spPr>
+        <p:txBody>
+          <a:bodyPr wrap="square" lIns="0" tIns="0" rIns="0" bIns="0" rtlCol="0" anchor="ctr"/>
+          <a:lstStyle/>
+          <a:p>
+            <a:pPr marL="0" indent="0">
+              <a:buNone/>
+            </a:pPr>
+            <a:r>
+              <a:rPr lang="en-US" sz="1100" dirty="0">
+                <a:solidFill>
+                  <a:srgbClr val="9FB0C9"/>
+                </a:solidFill>
+                <a:latin typeface="Calibri" pitchFamily="34" charset="0"/>
+                <a:ea typeface="Calibri" pitchFamily="34" charset="-122"/>
+                <a:cs typeface="Calibri" pitchFamily="34" charset="-120"/>
+              </a:rPr>
+              <a:t>Try-it tasks for each app, with sample text</a:t>
+            </a:r>
+            <a:endParaRPr lang="en-US" sz="1100" dirty="0"/>
+          </a:p>
+        </p:txBody>
+      </p:sp>
+      <p:sp>
+        <p:nvSpPr>
+          <p:cNvPr id="28" name="Shape 21"/>
+          <p:cNvSpPr/>
+          <p:nvPr/>
+        </p:nvSpPr>
+        <p:spPr>
+          <a:xfrm>
+            <a:off x="6263640" y="5212080"/>
+            <a:ext cx="502920" cy="502920"/>
+          </a:xfrm>
+          <a:prstGeom prst="ellipse">
+            <a:avLst/>
+          </a:prstGeom>
+          <a:solidFill>
+            <a:srgbClr val="E8A33D"/>
+          </a:solidFill>
+          <a:ln/>
+        </p:spPr>
+        <p:txBody>
+          <a:bodyPr/>
+          <a:lstStyle/>
+          <a:p>
+            <a:endParaRPr lang="en-US"/>
+          </a:p>
+        </p:txBody>
+      </p:sp>
+      <p:pic>
+        <p:nvPicPr>
+          <p:cNvPr id="29" name="Image 5" descr="preencoded.png"/>
+          <p:cNvPicPr>
+            <a:picLocks noChangeAspect="1"/>
+          </p:cNvPicPr>
+          <p:nvPr/>
+        </p:nvPicPr>
+        <p:blipFill>
+          <a:blip r:embed="rId8"/>
+          <a:stretch>
+            <a:fillRect/>
+          </a:stretch>
+        </p:blipFill>
+        <p:spPr>
+          <a:xfrm>
             <a:off x="6391656" y="5330952"/>
             <a:ext cx="256032" cy="256032"/>
           </a:xfrm>
@@ -15021,7 +15455,7 @@
           <a:bodyPr wrap="square" lIns="0" tIns="0" rIns="0" bIns="0" rtlCol="0" anchor="ctr"/>
           <a:lstStyle/>
           <a:p>
-            <a:pPr indent="0" marL="0">
+            <a:pPr marL="0" indent="0">
               <a:buNone/>
             </a:pPr>
             <a:r>
@@ -15060,7 +15494,7 @@
           <a:bodyPr wrap="square" lIns="0" tIns="0" rIns="0" bIns="0" rtlCol="0" anchor="ctr"/>
           <a:lstStyle/>
           <a:p>
-            <a:pPr indent="0" marL="0">
+            <a:pPr marL="0" indent="0">
               <a:buNone/>
             </a:pPr>
             <a:r>
@@ -15099,7 +15533,7 @@
           <a:bodyPr wrap="square" lIns="0" tIns="0" rIns="0" bIns="0" rtlCol="0" anchor="ctr"/>
           <a:lstStyle/>
           <a:p>
-            <a:pPr indent="0" marL="0">
+            <a:pPr marL="0" indent="0">
               <a:buNone/>
             </a:pPr>
             <a:r>
@@ -15138,7 +15572,7 @@
           <a:bodyPr wrap="square" lIns="0" tIns="0" rIns="0" bIns="0" rtlCol="0" anchor="ctr"/>
           <a:lstStyle/>
           <a:p>
-            <a:pPr algn="l" indent="0" marL="0">
+            <a:pPr marL="0" indent="0" algn="l">
               <a:buNone/>
             </a:pPr>
             <a:r>
@@ -15177,7 +15611,7 @@
           <a:bodyPr wrap="square" lIns="0" tIns="0" rIns="0" bIns="0" rtlCol="0" anchor="ctr"/>
           <a:lstStyle/>
           <a:p>
-            <a:pPr algn="r" indent="0" marL="0">
+            <a:pPr marL="0" indent="0" algn="r">
               <a:buNone/>
             </a:pPr>
             <a:r>
@@ -15211,6 +15645,7 @@
         <a:solidFill>
           <a:srgbClr val="1B2A4A"/>
         </a:solidFill>
+        <a:effectLst/>
       </p:bgPr>
     </p:bg>
     <p:spTree>
@@ -15246,6 +15681,13 @@
           </a:solidFill>
           <a:ln/>
         </p:spPr>
+        <p:txBody>
+          <a:bodyPr/>
+          <a:lstStyle/>
+          <a:p>
+            <a:endParaRPr lang="en-US"/>
+          </a:p>
+        </p:txBody>
       </p:sp>
       <p:sp>
         <p:nvSpPr>
@@ -15268,11 +15710,11 @@
           <a:bodyPr wrap="square" lIns="0" tIns="0" rIns="0" bIns="0" rtlCol="0" anchor="ctr"/>
           <a:lstStyle/>
           <a:p>
-            <a:pPr indent="0" marL="0">
-              <a:buNone/>
-            </a:pPr>
-            <a:r>
-              <a:rPr lang="en-US" sz="1300" b="1" spc="200" kern="0" dirty="0">
+            <a:pPr marL="0" indent="0">
+              <a:buNone/>
+            </a:pPr>
+            <a:r>
+              <a:rPr lang="en-US" sz="1300" b="1" kern="0" spc="200" dirty="0">
                 <a:solidFill>
                   <a:srgbClr val="5FB3B3"/>
                 </a:solidFill>
@@ -15307,7 +15749,7 @@
           <a:bodyPr wrap="square" lIns="0" tIns="0" rIns="0" bIns="0" rtlCol="0" anchor="ctr"/>
           <a:lstStyle/>
           <a:p>
-            <a:pPr indent="0" marL="0">
+            <a:pPr marL="0" indent="0">
               <a:lnSpc>
                 <a:spcPct val="105000"/>
               </a:lnSpc>
@@ -15354,6 +15796,13 @@
             <a:prstDash val="solid"/>
           </a:ln>
         </p:spPr>
+        <p:txBody>
+          <a:bodyPr/>
+          <a:lstStyle/>
+          <a:p>
+            <a:endParaRPr lang="en-US"/>
+          </a:p>
+        </p:txBody>
       </p:sp>
       <p:sp>
         <p:nvSpPr>
@@ -15374,17 +15823,24 @@
           </a:solidFill>
           <a:ln/>
         </p:spPr>
+        <p:txBody>
+          <a:bodyPr/>
+          <a:lstStyle/>
+          <a:p>
+            <a:endParaRPr lang="en-US"/>
+          </a:p>
+        </p:txBody>
       </p:sp>
       <p:pic>
         <p:nvPicPr>
-          <p:cNvPr id="7" name="Image 0" descr="preencoded.png">    </p:cNvPr>
+          <p:cNvPr id="7" name="Image 0" descr="preencoded.png"/>
           <p:cNvPicPr>
             <a:picLocks noChangeAspect="1"/>
           </p:cNvPicPr>
           <p:nvPr/>
         </p:nvPicPr>
         <p:blipFill>
-          <a:blip r:embed="rId1"/>
+          <a:blip r:embed="rId3"/>
           <a:stretch>
             <a:fillRect/>
           </a:stretch>
@@ -15420,7 +15876,7 @@
           <a:bodyPr wrap="square" lIns="0" tIns="0" rIns="0" bIns="0" rtlCol="0" anchor="ctr"/>
           <a:lstStyle/>
           <a:p>
-            <a:pPr indent="0" marL="0">
+            <a:pPr marL="0" indent="0">
               <a:buNone/>
             </a:pPr>
             <a:r>
@@ -15459,7 +15915,7 @@
           <a:bodyPr wrap="square" lIns="0" tIns="0" rIns="0" bIns="0" rtlCol="0" anchor="ctr"/>
           <a:lstStyle/>
           <a:p>
-            <a:pPr indent="0" marL="0">
+            <a:pPr marL="0" indent="0">
               <a:lnSpc>
                 <a:spcPct val="112000"/>
               </a:lnSpc>
@@ -15506,6 +15962,13 @@
             <a:prstDash val="solid"/>
           </a:ln>
         </p:spPr>
+        <p:txBody>
+          <a:bodyPr/>
+          <a:lstStyle/>
+          <a:p>
+            <a:endParaRPr lang="en-US"/>
+          </a:p>
+        </p:txBody>
       </p:sp>
       <p:sp>
         <p:nvSpPr>
@@ -15526,17 +15989,24 @@
           </a:solidFill>
           <a:ln/>
         </p:spPr>
+        <p:txBody>
+          <a:bodyPr/>
+          <a:lstStyle/>
+          <a:p>
+            <a:endParaRPr lang="en-US"/>
+          </a:p>
+        </p:txBody>
       </p:sp>
       <p:pic>
         <p:nvPicPr>
-          <p:cNvPr id="12" name="Image 1" descr="preencoded.png">    </p:cNvPr>
+          <p:cNvPr id="12" name="Image 1" descr="preencoded.png"/>
           <p:cNvPicPr>
             <a:picLocks noChangeAspect="1"/>
           </p:cNvPicPr>
           <p:nvPr/>
         </p:nvPicPr>
         <p:blipFill>
-          <a:blip r:embed="rId2"/>
+          <a:blip r:embed="rId4"/>
           <a:stretch>
             <a:fillRect/>
           </a:stretch>
@@ -15572,7 +16042,7 @@
           <a:bodyPr wrap="square" lIns="0" tIns="0" rIns="0" bIns="0" rtlCol="0" anchor="ctr"/>
           <a:lstStyle/>
           <a:p>
-            <a:pPr indent="0" marL="0">
+            <a:pPr marL="0" indent="0">
               <a:buNone/>
             </a:pPr>
             <a:r>
@@ -15611,7 +16081,7 @@
           <a:bodyPr wrap="square" lIns="0" tIns="0" rIns="0" bIns="0" rtlCol="0" anchor="ctr"/>
           <a:lstStyle/>
           <a:p>
-            <a:pPr indent="0" marL="0">
+            <a:pPr marL="0" indent="0">
               <a:lnSpc>
                 <a:spcPct val="112000"/>
               </a:lnSpc>
@@ -15658,6 +16128,13 @@
             <a:prstDash val="solid"/>
           </a:ln>
         </p:spPr>
+        <p:txBody>
+          <a:bodyPr/>
+          <a:lstStyle/>
+          <a:p>
+            <a:endParaRPr lang="en-US"/>
+          </a:p>
+        </p:txBody>
       </p:sp>
       <p:sp>
         <p:nvSpPr>
@@ -15678,17 +16155,24 @@
           </a:solidFill>
           <a:ln/>
         </p:spPr>
+        <p:txBody>
+          <a:bodyPr/>
+          <a:lstStyle/>
+          <a:p>
+            <a:endParaRPr lang="en-US"/>
+          </a:p>
+        </p:txBody>
       </p:sp>
       <p:pic>
         <p:nvPicPr>
-          <p:cNvPr id="17" name="Image 2" descr="preencoded.png">    </p:cNvPr>
+          <p:cNvPr id="17" name="Image 2" descr="preencoded.png"/>
           <p:cNvPicPr>
             <a:picLocks noChangeAspect="1"/>
           </p:cNvPicPr>
           <p:nvPr/>
         </p:nvPicPr>
         <p:blipFill>
-          <a:blip r:embed="rId3"/>
+          <a:blip r:embed="rId5"/>
           <a:stretch>
             <a:fillRect/>
           </a:stretch>
@@ -15724,7 +16208,7 @@
           <a:bodyPr wrap="square" lIns="0" tIns="0" rIns="0" bIns="0" rtlCol="0" anchor="ctr"/>
           <a:lstStyle/>
           <a:p>
-            <a:pPr indent="0" marL="0">
+            <a:pPr marL="0" indent="0">
               <a:buNone/>
             </a:pPr>
             <a:r>
@@ -15763,7 +16247,7 @@
           <a:bodyPr wrap="square" lIns="0" tIns="0" rIns="0" bIns="0" rtlCol="0" anchor="ctr"/>
           <a:lstStyle/>
           <a:p>
-            <a:pPr indent="0" marL="0">
+            <a:pPr marL="0" indent="0">
               <a:lnSpc>
                 <a:spcPct val="112000"/>
               </a:lnSpc>
@@ -15805,7 +16289,7 @@
           <a:bodyPr wrap="square" lIns="0" tIns="0" rIns="0" bIns="0" rtlCol="0" anchor="ctr"/>
           <a:lstStyle/>
           <a:p>
-            <a:pPr algn="l" indent="0" marL="0">
+            <a:pPr marL="0" indent="0" algn="l">
               <a:buNone/>
             </a:pPr>
             <a:r>
@@ -15844,7 +16328,7 @@
           <a:bodyPr wrap="square" lIns="0" tIns="0" rIns="0" bIns="0" rtlCol="0" anchor="ctr"/>
           <a:lstStyle/>
           <a:p>
-            <a:pPr algn="r" indent="0" marL="0">
+            <a:pPr marL="0" indent="0" algn="r">
               <a:buNone/>
             </a:pPr>
             <a:r>
@@ -15878,6 +16362,7 @@
         <a:solidFill>
           <a:srgbClr val="F5F7FA"/>
         </a:solidFill>
+        <a:effectLst/>
       </p:bgPr>
     </p:bg>
     <p:spTree>
@@ -15913,6 +16398,13 @@
           </a:solidFill>
           <a:ln/>
         </p:spPr>
+        <p:txBody>
+          <a:bodyPr/>
+          <a:lstStyle/>
+          <a:p>
+            <a:endParaRPr lang="en-US"/>
+          </a:p>
+        </p:txBody>
       </p:sp>
       <p:sp>
         <p:nvSpPr>
@@ -15935,11 +16427,11 @@
           <a:bodyPr wrap="square" lIns="0" tIns="0" rIns="0" bIns="0" rtlCol="0" anchor="ctr"/>
           <a:lstStyle/>
           <a:p>
-            <a:pPr indent="0" marL="0">
-              <a:buNone/>
-            </a:pPr>
-            <a:r>
-              <a:rPr lang="en-US" sz="1200" b="1" spc="200" kern="0" dirty="0">
+            <a:pPr marL="0" indent="0">
+              <a:buNone/>
+            </a:pPr>
+            <a:r>
+              <a:rPr lang="en-US" sz="1200" b="1" kern="0" spc="200" dirty="0">
                 <a:solidFill>
                   <a:srgbClr val="2C8C8C"/>
                 </a:solidFill>
@@ -15974,7 +16466,7 @@
           <a:bodyPr wrap="square" lIns="0" tIns="0" rIns="0" bIns="0" rtlCol="0" anchor="ctr"/>
           <a:lstStyle/>
           <a:p>
-            <a:pPr indent="0" marL="0">
+            <a:pPr marL="0" indent="0">
               <a:buNone/>
             </a:pPr>
             <a:r>
@@ -16018,13 +16510,20 @@
             <a:prstDash val="solid"/>
           </a:ln>
           <a:effectLst>
-            <a:outerShdw sx="100000" sy="100000" kx="0" ky="0" algn="bl" rotWithShape="0" blurRad="88900" dist="38100" dir="8100000">
+            <a:outerShdw blurRad="88900" dist="38100" dir="8100000" algn="bl" rotWithShape="0">
               <a:srgbClr val="000000">
                 <a:alpha val="16000"/>
               </a:srgbClr>
             </a:outerShdw>
           </a:effectLst>
         </p:spPr>
+        <p:txBody>
+          <a:bodyPr/>
+          <a:lstStyle/>
+          <a:p>
+            <a:endParaRPr lang="en-US"/>
+          </a:p>
+        </p:txBody>
       </p:sp>
       <p:sp>
         <p:nvSpPr>
@@ -16045,17 +16544,24 @@
           </a:solidFill>
           <a:ln/>
         </p:spPr>
+        <p:txBody>
+          <a:bodyPr/>
+          <a:lstStyle/>
+          <a:p>
+            <a:endParaRPr lang="en-US"/>
+          </a:p>
+        </p:txBody>
       </p:sp>
       <p:pic>
         <p:nvPicPr>
-          <p:cNvPr id="7" name="Image 0" descr="preencoded.png">    </p:cNvPr>
+          <p:cNvPr id="7" name="Image 0" descr="preencoded.png"/>
           <p:cNvPicPr>
             <a:picLocks noChangeAspect="1"/>
           </p:cNvPicPr>
           <p:nvPr/>
         </p:nvPicPr>
         <p:blipFill>
-          <a:blip r:embed="rId1"/>
+          <a:blip r:embed="rId3"/>
           <a:stretch>
             <a:fillRect/>
           </a:stretch>
@@ -16091,7 +16597,7 @@
           <a:bodyPr wrap="square" lIns="0" tIns="0" rIns="0" bIns="0" rtlCol="0" anchor="ctr"/>
           <a:lstStyle/>
           <a:p>
-            <a:pPr algn="ctr" indent="0" marL="0">
+            <a:pPr marL="0" indent="0" algn="ctr">
               <a:buNone/>
             </a:pPr>
             <a:r>
@@ -16130,7 +16636,7 @@
           <a:bodyPr wrap="square" lIns="0" tIns="0" rIns="0" bIns="0" rtlCol="0" anchor="ctr"/>
           <a:lstStyle/>
           <a:p>
-            <a:pPr algn="ctr" indent="0" marL="0">
+            <a:pPr marL="0" indent="0" algn="ctr">
               <a:lnSpc>
                 <a:spcPct val="108000"/>
               </a:lnSpc>
@@ -16172,7 +16678,7 @@
           <a:bodyPr wrap="square" lIns="0" tIns="0" rIns="0" bIns="0" rtlCol="0" anchor="ctr"/>
           <a:lstStyle/>
           <a:p>
-            <a:pPr algn="ctr" indent="0" marL="0">
+            <a:pPr marL="0" indent="0" algn="ctr">
               <a:buNone/>
             </a:pPr>
             <a:r>
@@ -16216,13 +16722,20 @@
             <a:prstDash val="solid"/>
           </a:ln>
           <a:effectLst>
-            <a:outerShdw sx="100000" sy="100000" kx="0" ky="0" algn="bl" rotWithShape="0" blurRad="88900" dist="38100" dir="8100000">
+            <a:outerShdw blurRad="88900" dist="38100" dir="8100000" algn="bl" rotWithShape="0">
               <a:srgbClr val="000000">
                 <a:alpha val="16000"/>
               </a:srgbClr>
             </a:outerShdw>
           </a:effectLst>
         </p:spPr>
+        <p:txBody>
+          <a:bodyPr/>
+          <a:lstStyle/>
+          <a:p>
+            <a:endParaRPr lang="en-US"/>
+          </a:p>
+        </p:txBody>
       </p:sp>
       <p:sp>
         <p:nvSpPr>
@@ -16243,17 +16756,24 @@
           </a:solidFill>
           <a:ln/>
         </p:spPr>
+        <p:txBody>
+          <a:bodyPr/>
+          <a:lstStyle/>
+          <a:p>
+            <a:endParaRPr lang="en-US"/>
+          </a:p>
+        </p:txBody>
       </p:sp>
       <p:pic>
         <p:nvPicPr>
-          <p:cNvPr id="13" name="Image 1" descr="preencoded.png">    </p:cNvPr>
+          <p:cNvPr id="13" name="Image 1" descr="preencoded.png"/>
           <p:cNvPicPr>
             <a:picLocks noChangeAspect="1"/>
           </p:cNvPicPr>
           <p:nvPr/>
         </p:nvPicPr>
         <p:blipFill>
-          <a:blip r:embed="rId2"/>
+          <a:blip r:embed="rId4"/>
           <a:stretch>
             <a:fillRect/>
           </a:stretch>
@@ -16289,7 +16809,7 @@
           <a:bodyPr wrap="square" lIns="0" tIns="0" rIns="0" bIns="0" rtlCol="0" anchor="ctr"/>
           <a:lstStyle/>
           <a:p>
-            <a:pPr algn="ctr" indent="0" marL="0">
+            <a:pPr marL="0" indent="0" algn="ctr">
               <a:buNone/>
             </a:pPr>
             <a:r>
@@ -16328,7 +16848,7 @@
           <a:bodyPr wrap="square" lIns="0" tIns="0" rIns="0" bIns="0" rtlCol="0" anchor="ctr"/>
           <a:lstStyle/>
           <a:p>
-            <a:pPr algn="ctr" indent="0" marL="0">
+            <a:pPr marL="0" indent="0" algn="ctr">
               <a:lnSpc>
                 <a:spcPct val="108000"/>
               </a:lnSpc>
@@ -16370,7 +16890,7 @@
           <a:bodyPr wrap="square" lIns="0" tIns="0" rIns="0" bIns="0" rtlCol="0" anchor="ctr"/>
           <a:lstStyle/>
           <a:p>
-            <a:pPr algn="ctr" indent="0" marL="0">
+            <a:pPr marL="0" indent="0" algn="ctr">
               <a:buNone/>
             </a:pPr>
             <a:r>
@@ -16414,13 +16934,20 @@
             <a:prstDash val="solid"/>
           </a:ln>
           <a:effectLst>
-            <a:outerShdw sx="100000" sy="100000" kx="0" ky="0" algn="bl" rotWithShape="0" blurRad="88900" dist="38100" dir="8100000">
+            <a:outerShdw blurRad="88900" dist="38100" dir="8100000" algn="bl" rotWithShape="0">
               <a:srgbClr val="000000">
                 <a:alpha val="16000"/>
               </a:srgbClr>
             </a:outerShdw>
           </a:effectLst>
         </p:spPr>
+        <p:txBody>
+          <a:bodyPr/>
+          <a:lstStyle/>
+          <a:p>
+            <a:endParaRPr lang="en-US"/>
+          </a:p>
+        </p:txBody>
       </p:sp>
       <p:sp>
         <p:nvSpPr>
@@ -16441,17 +16968,24 @@
           </a:solidFill>
           <a:ln/>
         </p:spPr>
+        <p:txBody>
+          <a:bodyPr/>
+          <a:lstStyle/>
+          <a:p>
+            <a:endParaRPr lang="en-US"/>
+          </a:p>
+        </p:txBody>
       </p:sp>
       <p:pic>
         <p:nvPicPr>
-          <p:cNvPr id="19" name="Image 2" descr="preencoded.png">    </p:cNvPr>
+          <p:cNvPr id="19" name="Image 2" descr="preencoded.png"/>
           <p:cNvPicPr>
             <a:picLocks noChangeAspect="1"/>
           </p:cNvPicPr>
           <p:nvPr/>
         </p:nvPicPr>
         <p:blipFill>
-          <a:blip r:embed="rId3"/>
+          <a:blip r:embed="rId5"/>
           <a:stretch>
             <a:fillRect/>
           </a:stretch>
@@ -16487,7 +17021,7 @@
           <a:bodyPr wrap="square" lIns="0" tIns="0" rIns="0" bIns="0" rtlCol="0" anchor="ctr"/>
           <a:lstStyle/>
           <a:p>
-            <a:pPr algn="ctr" indent="0" marL="0">
+            <a:pPr marL="0" indent="0" algn="ctr">
               <a:buNone/>
             </a:pPr>
             <a:r>
@@ -16526,7 +17060,7 @@
           <a:bodyPr wrap="square" lIns="0" tIns="0" rIns="0" bIns="0" rtlCol="0" anchor="ctr"/>
           <a:lstStyle/>
           <a:p>
-            <a:pPr algn="ctr" indent="0" marL="0">
+            <a:pPr marL="0" indent="0" algn="ctr">
               <a:lnSpc>
                 <a:spcPct val="108000"/>
               </a:lnSpc>
@@ -16568,7 +17102,7 @@
           <a:bodyPr wrap="square" lIns="0" tIns="0" rIns="0" bIns="0" rtlCol="0" anchor="ctr"/>
           <a:lstStyle/>
           <a:p>
-            <a:pPr algn="ctr" indent="0" marL="0">
+            <a:pPr marL="0" indent="0" algn="ctr">
               <a:buNone/>
             </a:pPr>
             <a:r>
@@ -16612,13 +17146,20 @@
             <a:prstDash val="solid"/>
           </a:ln>
           <a:effectLst>
-            <a:outerShdw sx="100000" sy="100000" kx="0" ky="0" algn="bl" rotWithShape="0" blurRad="88900" dist="38100" dir="8100000">
+            <a:outerShdw blurRad="88900" dist="38100" dir="8100000" algn="bl" rotWithShape="0">
               <a:srgbClr val="000000">
                 <a:alpha val="16000"/>
               </a:srgbClr>
             </a:outerShdw>
           </a:effectLst>
         </p:spPr>
+        <p:txBody>
+          <a:bodyPr/>
+          <a:lstStyle/>
+          <a:p>
+            <a:endParaRPr lang="en-US"/>
+          </a:p>
+        </p:txBody>
       </p:sp>
       <p:sp>
         <p:nvSpPr>
@@ -16639,261 +17180,17 @@
           </a:solidFill>
           <a:ln/>
         </p:spPr>
+        <p:txBody>
+          <a:bodyPr/>
+          <a:lstStyle/>
+          <a:p>
+            <a:endParaRPr lang="en-US"/>
+          </a:p>
+        </p:txBody>
       </p:sp>
       <p:pic>
         <p:nvPicPr>
-          <p:cNvPr id="25" name="Image 3" descr="preencoded.png">    </p:cNvPr>
-          <p:cNvPicPr>
-            <a:picLocks noChangeAspect="1"/>
-          </p:cNvPicPr>
-          <p:nvPr/>
-        </p:nvPicPr>
-        <p:blipFill>
-          <a:blip r:embed="rId4"/>
-          <a:stretch>
-            <a:fillRect/>
-          </a:stretch>
-        </p:blipFill>
-        <p:spPr>
-          <a:xfrm>
-            <a:off x="10227564" y="2276856"/>
-            <a:ext cx="512064" cy="512064"/>
-          </a:xfrm>
-          <a:prstGeom prst="rect">
-            <a:avLst/>
-          </a:prstGeom>
-        </p:spPr>
-      </p:pic>
-      <p:sp>
-        <p:nvSpPr>
-          <p:cNvPr id="26" name="Text 20"/>
-          <p:cNvSpPr/>
-          <p:nvPr/>
-        </p:nvSpPr>
-        <p:spPr>
-          <a:xfrm>
-            <a:off x="9363456" y="3108960"/>
-            <a:ext cx="2240280" cy="365760"/>
-          </a:xfrm>
-          <a:prstGeom prst="rect">
-            <a:avLst/>
-          </a:prstGeom>
-          <a:noFill/>
-          <a:ln/>
-        </p:spPr>
-        <p:txBody>
-          <a:bodyPr wrap="square" lIns="0" tIns="0" rIns="0" bIns="0" rtlCol="0" anchor="ctr"/>
-          <a:lstStyle/>
-          <a:p>
-            <a:pPr algn="ctr" indent="0" marL="0">
-              <a:buNone/>
-            </a:pPr>
-            <a:r>
-              <a:rPr lang="en-US" sz="1700" b="1" dirty="0">
-                <a:solidFill>
-                  <a:srgbClr val="1B2A4A"/>
-                </a:solidFill>
-                <a:latin typeface="Georgia" pitchFamily="34" charset="0"/>
-                <a:ea typeface="Georgia" pitchFamily="34" charset="-122"/>
-                <a:cs typeface="Georgia" pitchFamily="34" charset="-120"/>
-              </a:rPr>
-              <a:t>4 · Paste back</a:t>
-            </a:r>
-            <a:endParaRPr lang="en-US" sz="1700" dirty="0"/>
-          </a:p>
-        </p:txBody>
-      </p:sp>
-      <p:sp>
-        <p:nvSpPr>
-          <p:cNvPr id="27" name="Text 21"/>
-          <p:cNvSpPr/>
-          <p:nvPr/>
-        </p:nvSpPr>
-        <p:spPr>
-          <a:xfrm>
-            <a:off x="9363456" y="3502152"/>
-            <a:ext cx="2240280" cy="685800"/>
-          </a:xfrm>
-          <a:prstGeom prst="rect">
-            <a:avLst/>
-          </a:prstGeom>
-          <a:noFill/>
-          <a:ln/>
-        </p:spPr>
-        <p:txBody>
-          <a:bodyPr wrap="square" lIns="0" tIns="0" rIns="0" bIns="0" rtlCol="0" anchor="ctr"/>
-          <a:lstStyle/>
-          <a:p>
-            <a:pPr algn="ctr" indent="0" marL="0">
-              <a:lnSpc>
-                <a:spcPct val="108000"/>
-              </a:lnSpc>
-              <a:buNone/>
-            </a:pPr>
-            <a:r>
-              <a:rPr lang="en-US" sz="1200" dirty="0">
-                <a:solidFill>
-                  <a:srgbClr val="3C4A63"/>
-                </a:solidFill>
-                <a:latin typeface="Calibri" pitchFamily="34" charset="0"/>
-                <a:ea typeface="Calibri" pitchFamily="34" charset="-122"/>
-                <a:cs typeface="Calibri" pitchFamily="34" charset="-120"/>
-              </a:rPr>
-              <a:t>Drop the polished result into your M365 app and finish.</a:t>
-            </a:r>
-            <a:endParaRPr lang="en-US" sz="1200" dirty="0"/>
-          </a:p>
-        </p:txBody>
-      </p:sp>
-      <p:sp>
-        <p:nvSpPr>
-          <p:cNvPr id="28" name="Text 22"/>
-          <p:cNvSpPr/>
-          <p:nvPr/>
-        </p:nvSpPr>
-        <p:spPr>
-          <a:xfrm>
-            <a:off x="457200" y="4572000"/>
-            <a:ext cx="6400800" cy="365760"/>
-          </a:xfrm>
-          <a:prstGeom prst="rect">
-            <a:avLst/>
-          </a:prstGeom>
-          <a:noFill/>
-          <a:ln/>
-        </p:spPr>
-        <p:txBody>
-          <a:bodyPr wrap="square" lIns="0" tIns="0" rIns="0" bIns="0" rtlCol="0" anchor="ctr"/>
-          <a:lstStyle/>
-          <a:p>
-            <a:pPr indent="0" marL="0">
-              <a:buNone/>
-            </a:pPr>
-            <a:r>
-              <a:rPr lang="en-US" sz="1400" b="1" dirty="0">
-                <a:solidFill>
-                  <a:srgbClr val="1B2A4A"/>
-                </a:solidFill>
-                <a:latin typeface="Calibri" pitchFamily="34" charset="0"/>
-                <a:ea typeface="Calibri" pitchFamily="34" charset="-122"/>
-                <a:cs typeface="Calibri" pitchFamily="34" charset="-120"/>
-              </a:rPr>
-              <a:t>Works the same way across all four apps:</a:t>
-            </a:r>
-            <a:endParaRPr lang="en-US" sz="1400" dirty="0"/>
-          </a:p>
-        </p:txBody>
-      </p:sp>
-      <p:sp>
-        <p:nvSpPr>
-          <p:cNvPr id="29" name="Shape 23"/>
-          <p:cNvSpPr/>
-          <p:nvPr/>
-        </p:nvSpPr>
-        <p:spPr>
-          <a:xfrm>
-            <a:off x="457200" y="5029200"/>
-            <a:ext cx="2697480" cy="914400"/>
-          </a:xfrm>
-          <a:prstGeom prst="roundRect">
-            <a:avLst>
-              <a:gd name="adj" fmla="val 8000"/>
-            </a:avLst>
-          </a:prstGeom>
-          <a:solidFill>
-            <a:srgbClr val="1B2A4A"/>
-          </a:solidFill>
-          <a:ln/>
-        </p:spPr>
-      </p:sp>
-      <p:pic>
-        <p:nvPicPr>
-          <p:cNvPr id="30" name="Image 4" descr="preencoded.png">    </p:cNvPr>
-          <p:cNvPicPr>
-            <a:picLocks noChangeAspect="1"/>
-          </p:cNvPicPr>
-          <p:nvPr/>
-        </p:nvPicPr>
-        <p:blipFill>
-          <a:blip r:embed="rId5"/>
-          <a:stretch>
-            <a:fillRect/>
-          </a:stretch>
-        </p:blipFill>
-        <p:spPr>
-          <a:xfrm>
-            <a:off x="777240" y="5285232"/>
-            <a:ext cx="411480" cy="411480"/>
-          </a:xfrm>
-          <a:prstGeom prst="rect">
-            <a:avLst/>
-          </a:prstGeom>
-        </p:spPr>
-      </p:pic>
-      <p:sp>
-        <p:nvSpPr>
-          <p:cNvPr id="31" name="Text 24"/>
-          <p:cNvSpPr/>
-          <p:nvPr/>
-        </p:nvSpPr>
-        <p:spPr>
-          <a:xfrm>
-            <a:off x="1325880" y="5212080"/>
-            <a:ext cx="1737360" cy="548640"/>
-          </a:xfrm>
-          <a:prstGeom prst="rect">
-            <a:avLst/>
-          </a:prstGeom>
-          <a:noFill/>
-          <a:ln/>
-        </p:spPr>
-        <p:txBody>
-          <a:bodyPr wrap="square" lIns="0" tIns="0" rIns="0" bIns="0" rtlCol="0" anchor="ctr"/>
-          <a:lstStyle/>
-          <a:p>
-            <a:pPr indent="0" marL="0">
-              <a:buNone/>
-            </a:pPr>
-            <a:r>
-              <a:rPr lang="en-US" sz="1700" b="1" dirty="0">
-                <a:solidFill>
-                  <a:srgbClr val="FFFFFF"/>
-                </a:solidFill>
-                <a:latin typeface="Calibri" pitchFamily="34" charset="0"/>
-                <a:ea typeface="Calibri" pitchFamily="34" charset="-122"/>
-                <a:cs typeface="Calibri" pitchFamily="34" charset="-120"/>
-              </a:rPr>
-              <a:t>Outlook</a:t>
-            </a:r>
-            <a:endParaRPr lang="en-US" sz="1700" dirty="0"/>
-          </a:p>
-        </p:txBody>
-      </p:sp>
-      <p:sp>
-        <p:nvSpPr>
-          <p:cNvPr id="32" name="Shape 25"/>
-          <p:cNvSpPr/>
-          <p:nvPr/>
-        </p:nvSpPr>
-        <p:spPr>
-          <a:xfrm>
-            <a:off x="3364992" y="5029200"/>
-            <a:ext cx="2697480" cy="914400"/>
-          </a:xfrm>
-          <a:prstGeom prst="roundRect">
-            <a:avLst>
-              <a:gd name="adj" fmla="val 8000"/>
-            </a:avLst>
-          </a:prstGeom>
-          <a:solidFill>
-            <a:srgbClr val="1B2A4A"/>
-          </a:solidFill>
-          <a:ln/>
-        </p:spPr>
-      </p:sp>
-      <p:pic>
-        <p:nvPicPr>
-          <p:cNvPr id="33" name="Image 5" descr="preencoded.png">    </p:cNvPr>
+          <p:cNvPr id="25" name="Image 3" descr="preencoded.png"/>
           <p:cNvPicPr>
             <a:picLocks noChangeAspect="1"/>
           </p:cNvPicPr>
@@ -16907,8 +17204,8 @@
         </p:blipFill>
         <p:spPr>
           <a:xfrm>
-            <a:off x="3685032" y="5285232"/>
-            <a:ext cx="411480" cy="411480"/>
+            <a:off x="10227564" y="2276856"/>
+            <a:ext cx="512064" cy="512064"/>
           </a:xfrm>
           <a:prstGeom prst="rect">
             <a:avLst/>
@@ -16917,38 +17214,38 @@
       </p:pic>
       <p:sp>
         <p:nvSpPr>
-          <p:cNvPr id="34" name="Text 26"/>
-          <p:cNvSpPr/>
-          <p:nvPr/>
-        </p:nvSpPr>
-        <p:spPr>
-          <a:xfrm>
-            <a:off x="4233672" y="5212080"/>
-            <a:ext cx="1737360" cy="548640"/>
-          </a:xfrm>
-          <a:prstGeom prst="rect">
-            <a:avLst/>
-          </a:prstGeom>
-          <a:noFill/>
-          <a:ln/>
-        </p:spPr>
-        <p:txBody>
-          <a:bodyPr wrap="square" lIns="0" tIns="0" rIns="0" bIns="0" rtlCol="0" anchor="ctr"/>
-          <a:lstStyle/>
-          <a:p>
-            <a:pPr indent="0" marL="0">
+          <p:cNvPr id="26" name="Text 20"/>
+          <p:cNvSpPr/>
+          <p:nvPr/>
+        </p:nvSpPr>
+        <p:spPr>
+          <a:xfrm>
+            <a:off x="9363456" y="3108960"/>
+            <a:ext cx="2240280" cy="365760"/>
+          </a:xfrm>
+          <a:prstGeom prst="rect">
+            <a:avLst/>
+          </a:prstGeom>
+          <a:noFill/>
+          <a:ln/>
+        </p:spPr>
+        <p:txBody>
+          <a:bodyPr wrap="square" lIns="0" tIns="0" rIns="0" bIns="0" rtlCol="0" anchor="ctr"/>
+          <a:lstStyle/>
+          <a:p>
+            <a:pPr marL="0" indent="0" algn="ctr">
               <a:buNone/>
             </a:pPr>
             <a:r>
               <a:rPr lang="en-US" sz="1700" b="1" dirty="0">
                 <a:solidFill>
-                  <a:srgbClr val="FFFFFF"/>
-                </a:solidFill>
-                <a:latin typeface="Calibri" pitchFamily="34" charset="0"/>
-                <a:ea typeface="Calibri" pitchFamily="34" charset="-122"/>
-                <a:cs typeface="Calibri" pitchFamily="34" charset="-120"/>
-              </a:rPr>
-              <a:t>Word</a:t>
+                  <a:srgbClr val="1B2A4A"/>
+                </a:solidFill>
+                <a:latin typeface="Georgia" pitchFamily="34" charset="0"/>
+                <a:ea typeface="Georgia" pitchFamily="34" charset="-122"/>
+                <a:cs typeface="Georgia" pitchFamily="34" charset="-120"/>
+              </a:rPr>
+              <a:t>4 · Paste back</a:t>
             </a:r>
             <a:endParaRPr lang="en-US" sz="1700" dirty="0"/>
           </a:p>
@@ -16956,13 +17253,94 @@
       </p:sp>
       <p:sp>
         <p:nvSpPr>
-          <p:cNvPr id="35" name="Shape 27"/>
-          <p:cNvSpPr/>
-          <p:nvPr/>
-        </p:nvSpPr>
-        <p:spPr>
-          <a:xfrm>
-            <a:off x="6272784" y="5029200"/>
+          <p:cNvPr id="27" name="Text 21"/>
+          <p:cNvSpPr/>
+          <p:nvPr/>
+        </p:nvSpPr>
+        <p:spPr>
+          <a:xfrm>
+            <a:off x="9363456" y="3502152"/>
+            <a:ext cx="2240280" cy="685800"/>
+          </a:xfrm>
+          <a:prstGeom prst="rect">
+            <a:avLst/>
+          </a:prstGeom>
+          <a:noFill/>
+          <a:ln/>
+        </p:spPr>
+        <p:txBody>
+          <a:bodyPr wrap="square" lIns="0" tIns="0" rIns="0" bIns="0" rtlCol="0" anchor="ctr"/>
+          <a:lstStyle/>
+          <a:p>
+            <a:pPr marL="0" indent="0" algn="ctr">
+              <a:lnSpc>
+                <a:spcPct val="108000"/>
+              </a:lnSpc>
+              <a:buNone/>
+            </a:pPr>
+            <a:r>
+              <a:rPr lang="en-US" sz="1200" dirty="0">
+                <a:solidFill>
+                  <a:srgbClr val="3C4A63"/>
+                </a:solidFill>
+                <a:latin typeface="Calibri" pitchFamily="34" charset="0"/>
+                <a:ea typeface="Calibri" pitchFamily="34" charset="-122"/>
+                <a:cs typeface="Calibri" pitchFamily="34" charset="-120"/>
+              </a:rPr>
+              <a:t>Drop the polished result into your M365 app and finish.</a:t>
+            </a:r>
+            <a:endParaRPr lang="en-US" sz="1200" dirty="0"/>
+          </a:p>
+        </p:txBody>
+      </p:sp>
+      <p:sp>
+        <p:nvSpPr>
+          <p:cNvPr id="28" name="Text 22"/>
+          <p:cNvSpPr/>
+          <p:nvPr/>
+        </p:nvSpPr>
+        <p:spPr>
+          <a:xfrm>
+            <a:off x="457200" y="4572000"/>
+            <a:ext cx="6400800" cy="365760"/>
+          </a:xfrm>
+          <a:prstGeom prst="rect">
+            <a:avLst/>
+          </a:prstGeom>
+          <a:noFill/>
+          <a:ln/>
+        </p:spPr>
+        <p:txBody>
+          <a:bodyPr wrap="square" lIns="0" tIns="0" rIns="0" bIns="0" rtlCol="0" anchor="ctr"/>
+          <a:lstStyle/>
+          <a:p>
+            <a:pPr marL="0" indent="0">
+              <a:buNone/>
+            </a:pPr>
+            <a:r>
+              <a:rPr lang="en-US" sz="1400" b="1" dirty="0">
+                <a:solidFill>
+                  <a:srgbClr val="1B2A4A"/>
+                </a:solidFill>
+                <a:latin typeface="Calibri" pitchFamily="34" charset="0"/>
+                <a:ea typeface="Calibri" pitchFamily="34" charset="-122"/>
+                <a:cs typeface="Calibri" pitchFamily="34" charset="-120"/>
+              </a:rPr>
+              <a:t>Works the same way across all four apps:</a:t>
+            </a:r>
+            <a:endParaRPr lang="en-US" sz="1400" dirty="0"/>
+          </a:p>
+        </p:txBody>
+      </p:sp>
+      <p:sp>
+        <p:nvSpPr>
+          <p:cNvPr id="29" name="Shape 23"/>
+          <p:cNvSpPr/>
+          <p:nvPr/>
+        </p:nvSpPr>
+        <p:spPr>
+          <a:xfrm>
+            <a:off x="457200" y="5029200"/>
             <a:ext cx="2697480" cy="914400"/>
           </a:xfrm>
           <a:prstGeom prst="roundRect">
@@ -16975,10 +17353,17 @@
           </a:solidFill>
           <a:ln/>
         </p:spPr>
+        <p:txBody>
+          <a:bodyPr/>
+          <a:lstStyle/>
+          <a:p>
+            <a:endParaRPr lang="en-US"/>
+          </a:p>
+        </p:txBody>
       </p:sp>
       <p:pic>
         <p:nvPicPr>
-          <p:cNvPr id="36" name="Image 6" descr="preencoded.png">    </p:cNvPr>
+          <p:cNvPr id="30" name="Image 4" descr="preencoded.png"/>
           <p:cNvPicPr>
             <a:picLocks noChangeAspect="1"/>
           </p:cNvPicPr>
@@ -16992,7 +17377,7 @@
         </p:blipFill>
         <p:spPr>
           <a:xfrm>
-            <a:off x="6592824" y="5285232"/>
+            <a:off x="777240" y="5285232"/>
             <a:ext cx="411480" cy="411480"/>
           </a:xfrm>
           <a:prstGeom prst="rect">
@@ -17002,13 +17387,13 @@
       </p:pic>
       <p:sp>
         <p:nvSpPr>
-          <p:cNvPr id="37" name="Text 28"/>
-          <p:cNvSpPr/>
-          <p:nvPr/>
-        </p:nvSpPr>
-        <p:spPr>
-          <a:xfrm>
-            <a:off x="7141464" y="5212080"/>
+          <p:cNvPr id="31" name="Text 24"/>
+          <p:cNvSpPr/>
+          <p:nvPr/>
+        </p:nvSpPr>
+        <p:spPr>
+          <a:xfrm>
+            <a:off x="1325880" y="5212080"/>
             <a:ext cx="1737360" cy="548640"/>
           </a:xfrm>
           <a:prstGeom prst="rect">
@@ -17021,7 +17406,7 @@
           <a:bodyPr wrap="square" lIns="0" tIns="0" rIns="0" bIns="0" rtlCol="0" anchor="ctr"/>
           <a:lstStyle/>
           <a:p>
-            <a:pPr indent="0" marL="0">
+            <a:pPr marL="0" indent="0">
               <a:buNone/>
             </a:pPr>
             <a:r>
@@ -17033,7 +17418,7 @@
                 <a:ea typeface="Calibri" pitchFamily="34" charset="-122"/>
                 <a:cs typeface="Calibri" pitchFamily="34" charset="-120"/>
               </a:rPr>
-              <a:t>Excel</a:t>
+              <a:t>Outlook</a:t>
             </a:r>
             <a:endParaRPr lang="en-US" sz="1700" dirty="0"/>
           </a:p>
@@ -17041,13 +17426,13 @@
       </p:sp>
       <p:sp>
         <p:nvSpPr>
-          <p:cNvPr id="38" name="Shape 29"/>
-          <p:cNvSpPr/>
-          <p:nvPr/>
-        </p:nvSpPr>
-        <p:spPr>
-          <a:xfrm>
-            <a:off x="9180576" y="5029200"/>
+          <p:cNvPr id="32" name="Shape 25"/>
+          <p:cNvSpPr/>
+          <p:nvPr/>
+        </p:nvSpPr>
+        <p:spPr>
+          <a:xfrm>
+            <a:off x="3364992" y="5029200"/>
             <a:ext cx="2697480" cy="914400"/>
           </a:xfrm>
           <a:prstGeom prst="roundRect">
@@ -17060,10 +17445,17 @@
           </a:solidFill>
           <a:ln/>
         </p:spPr>
+        <p:txBody>
+          <a:bodyPr/>
+          <a:lstStyle/>
+          <a:p>
+            <a:endParaRPr lang="en-US"/>
+          </a:p>
+        </p:txBody>
       </p:sp>
       <p:pic>
         <p:nvPicPr>
-          <p:cNvPr id="39" name="Image 7" descr="preencoded.png">    </p:cNvPr>
+          <p:cNvPr id="33" name="Image 5" descr="preencoded.png"/>
           <p:cNvPicPr>
             <a:picLocks noChangeAspect="1"/>
           </p:cNvPicPr>
@@ -17077,6 +17469,190 @@
         </p:blipFill>
         <p:spPr>
           <a:xfrm>
+            <a:off x="3685032" y="5285232"/>
+            <a:ext cx="411480" cy="411480"/>
+          </a:xfrm>
+          <a:prstGeom prst="rect">
+            <a:avLst/>
+          </a:prstGeom>
+        </p:spPr>
+      </p:pic>
+      <p:sp>
+        <p:nvSpPr>
+          <p:cNvPr id="34" name="Text 26"/>
+          <p:cNvSpPr/>
+          <p:nvPr/>
+        </p:nvSpPr>
+        <p:spPr>
+          <a:xfrm>
+            <a:off x="4233672" y="5212080"/>
+            <a:ext cx="1737360" cy="548640"/>
+          </a:xfrm>
+          <a:prstGeom prst="rect">
+            <a:avLst/>
+          </a:prstGeom>
+          <a:noFill/>
+          <a:ln/>
+        </p:spPr>
+        <p:txBody>
+          <a:bodyPr wrap="square" lIns="0" tIns="0" rIns="0" bIns="0" rtlCol="0" anchor="ctr"/>
+          <a:lstStyle/>
+          <a:p>
+            <a:pPr marL="0" indent="0">
+              <a:buNone/>
+            </a:pPr>
+            <a:r>
+              <a:rPr lang="en-US" sz="1700" b="1" dirty="0">
+                <a:solidFill>
+                  <a:srgbClr val="FFFFFF"/>
+                </a:solidFill>
+                <a:latin typeface="Calibri" pitchFamily="34" charset="0"/>
+                <a:ea typeface="Calibri" pitchFamily="34" charset="-122"/>
+                <a:cs typeface="Calibri" pitchFamily="34" charset="-120"/>
+              </a:rPr>
+              <a:t>Word</a:t>
+            </a:r>
+            <a:endParaRPr lang="en-US" sz="1700" dirty="0"/>
+          </a:p>
+        </p:txBody>
+      </p:sp>
+      <p:sp>
+        <p:nvSpPr>
+          <p:cNvPr id="35" name="Shape 27"/>
+          <p:cNvSpPr/>
+          <p:nvPr/>
+        </p:nvSpPr>
+        <p:spPr>
+          <a:xfrm>
+            <a:off x="6272784" y="5029200"/>
+            <a:ext cx="2697480" cy="914400"/>
+          </a:xfrm>
+          <a:prstGeom prst="roundRect">
+            <a:avLst>
+              <a:gd name="adj" fmla="val 8000"/>
+            </a:avLst>
+          </a:prstGeom>
+          <a:solidFill>
+            <a:srgbClr val="1B2A4A"/>
+          </a:solidFill>
+          <a:ln/>
+        </p:spPr>
+        <p:txBody>
+          <a:bodyPr/>
+          <a:lstStyle/>
+          <a:p>
+            <a:endParaRPr lang="en-US"/>
+          </a:p>
+        </p:txBody>
+      </p:sp>
+      <p:pic>
+        <p:nvPicPr>
+          <p:cNvPr id="36" name="Image 6" descr="preencoded.png"/>
+          <p:cNvPicPr>
+            <a:picLocks noChangeAspect="1"/>
+          </p:cNvPicPr>
+          <p:nvPr/>
+        </p:nvPicPr>
+        <p:blipFill>
+          <a:blip r:embed="rId9"/>
+          <a:stretch>
+            <a:fillRect/>
+          </a:stretch>
+        </p:blipFill>
+        <p:spPr>
+          <a:xfrm>
+            <a:off x="6592824" y="5285232"/>
+            <a:ext cx="411480" cy="411480"/>
+          </a:xfrm>
+          <a:prstGeom prst="rect">
+            <a:avLst/>
+          </a:prstGeom>
+        </p:spPr>
+      </p:pic>
+      <p:sp>
+        <p:nvSpPr>
+          <p:cNvPr id="37" name="Text 28"/>
+          <p:cNvSpPr/>
+          <p:nvPr/>
+        </p:nvSpPr>
+        <p:spPr>
+          <a:xfrm>
+            <a:off x="7141464" y="5212080"/>
+            <a:ext cx="1737360" cy="548640"/>
+          </a:xfrm>
+          <a:prstGeom prst="rect">
+            <a:avLst/>
+          </a:prstGeom>
+          <a:noFill/>
+          <a:ln/>
+        </p:spPr>
+        <p:txBody>
+          <a:bodyPr wrap="square" lIns="0" tIns="0" rIns="0" bIns="0" rtlCol="0" anchor="ctr"/>
+          <a:lstStyle/>
+          <a:p>
+            <a:pPr marL="0" indent="0">
+              <a:buNone/>
+            </a:pPr>
+            <a:r>
+              <a:rPr lang="en-US" sz="1700" b="1" dirty="0">
+                <a:solidFill>
+                  <a:srgbClr val="FFFFFF"/>
+                </a:solidFill>
+                <a:latin typeface="Calibri" pitchFamily="34" charset="0"/>
+                <a:ea typeface="Calibri" pitchFamily="34" charset="-122"/>
+                <a:cs typeface="Calibri" pitchFamily="34" charset="-120"/>
+              </a:rPr>
+              <a:t>Excel</a:t>
+            </a:r>
+            <a:endParaRPr lang="en-US" sz="1700" dirty="0"/>
+          </a:p>
+        </p:txBody>
+      </p:sp>
+      <p:sp>
+        <p:nvSpPr>
+          <p:cNvPr id="38" name="Shape 29"/>
+          <p:cNvSpPr/>
+          <p:nvPr/>
+        </p:nvSpPr>
+        <p:spPr>
+          <a:xfrm>
+            <a:off x="9180576" y="5029200"/>
+            <a:ext cx="2697480" cy="914400"/>
+          </a:xfrm>
+          <a:prstGeom prst="roundRect">
+            <a:avLst>
+              <a:gd name="adj" fmla="val 8000"/>
+            </a:avLst>
+          </a:prstGeom>
+          <a:solidFill>
+            <a:srgbClr val="1B2A4A"/>
+          </a:solidFill>
+          <a:ln/>
+        </p:spPr>
+        <p:txBody>
+          <a:bodyPr/>
+          <a:lstStyle/>
+          <a:p>
+            <a:endParaRPr lang="en-US"/>
+          </a:p>
+        </p:txBody>
+      </p:sp>
+      <p:pic>
+        <p:nvPicPr>
+          <p:cNvPr id="39" name="Image 7" descr="preencoded.png"/>
+          <p:cNvPicPr>
+            <a:picLocks noChangeAspect="1"/>
+          </p:cNvPicPr>
+          <p:nvPr/>
+        </p:nvPicPr>
+        <p:blipFill>
+          <a:blip r:embed="rId10"/>
+          <a:stretch>
+            <a:fillRect/>
+          </a:stretch>
+        </p:blipFill>
+        <p:spPr>
+          <a:xfrm>
             <a:off x="9500616" y="5285232"/>
             <a:ext cx="411480" cy="411480"/>
           </a:xfrm>
@@ -17106,7 +17682,7 @@
           <a:bodyPr wrap="square" lIns="0" tIns="0" rIns="0" bIns="0" rtlCol="0" anchor="ctr"/>
           <a:lstStyle/>
           <a:p>
-            <a:pPr indent="0" marL="0">
+            <a:pPr marL="0" indent="0">
               <a:buNone/>
             </a:pPr>
             <a:r>
@@ -17145,7 +17721,7 @@
           <a:bodyPr wrap="square" lIns="0" tIns="0" rIns="0" bIns="0" rtlCol="0" anchor="ctr"/>
           <a:lstStyle/>
           <a:p>
-            <a:pPr algn="l" indent="0" marL="0">
+            <a:pPr marL="0" indent="0" algn="l">
               <a:buNone/>
             </a:pPr>
             <a:r>
@@ -17184,7 +17760,7 @@
           <a:bodyPr wrap="square" lIns="0" tIns="0" rIns="0" bIns="0" rtlCol="0" anchor="ctr"/>
           <a:lstStyle/>
           <a:p>
-            <a:pPr algn="r" indent="0" marL="0">
+            <a:pPr marL="0" indent="0" algn="r">
               <a:buNone/>
             </a:pPr>
             <a:r>
@@ -17218,6 +17794,7 @@
         <a:solidFill>
           <a:srgbClr val="F5F7FA"/>
         </a:solidFill>
+        <a:effectLst/>
       </p:bgPr>
     </p:bg>
     <p:spTree>
@@ -17253,6 +17830,13 @@
           </a:solidFill>
           <a:ln/>
         </p:spPr>
+        <p:txBody>
+          <a:bodyPr/>
+          <a:lstStyle/>
+          <a:p>
+            <a:endParaRPr lang="en-US"/>
+          </a:p>
+        </p:txBody>
       </p:sp>
       <p:sp>
         <p:nvSpPr>
@@ -17275,11 +17859,11 @@
           <a:bodyPr wrap="square" lIns="0" tIns="0" rIns="0" bIns="0" rtlCol="0" anchor="ctr"/>
           <a:lstStyle/>
           <a:p>
-            <a:pPr indent="0" marL="0">
-              <a:buNone/>
-            </a:pPr>
-            <a:r>
-              <a:rPr lang="en-US" sz="1200" b="1" spc="200" kern="0" dirty="0">
+            <a:pPr marL="0" indent="0">
+              <a:buNone/>
+            </a:pPr>
+            <a:r>
+              <a:rPr lang="en-US" sz="1200" b="1" kern="0" spc="200" dirty="0">
                 <a:solidFill>
                   <a:srgbClr val="2C8C8C"/>
                 </a:solidFill>
@@ -17314,7 +17898,7 @@
           <a:bodyPr wrap="square" lIns="0" tIns="0" rIns="0" bIns="0" rtlCol="0" anchor="ctr"/>
           <a:lstStyle/>
           <a:p>
-            <a:pPr indent="0" marL="0">
+            <a:pPr marL="0" indent="0">
               <a:buNone/>
             </a:pPr>
             <a:r>
@@ -17351,6 +17935,13 @@
           </a:solidFill>
           <a:ln/>
         </p:spPr>
+        <p:txBody>
+          <a:bodyPr/>
+          <a:lstStyle/>
+          <a:p>
+            <a:endParaRPr lang="en-US"/>
+          </a:p>
+        </p:txBody>
       </p:sp>
       <p:sp>
         <p:nvSpPr>
@@ -17373,7 +17964,7 @@
           <a:bodyPr wrap="square" lIns="0" tIns="0" rIns="0" bIns="0" rtlCol="0" anchor="ctr"/>
           <a:lstStyle/>
           <a:p>
-            <a:pPr algn="ctr" indent="0" marL="0">
+            <a:pPr marL="0" indent="0" algn="ctr">
               <a:buNone/>
             </a:pPr>
             <a:r>
@@ -17412,7 +18003,7 @@
           <a:bodyPr wrap="square" lIns="0" tIns="0" rIns="0" bIns="0" rtlCol="0" anchor="ctr"/>
           <a:lstStyle/>
           <a:p>
-            <a:pPr indent="0" marL="0">
+            <a:pPr marL="0" indent="0">
               <a:buNone/>
             </a:pPr>
             <a:r>
@@ -17451,7 +18042,7 @@
           <a:bodyPr wrap="square" lIns="0" tIns="0" rIns="0" bIns="0" rtlCol="0" anchor="ctr"/>
           <a:lstStyle/>
           <a:p>
-            <a:pPr indent="0" marL="0">
+            <a:pPr marL="0" indent="0">
               <a:lnSpc>
                 <a:spcPct val="105000"/>
               </a:lnSpc>
@@ -17491,6 +18082,13 @@
           </a:solidFill>
           <a:ln/>
         </p:spPr>
+        <p:txBody>
+          <a:bodyPr/>
+          <a:lstStyle/>
+          <a:p>
+            <a:endParaRPr lang="en-US"/>
+          </a:p>
+        </p:txBody>
       </p:sp>
       <p:sp>
         <p:nvSpPr>
@@ -17513,7 +18111,7 @@
           <a:bodyPr wrap="square" lIns="0" tIns="0" rIns="0" bIns="0" rtlCol="0" anchor="ctr"/>
           <a:lstStyle/>
           <a:p>
-            <a:pPr algn="ctr" indent="0" marL="0">
+            <a:pPr marL="0" indent="0" algn="ctr">
               <a:buNone/>
             </a:pPr>
             <a:r>
@@ -17552,7 +18150,7 @@
           <a:bodyPr wrap="square" lIns="0" tIns="0" rIns="0" bIns="0" rtlCol="0" anchor="ctr"/>
           <a:lstStyle/>
           <a:p>
-            <a:pPr indent="0" marL="0">
+            <a:pPr marL="0" indent="0">
               <a:buNone/>
             </a:pPr>
             <a:r>
@@ -17591,7 +18189,7 @@
           <a:bodyPr wrap="square" lIns="0" tIns="0" rIns="0" bIns="0" rtlCol="0" anchor="ctr"/>
           <a:lstStyle/>
           <a:p>
-            <a:pPr indent="0" marL="0">
+            <a:pPr marL="0" indent="0">
               <a:lnSpc>
                 <a:spcPct val="105000"/>
               </a:lnSpc>
@@ -17631,6 +18229,13 @@
           </a:solidFill>
           <a:ln/>
         </p:spPr>
+        <p:txBody>
+          <a:bodyPr/>
+          <a:lstStyle/>
+          <a:p>
+            <a:endParaRPr lang="en-US"/>
+          </a:p>
+        </p:txBody>
       </p:sp>
       <p:sp>
         <p:nvSpPr>
@@ -17653,7 +18258,7 @@
           <a:bodyPr wrap="square" lIns="0" tIns="0" rIns="0" bIns="0" rtlCol="0" anchor="ctr"/>
           <a:lstStyle/>
           <a:p>
-            <a:pPr algn="ctr" indent="0" marL="0">
+            <a:pPr marL="0" indent="0" algn="ctr">
               <a:buNone/>
             </a:pPr>
             <a:r>
@@ -17692,7 +18297,7 @@
           <a:bodyPr wrap="square" lIns="0" tIns="0" rIns="0" bIns="0" rtlCol="0" anchor="ctr"/>
           <a:lstStyle/>
           <a:p>
-            <a:pPr indent="0" marL="0">
+            <a:pPr marL="0" indent="0">
               <a:buNone/>
             </a:pPr>
             <a:r>
@@ -17731,7 +18336,7 @@
           <a:bodyPr wrap="square" lIns="0" tIns="0" rIns="0" bIns="0" rtlCol="0" anchor="ctr"/>
           <a:lstStyle/>
           <a:p>
-            <a:pPr indent="0" marL="0">
+            <a:pPr marL="0" indent="0">
               <a:lnSpc>
                 <a:spcPct val="105000"/>
               </a:lnSpc>
@@ -17771,6 +18376,13 @@
           </a:solidFill>
           <a:ln/>
         </p:spPr>
+        <p:txBody>
+          <a:bodyPr/>
+          <a:lstStyle/>
+          <a:p>
+            <a:endParaRPr lang="en-US"/>
+          </a:p>
+        </p:txBody>
       </p:sp>
       <p:sp>
         <p:nvSpPr>
@@ -17793,7 +18405,7 @@
           <a:bodyPr wrap="square" lIns="0" tIns="0" rIns="0" bIns="0" rtlCol="0" anchor="ctr"/>
           <a:lstStyle/>
           <a:p>
-            <a:pPr algn="ctr" indent="0" marL="0">
+            <a:pPr marL="0" indent="0" algn="ctr">
               <a:buNone/>
             </a:pPr>
             <a:r>
@@ -17832,7 +18444,7 @@
           <a:bodyPr wrap="square" lIns="0" tIns="0" rIns="0" bIns="0" rtlCol="0" anchor="ctr"/>
           <a:lstStyle/>
           <a:p>
-            <a:pPr indent="0" marL="0">
+            <a:pPr marL="0" indent="0">
               <a:buNone/>
             </a:pPr>
             <a:r>
@@ -17871,7 +18483,7 @@
           <a:bodyPr wrap="square" lIns="0" tIns="0" rIns="0" bIns="0" rtlCol="0" anchor="ctr"/>
           <a:lstStyle/>
           <a:p>
-            <a:pPr indent="0" marL="0">
+            <a:pPr marL="0" indent="0">
               <a:lnSpc>
                 <a:spcPct val="105000"/>
               </a:lnSpc>
@@ -17918,13 +18530,20 @@
             <a:prstDash val="solid"/>
           </a:ln>
           <a:effectLst>
-            <a:outerShdw sx="100000" sy="100000" kx="0" ky="0" algn="bl" rotWithShape="0" blurRad="88900" dist="38100" dir="8100000">
+            <a:outerShdw blurRad="88900" dist="38100" dir="8100000" algn="bl" rotWithShape="0">
               <a:srgbClr val="000000">
                 <a:alpha val="16000"/>
               </a:srgbClr>
             </a:outerShdw>
           </a:effectLst>
         </p:spPr>
+        <p:txBody>
+          <a:bodyPr/>
+          <a:lstStyle/>
+          <a:p>
+            <a:endParaRPr lang="en-US"/>
+          </a:p>
+        </p:txBody>
       </p:sp>
       <p:sp>
         <p:nvSpPr>
@@ -17947,7 +18566,7 @@
           <a:bodyPr wrap="square" lIns="0" tIns="0" rIns="0" bIns="0" rtlCol="0" anchor="ctr"/>
           <a:lstStyle/>
           <a:p>
-            <a:pPr indent="0" marL="0">
+            <a:pPr marL="0" indent="0">
               <a:buNone/>
             </a:pPr>
             <a:r>
@@ -17986,7 +18605,7 @@
           <a:bodyPr wrap="square" lIns="0" tIns="0" rIns="0" bIns="0" rtlCol="0" anchor="t"/>
           <a:lstStyle/>
           <a:p>
-            <a:pPr indent="0" marL="0">
+            <a:pPr marL="0" indent="0">
               <a:lnSpc>
                 <a:spcPct val="112000"/>
               </a:lnSpc>
@@ -18003,13 +18622,38 @@
               </a:rPr>
               <a:t>Free</a:t>
             </a:r>
-            <a:pPr indent="0" marL="0">
+            <a:r>
+              <a:rPr lang="en-US" sz="1350" dirty="0">
+                <a:solidFill>
+                  <a:srgbClr val="DCE4F0"/>
+                </a:solidFill>
+                <a:latin typeface="Calibri" pitchFamily="34" charset="0"/>
+                <a:ea typeface="Calibri" pitchFamily="34" charset="-122"/>
+                <a:cs typeface="Calibri" pitchFamily="34" charset="-120"/>
+              </a:rPr>
+              <a:t>, enough to follow everything today.</a:t>
+            </a:r>
+            <a:endParaRPr lang="en-US" sz="1350" dirty="0"/>
+          </a:p>
+          <a:p>
+            <a:pPr marL="0" indent="0">
               <a:lnSpc>
                 <a:spcPct val="112000"/>
               </a:lnSpc>
               <a:buNone/>
             </a:pPr>
             <a:r>
+              <a:rPr lang="en-US" sz="1350" b="1" dirty="0">
+                <a:solidFill>
+                  <a:srgbClr val="E8A33D"/>
+                </a:solidFill>
+                <a:latin typeface="Calibri" pitchFamily="34" charset="0"/>
+                <a:ea typeface="Calibri" pitchFamily="34" charset="-122"/>
+                <a:cs typeface="Calibri" pitchFamily="34" charset="-120"/>
+              </a:rPr>
+              <a:t>Pro</a:t>
+            </a:r>
+            <a:r>
               <a:rPr lang="en-US" sz="1350" dirty="0">
                 <a:solidFill>
                   <a:srgbClr val="DCE4F0"/>
@@ -18018,35 +18662,49 @@
                 <a:ea typeface="Calibri" pitchFamily="34" charset="-122"/>
                 <a:cs typeface="Calibri" pitchFamily="34" charset="-120"/>
               </a:rPr>
-              <a:t>, enough to follow everything today.</a:t>
+              <a:t>, about $20/mo for heavier daily use,</a:t>
             </a:r>
             <a:endParaRPr lang="en-US" sz="1350" dirty="0"/>
           </a:p>
           <a:p>
-            <a:pPr indent="0" marL="0">
+            <a:pPr marL="0" indent="0">
               <a:lnSpc>
                 <a:spcPct val="112000"/>
               </a:lnSpc>
               <a:buNone/>
             </a:pPr>
             <a:r>
-              <a:rPr lang="en-US" sz="1350" b="1" dirty="0">
-                <a:solidFill>
-                  <a:srgbClr val="E8A33D"/>
-                </a:solidFill>
-                <a:latin typeface="Calibri" pitchFamily="34" charset="0"/>
-                <a:ea typeface="Calibri" pitchFamily="34" charset="-122"/>
-                <a:cs typeface="Calibri" pitchFamily="34" charset="-120"/>
-              </a:rPr>
-              <a:t>Pro</a:t>
-            </a:r>
-            <a:pPr indent="0" marL="0">
+              <a:rPr lang="en-US" sz="1350" dirty="0">
+                <a:solidFill>
+                  <a:srgbClr val="DCE4F0"/>
+                </a:solidFill>
+                <a:latin typeface="Calibri" pitchFamily="34" charset="0"/>
+                <a:ea typeface="Calibri" pitchFamily="34" charset="-122"/>
+                <a:cs typeface="Calibri" pitchFamily="34" charset="-120"/>
+              </a:rPr>
+              <a:t>    higher limits and longer documents.</a:t>
+            </a:r>
+            <a:endParaRPr lang="en-US" sz="1350" dirty="0"/>
+          </a:p>
+          <a:p>
+            <a:pPr marL="0" indent="0">
               <a:lnSpc>
                 <a:spcPct val="112000"/>
               </a:lnSpc>
               <a:buNone/>
             </a:pPr>
             <a:r>
+              <a:rPr lang="en-US" sz="1350" b="1" dirty="0">
+                <a:solidFill>
+                  <a:srgbClr val="E8A33D"/>
+                </a:solidFill>
+                <a:latin typeface="Calibri" pitchFamily="34" charset="0"/>
+                <a:ea typeface="Calibri" pitchFamily="34" charset="-122"/>
+                <a:cs typeface="Calibri" pitchFamily="34" charset="-120"/>
+              </a:rPr>
+              <a:t>Team / Enterprise</a:t>
+            </a:r>
+            <a:r>
               <a:rPr lang="en-US" sz="1350" dirty="0">
                 <a:solidFill>
                   <a:srgbClr val="DCE4F0"/>
@@ -18055,12 +18713,12 @@
                 <a:ea typeface="Calibri" pitchFamily="34" charset="-122"/>
                 <a:cs typeface="Calibri" pitchFamily="34" charset="-120"/>
               </a:rPr>
-              <a:t>, about $20/mo for heavier daily use,</a:t>
+              <a:t>, when your org rolls</a:t>
             </a:r>
             <a:endParaRPr lang="en-US" sz="1350" dirty="0"/>
           </a:p>
           <a:p>
-            <a:pPr indent="0" marL="0">
+            <a:pPr marL="0" indent="0">
               <a:lnSpc>
                 <a:spcPct val="112000"/>
               </a:lnSpc>
@@ -18075,69 +18733,12 @@
                 <a:ea typeface="Calibri" pitchFamily="34" charset="-122"/>
                 <a:cs typeface="Calibri" pitchFamily="34" charset="-120"/>
               </a:rPr>
-              <a:t>    higher limits and longer documents.</a:t>
+              <a:t>    it out, with admin controls and the</a:t>
             </a:r>
             <a:endParaRPr lang="en-US" sz="1350" dirty="0"/>
           </a:p>
           <a:p>
-            <a:pPr indent="0" marL="0">
-              <a:lnSpc>
-                <a:spcPct val="112000"/>
-              </a:lnSpc>
-              <a:buNone/>
-            </a:pPr>
-            <a:r>
-              <a:rPr lang="en-US" sz="1350" b="1" dirty="0">
-                <a:solidFill>
-                  <a:srgbClr val="E8A33D"/>
-                </a:solidFill>
-                <a:latin typeface="Calibri" pitchFamily="34" charset="0"/>
-                <a:ea typeface="Calibri" pitchFamily="34" charset="-122"/>
-                <a:cs typeface="Calibri" pitchFamily="34" charset="-120"/>
-              </a:rPr>
-              <a:t>Team / Enterprise</a:t>
-            </a:r>
-            <a:pPr indent="0" marL="0">
-              <a:lnSpc>
-                <a:spcPct val="112000"/>
-              </a:lnSpc>
-              <a:buNone/>
-            </a:pPr>
-            <a:r>
-              <a:rPr lang="en-US" sz="1350" dirty="0">
-                <a:solidFill>
-                  <a:srgbClr val="DCE4F0"/>
-                </a:solidFill>
-                <a:latin typeface="Calibri" pitchFamily="34" charset="0"/>
-                <a:ea typeface="Calibri" pitchFamily="34" charset="-122"/>
-                <a:cs typeface="Calibri" pitchFamily="34" charset="-120"/>
-              </a:rPr>
-              <a:t>, when your org rolls</a:t>
-            </a:r>
-            <a:endParaRPr lang="en-US" sz="1350" dirty="0"/>
-          </a:p>
-          <a:p>
-            <a:pPr indent="0" marL="0">
-              <a:lnSpc>
-                <a:spcPct val="112000"/>
-              </a:lnSpc>
-              <a:buNone/>
-            </a:pPr>
-            <a:r>
-              <a:rPr lang="en-US" sz="1350" dirty="0">
-                <a:solidFill>
-                  <a:srgbClr val="DCE4F0"/>
-                </a:solidFill>
-                <a:latin typeface="Calibri" pitchFamily="34" charset="0"/>
-                <a:ea typeface="Calibri" pitchFamily="34" charset="-122"/>
-                <a:cs typeface="Calibri" pitchFamily="34" charset="-120"/>
-              </a:rPr>
-              <a:t>    it out, with admin controls and the</a:t>
-            </a:r>
-            <a:endParaRPr lang="en-US" sz="1350" dirty="0"/>
-          </a:p>
-          <a:p>
-            <a:pPr indent="0" marL="0">
+            <a:pPr marL="0" indent="0">
               <a:lnSpc>
                 <a:spcPct val="112000"/>
               </a:lnSpc>
@@ -18180,6 +18781,13 @@
             <a:prstDash val="solid"/>
           </a:ln>
         </p:spPr>
+        <p:txBody>
+          <a:bodyPr/>
+          <a:lstStyle/>
+          <a:p>
+            <a:endParaRPr lang="en-US"/>
+          </a:p>
+        </p:txBody>
       </p:sp>
       <p:sp>
         <p:nvSpPr>
@@ -18202,7 +18810,7 @@
           <a:bodyPr wrap="square" lIns="0" tIns="0" rIns="0" bIns="0" rtlCol="0" anchor="ctr"/>
           <a:lstStyle/>
           <a:p>
-            <a:pPr indent="0" marL="0">
+            <a:pPr marL="0" indent="0">
               <a:lnSpc>
                 <a:spcPct val="110000"/>
               </a:lnSpc>
@@ -18244,7 +18852,7 @@
           <a:bodyPr wrap="square" lIns="0" tIns="0" rIns="0" bIns="0" rtlCol="0" anchor="ctr"/>
           <a:lstStyle/>
           <a:p>
-            <a:pPr algn="l" indent="0" marL="0">
+            <a:pPr marL="0" indent="0" algn="l">
               <a:buNone/>
             </a:pPr>
             <a:r>
@@ -18283,7 +18891,7 @@
           <a:bodyPr wrap="square" lIns="0" tIns="0" rIns="0" bIns="0" rtlCol="0" anchor="ctr"/>
           <a:lstStyle/>
           <a:p>
-            <a:pPr algn="r" indent="0" marL="0">
+            <a:pPr marL="0" indent="0" algn="r">
               <a:buNone/>
             </a:pPr>
             <a:r>
@@ -18317,6 +18925,7 @@
         <a:solidFill>
           <a:srgbClr val="F5F7FA"/>
         </a:solidFill>
+        <a:effectLst/>
       </p:bgPr>
     </p:bg>
     <p:spTree>
@@ -18352,6 +18961,13 @@
           </a:solidFill>
           <a:ln/>
         </p:spPr>
+        <p:txBody>
+          <a:bodyPr/>
+          <a:lstStyle/>
+          <a:p>
+            <a:endParaRPr lang="en-US"/>
+          </a:p>
+        </p:txBody>
       </p:sp>
       <p:sp>
         <p:nvSpPr>
@@ -18374,11 +18990,11 @@
           <a:bodyPr wrap="square" lIns="0" tIns="0" rIns="0" bIns="0" rtlCol="0" anchor="ctr"/>
           <a:lstStyle/>
           <a:p>
-            <a:pPr indent="0" marL="0">
-              <a:buNone/>
-            </a:pPr>
-            <a:r>
-              <a:rPr lang="en-US" sz="1200" b="1" spc="200" kern="0" dirty="0">
+            <a:pPr marL="0" indent="0">
+              <a:buNone/>
+            </a:pPr>
+            <a:r>
+              <a:rPr lang="en-US" sz="1200" b="1" kern="0" spc="200" dirty="0">
                 <a:solidFill>
                   <a:srgbClr val="2C8C8C"/>
                 </a:solidFill>
@@ -18413,7 +19029,7 @@
           <a:bodyPr wrap="square" lIns="0" tIns="0" rIns="0" bIns="0" rtlCol="0" anchor="ctr"/>
           <a:lstStyle/>
           <a:p>
-            <a:pPr indent="0" marL="0">
+            <a:pPr marL="0" indent="0">
               <a:buNone/>
             </a:pPr>
             <a:r>
@@ -18457,13 +19073,20 @@
             <a:prstDash val="solid"/>
           </a:ln>
           <a:effectLst>
-            <a:outerShdw sx="100000" sy="100000" kx="0" ky="0" algn="bl" rotWithShape="0" blurRad="88900" dist="38100" dir="8100000">
+            <a:outerShdw blurRad="88900" dist="38100" dir="8100000" algn="bl" rotWithShape="0">
               <a:srgbClr val="000000">
                 <a:alpha val="16000"/>
               </a:srgbClr>
             </a:outerShdw>
           </a:effectLst>
         </p:spPr>
+        <p:txBody>
+          <a:bodyPr/>
+          <a:lstStyle/>
+          <a:p>
+            <a:endParaRPr lang="en-US"/>
+          </a:p>
+        </p:txBody>
       </p:sp>
       <p:sp>
         <p:nvSpPr>
@@ -18484,6 +19107,13 @@
           </a:solidFill>
           <a:ln/>
         </p:spPr>
+        <p:txBody>
+          <a:bodyPr/>
+          <a:lstStyle/>
+          <a:p>
+            <a:endParaRPr lang="en-US"/>
+          </a:p>
+        </p:txBody>
       </p:sp>
       <p:sp>
         <p:nvSpPr>
@@ -18504,17 +19134,24 @@
           </a:solidFill>
           <a:ln/>
         </p:spPr>
+        <p:txBody>
+          <a:bodyPr/>
+          <a:lstStyle/>
+          <a:p>
+            <a:endParaRPr lang="en-US"/>
+          </a:p>
+        </p:txBody>
       </p:sp>
       <p:pic>
         <p:nvPicPr>
-          <p:cNvPr id="8" name="Image 0" descr="preencoded.png">    </p:cNvPr>
+          <p:cNvPr id="8" name="Image 0" descr="preencoded.png"/>
           <p:cNvPicPr>
             <a:picLocks noChangeAspect="1"/>
           </p:cNvPicPr>
           <p:nvPr/>
         </p:nvPicPr>
         <p:blipFill>
-          <a:blip r:embed="rId1"/>
+          <a:blip r:embed="rId3"/>
           <a:stretch>
             <a:fillRect/>
           </a:stretch>
@@ -18550,7 +19187,7 @@
           <a:bodyPr wrap="square" lIns="0" tIns="0" rIns="0" bIns="0" rtlCol="0" anchor="ctr"/>
           <a:lstStyle/>
           <a:p>
-            <a:pPr indent="0" marL="0">
+            <a:pPr marL="0" indent="0">
               <a:buNone/>
             </a:pPr>
             <a:r>
@@ -18589,7 +19226,7 @@
           <a:bodyPr wrap="square" lIns="0" tIns="0" rIns="0" bIns="0" rtlCol="0" anchor="ctr"/>
           <a:lstStyle/>
           <a:p>
-            <a:pPr indent="0" marL="0">
+            <a:pPr marL="0" indent="0">
               <a:buNone/>
             </a:pPr>
             <a:r>
@@ -18628,7 +19265,7 @@
           <a:bodyPr wrap="square" lIns="0" tIns="0" rIns="0" bIns="0" rtlCol="0" anchor="ctr"/>
           <a:lstStyle/>
           <a:p>
-            <a:pPr indent="0" marL="0">
+            <a:pPr marL="0" indent="0">
               <a:lnSpc>
                 <a:spcPct val="108000"/>
               </a:lnSpc>
@@ -18675,13 +19312,20 @@
             <a:prstDash val="solid"/>
           </a:ln>
           <a:effectLst>
-            <a:outerShdw sx="100000" sy="100000" kx="0" ky="0" algn="bl" rotWithShape="0" blurRad="88900" dist="38100" dir="8100000">
+            <a:outerShdw blurRad="88900" dist="38100" dir="8100000" algn="bl" rotWithShape="0">
               <a:srgbClr val="000000">
                 <a:alpha val="16000"/>
               </a:srgbClr>
             </a:outerShdw>
           </a:effectLst>
         </p:spPr>
+        <p:txBody>
+          <a:bodyPr/>
+          <a:lstStyle/>
+          <a:p>
+            <a:endParaRPr lang="en-US"/>
+          </a:p>
+        </p:txBody>
       </p:sp>
       <p:sp>
         <p:nvSpPr>
@@ -18702,6 +19346,13 @@
           </a:solidFill>
           <a:ln/>
         </p:spPr>
+        <p:txBody>
+          <a:bodyPr/>
+          <a:lstStyle/>
+          <a:p>
+            <a:endParaRPr lang="en-US"/>
+          </a:p>
+        </p:txBody>
       </p:sp>
       <p:sp>
         <p:nvSpPr>
@@ -18722,17 +19373,24 @@
           </a:solidFill>
           <a:ln/>
         </p:spPr>
+        <p:txBody>
+          <a:bodyPr/>
+          <a:lstStyle/>
+          <a:p>
+            <a:endParaRPr lang="en-US"/>
+          </a:p>
+        </p:txBody>
       </p:sp>
       <p:pic>
         <p:nvPicPr>
-          <p:cNvPr id="15" name="Image 1" descr="preencoded.png">    </p:cNvPr>
+          <p:cNvPr id="15" name="Image 1" descr="preencoded.png"/>
           <p:cNvPicPr>
             <a:picLocks noChangeAspect="1"/>
           </p:cNvPicPr>
           <p:nvPr/>
         </p:nvPicPr>
         <p:blipFill>
-          <a:blip r:embed="rId2"/>
+          <a:blip r:embed="rId4"/>
           <a:stretch>
             <a:fillRect/>
           </a:stretch>
@@ -18768,7 +19426,7 @@
           <a:bodyPr wrap="square" lIns="0" tIns="0" rIns="0" bIns="0" rtlCol="0" anchor="ctr"/>
           <a:lstStyle/>
           <a:p>
-            <a:pPr indent="0" marL="0">
+            <a:pPr marL="0" indent="0">
               <a:buNone/>
             </a:pPr>
             <a:r>
@@ -18807,7 +19465,7 @@
           <a:bodyPr wrap="square" lIns="0" tIns="0" rIns="0" bIns="0" rtlCol="0" anchor="ctr"/>
           <a:lstStyle/>
           <a:p>
-            <a:pPr indent="0" marL="0">
+            <a:pPr marL="0" indent="0">
               <a:buNone/>
             </a:pPr>
             <a:r>
@@ -18846,7 +19504,7 @@
           <a:bodyPr wrap="square" lIns="0" tIns="0" rIns="0" bIns="0" rtlCol="0" anchor="ctr"/>
           <a:lstStyle/>
           <a:p>
-            <a:pPr indent="0" marL="0">
+            <a:pPr marL="0" indent="0">
               <a:lnSpc>
                 <a:spcPct val="108000"/>
               </a:lnSpc>
@@ -18893,13 +19551,20 @@
             <a:prstDash val="solid"/>
           </a:ln>
           <a:effectLst>
-            <a:outerShdw sx="100000" sy="100000" kx="0" ky="0" algn="bl" rotWithShape="0" blurRad="88900" dist="38100" dir="8100000">
+            <a:outerShdw blurRad="88900" dist="38100" dir="8100000" algn="bl" rotWithShape="0">
               <a:srgbClr val="000000">
                 <a:alpha val="16000"/>
               </a:srgbClr>
             </a:outerShdw>
           </a:effectLst>
         </p:spPr>
+        <p:txBody>
+          <a:bodyPr/>
+          <a:lstStyle/>
+          <a:p>
+            <a:endParaRPr lang="en-US"/>
+          </a:p>
+        </p:txBody>
       </p:sp>
       <p:sp>
         <p:nvSpPr>
@@ -18920,6 +19585,13 @@
           </a:solidFill>
           <a:ln/>
         </p:spPr>
+        <p:txBody>
+          <a:bodyPr/>
+          <a:lstStyle/>
+          <a:p>
+            <a:endParaRPr lang="en-US"/>
+          </a:p>
+        </p:txBody>
       </p:sp>
       <p:sp>
         <p:nvSpPr>
@@ -18940,17 +19612,24 @@
           </a:solidFill>
           <a:ln/>
         </p:spPr>
+        <p:txBody>
+          <a:bodyPr/>
+          <a:lstStyle/>
+          <a:p>
+            <a:endParaRPr lang="en-US"/>
+          </a:p>
+        </p:txBody>
       </p:sp>
       <p:pic>
         <p:nvPicPr>
-          <p:cNvPr id="22" name="Image 2" descr="preencoded.png">    </p:cNvPr>
+          <p:cNvPr id="22" name="Image 2" descr="preencoded.png"/>
           <p:cNvPicPr>
             <a:picLocks noChangeAspect="1"/>
           </p:cNvPicPr>
           <p:nvPr/>
         </p:nvPicPr>
         <p:blipFill>
-          <a:blip r:embed="rId3"/>
+          <a:blip r:embed="rId5"/>
           <a:stretch>
             <a:fillRect/>
           </a:stretch>
@@ -18986,7 +19665,7 @@
           <a:bodyPr wrap="square" lIns="0" tIns="0" rIns="0" bIns="0" rtlCol="0" anchor="ctr"/>
           <a:lstStyle/>
           <a:p>
-            <a:pPr indent="0" marL="0">
+            <a:pPr marL="0" indent="0">
               <a:buNone/>
             </a:pPr>
             <a:r>
@@ -19025,7 +19704,7 @@
           <a:bodyPr wrap="square" lIns="0" tIns="0" rIns="0" bIns="0" rtlCol="0" anchor="ctr"/>
           <a:lstStyle/>
           <a:p>
-            <a:pPr indent="0" marL="0">
+            <a:pPr marL="0" indent="0">
               <a:buNone/>
             </a:pPr>
             <a:r>
@@ -19064,7 +19743,7 @@
           <a:bodyPr wrap="square" lIns="0" tIns="0" rIns="0" bIns="0" rtlCol="0" anchor="ctr"/>
           <a:lstStyle/>
           <a:p>
-            <a:pPr indent="0" marL="0">
+            <a:pPr marL="0" indent="0">
               <a:lnSpc>
                 <a:spcPct val="108000"/>
               </a:lnSpc>
@@ -19111,13 +19790,20 @@
             <a:prstDash val="solid"/>
           </a:ln>
           <a:effectLst>
-            <a:outerShdw sx="100000" sy="100000" kx="0" ky="0" algn="bl" rotWithShape="0" blurRad="88900" dist="38100" dir="8100000">
+            <a:outerShdw blurRad="88900" dist="38100" dir="8100000" algn="bl" rotWithShape="0">
               <a:srgbClr val="000000">
                 <a:alpha val="16000"/>
               </a:srgbClr>
             </a:outerShdw>
           </a:effectLst>
         </p:spPr>
+        <p:txBody>
+          <a:bodyPr/>
+          <a:lstStyle/>
+          <a:p>
+            <a:endParaRPr lang="en-US"/>
+          </a:p>
+        </p:txBody>
       </p:sp>
       <p:sp>
         <p:nvSpPr>
@@ -19138,6 +19824,13 @@
           </a:solidFill>
           <a:ln/>
         </p:spPr>
+        <p:txBody>
+          <a:bodyPr/>
+          <a:lstStyle/>
+          <a:p>
+            <a:endParaRPr lang="en-US"/>
+          </a:p>
+        </p:txBody>
       </p:sp>
       <p:sp>
         <p:nvSpPr>
@@ -19158,17 +19851,24 @@
           </a:solidFill>
           <a:ln/>
         </p:spPr>
+        <p:txBody>
+          <a:bodyPr/>
+          <a:lstStyle/>
+          <a:p>
+            <a:endParaRPr lang="en-US"/>
+          </a:p>
+        </p:txBody>
       </p:sp>
       <p:pic>
         <p:nvPicPr>
-          <p:cNvPr id="29" name="Image 3" descr="preencoded.png">    </p:cNvPr>
+          <p:cNvPr id="29" name="Image 3" descr="preencoded.png"/>
           <p:cNvPicPr>
             <a:picLocks noChangeAspect="1"/>
           </p:cNvPicPr>
           <p:nvPr/>
         </p:nvPicPr>
         <p:blipFill>
-          <a:blip r:embed="rId4"/>
+          <a:blip r:embed="rId6"/>
           <a:stretch>
             <a:fillRect/>
           </a:stretch>
@@ -19204,7 +19904,7 @@
           <a:bodyPr wrap="square" lIns="0" tIns="0" rIns="0" bIns="0" rtlCol="0" anchor="ctr"/>
           <a:lstStyle/>
           <a:p>
-            <a:pPr indent="0" marL="0">
+            <a:pPr marL="0" indent="0">
               <a:buNone/>
             </a:pPr>
             <a:r>
@@ -19243,7 +19943,7 @@
           <a:bodyPr wrap="square" lIns="0" tIns="0" rIns="0" bIns="0" rtlCol="0" anchor="ctr"/>
           <a:lstStyle/>
           <a:p>
-            <a:pPr indent="0" marL="0">
+            <a:pPr marL="0" indent="0">
               <a:buNone/>
             </a:pPr>
             <a:r>
@@ -19282,7 +19982,7 @@
           <a:bodyPr wrap="square" lIns="0" tIns="0" rIns="0" bIns="0" rtlCol="0" anchor="ctr"/>
           <a:lstStyle/>
           <a:p>
-            <a:pPr indent="0" marL="0">
+            <a:pPr marL="0" indent="0">
               <a:lnSpc>
                 <a:spcPct val="108000"/>
               </a:lnSpc>
@@ -19324,7 +20024,7 @@
           <a:bodyPr wrap="square" lIns="0" tIns="0" rIns="0" bIns="0" rtlCol="0" anchor="ctr"/>
           <a:lstStyle/>
           <a:p>
-            <a:pPr indent="0" marL="0">
+            <a:pPr marL="0" indent="0">
               <a:lnSpc>
                 <a:spcPct val="110000"/>
               </a:lnSpc>
@@ -19341,12 +20041,6 @@
               </a:rPr>
               <a:t>Rule of thumb: </a:t>
             </a:r>
-            <a:pPr indent="0" marL="0">
-              <a:lnSpc>
-                <a:spcPct val="110000"/>
-              </a:lnSpc>
-              <a:buNone/>
-            </a:pPr>
             <a:r>
               <a:rPr lang="en-US" sz="1500" dirty="0">
                 <a:solidFill>
@@ -19388,17 +20082,24 @@
             <a:prstDash val="solid"/>
           </a:ln>
         </p:spPr>
+        <p:txBody>
+          <a:bodyPr/>
+          <a:lstStyle/>
+          <a:p>
+            <a:endParaRPr lang="en-US"/>
+          </a:p>
+        </p:txBody>
       </p:sp>
       <p:pic>
         <p:nvPicPr>
-          <p:cNvPr id="35" name="Image 4" descr="preencoded.png">    </p:cNvPr>
+          <p:cNvPr id="35" name="Image 4" descr="preencoded.png"/>
           <p:cNvPicPr>
             <a:picLocks noChangeAspect="1"/>
           </p:cNvPicPr>
           <p:nvPr/>
         </p:nvPicPr>
         <p:blipFill>
-          <a:blip r:embed="rId5"/>
+          <a:blip r:embed="rId7"/>
           <a:stretch>
             <a:fillRect/>
           </a:stretch>
@@ -19434,7 +20135,7 @@
           <a:bodyPr wrap="square" lIns="0" tIns="0" rIns="0" bIns="0" rtlCol="0" anchor="ctr"/>
           <a:lstStyle/>
           <a:p>
-            <a:pPr indent="0" marL="0">
+            <a:pPr marL="0" indent="0">
               <a:lnSpc>
                 <a:spcPct val="105000"/>
               </a:lnSpc>
@@ -19451,12 +20152,6 @@
               </a:rPr>
               <a:t>Don't aim for the perfect prompt. </a:t>
             </a:r>
-            <a:pPr indent="0" marL="0">
-              <a:lnSpc>
-                <a:spcPct val="105000"/>
-              </a:lnSpc>
-              <a:buNone/>
-            </a:pPr>
             <a:r>
               <a:rPr lang="en-US" sz="1350" dirty="0">
                 <a:solidFill>
@@ -19493,7 +20188,7 @@
           <a:bodyPr wrap="square" lIns="0" tIns="0" rIns="0" bIns="0" rtlCol="0" anchor="ctr"/>
           <a:lstStyle/>
           <a:p>
-            <a:pPr algn="l" indent="0" marL="0">
+            <a:pPr marL="0" indent="0" algn="l">
               <a:buNone/>
             </a:pPr>
             <a:r>
@@ -19532,7 +20227,7 @@
           <a:bodyPr wrap="square" lIns="0" tIns="0" rIns="0" bIns="0" rtlCol="0" anchor="ctr"/>
           <a:lstStyle/>
           <a:p>
-            <a:pPr algn="r" indent="0" marL="0">
+            <a:pPr marL="0" indent="0" algn="r">
               <a:buNone/>
             </a:pPr>
             <a:r>
@@ -19566,6 +20261,7 @@
         <a:solidFill>
           <a:srgbClr val="1B2A4A"/>
         </a:solidFill>
+        <a:effectLst/>
       </p:bgPr>
     </p:bg>
     <p:spTree>
@@ -19601,6 +20297,13 @@
           </a:solidFill>
           <a:ln/>
         </p:spPr>
+        <p:txBody>
+          <a:bodyPr/>
+          <a:lstStyle/>
+          <a:p>
+            <a:endParaRPr lang="en-US"/>
+          </a:p>
+        </p:txBody>
       </p:sp>
       <p:sp>
         <p:nvSpPr>
@@ -19621,6 +20324,13 @@
           </a:solidFill>
           <a:ln/>
         </p:spPr>
+        <p:txBody>
+          <a:bodyPr/>
+          <a:lstStyle/>
+          <a:p>
+            <a:endParaRPr lang="en-US"/>
+          </a:p>
+        </p:txBody>
       </p:sp>
       <p:sp>
         <p:nvSpPr>
@@ -19641,17 +20351,24 @@
           </a:solidFill>
           <a:ln/>
         </p:spPr>
+        <p:txBody>
+          <a:bodyPr/>
+          <a:lstStyle/>
+          <a:p>
+            <a:endParaRPr lang="en-US"/>
+          </a:p>
+        </p:txBody>
       </p:sp>
       <p:pic>
         <p:nvPicPr>
-          <p:cNvPr id="5" name="Image 0" descr="preencoded.png">    </p:cNvPr>
+          <p:cNvPr id="5" name="Image 0" descr="preencoded.png"/>
           <p:cNvPicPr>
             <a:picLocks noChangeAspect="1"/>
           </p:cNvPicPr>
           <p:nvPr/>
         </p:nvPicPr>
         <p:blipFill>
-          <a:blip r:embed="rId1"/>
+          <a:blip r:embed="rId3"/>
           <a:stretch>
             <a:fillRect/>
           </a:stretch>
@@ -19687,11 +20404,11 @@
           <a:bodyPr wrap="square" lIns="0" tIns="0" rIns="0" bIns="0" rtlCol="0" anchor="ctr"/>
           <a:lstStyle/>
           <a:p>
-            <a:pPr indent="0" marL="0">
-              <a:buNone/>
-            </a:pPr>
-            <a:r>
-              <a:rPr lang="en-US" sz="1500" b="1" spc="200" kern="0" dirty="0">
+            <a:pPr marL="0" indent="0">
+              <a:buNone/>
+            </a:pPr>
+            <a:r>
+              <a:rPr lang="en-US" sz="1500" b="1" kern="0" spc="200" dirty="0">
                 <a:solidFill>
                   <a:srgbClr val="5FB3B3"/>
                 </a:solidFill>
@@ -19726,7 +20443,7 @@
           <a:bodyPr wrap="square" lIns="0" tIns="0" rIns="0" bIns="0" rtlCol="0" anchor="ctr"/>
           <a:lstStyle/>
           <a:p>
-            <a:pPr indent="0" marL="0">
+            <a:pPr marL="0" indent="0">
               <a:lnSpc>
                 <a:spcPct val="100000"/>
               </a:lnSpc>
@@ -19768,7 +20485,7 @@
           <a:bodyPr wrap="square" lIns="0" tIns="0" rIns="0" bIns="0" rtlCol="0" anchor="ctr"/>
           <a:lstStyle/>
           <a:p>
-            <a:pPr indent="0" marL="0">
+            <a:pPr marL="0" indent="0">
               <a:lnSpc>
                 <a:spcPct val="115000"/>
               </a:lnSpc>
@@ -19810,7 +20527,7 @@
           <a:bodyPr wrap="square" lIns="0" tIns="0" rIns="0" bIns="0" rtlCol="0" anchor="ctr"/>
           <a:lstStyle/>
           <a:p>
-            <a:pPr algn="l" indent="0" marL="0">
+            <a:pPr marL="0" indent="0" algn="l">
               <a:buNone/>
             </a:pPr>
             <a:r>
@@ -19849,7 +20566,7 @@
           <a:bodyPr wrap="square" lIns="0" tIns="0" rIns="0" bIns="0" rtlCol="0" anchor="ctr"/>
           <a:lstStyle/>
           <a:p>
-            <a:pPr algn="r" indent="0" marL="0">
+            <a:pPr marL="0" indent="0" algn="r">
               <a:buNone/>
             </a:pPr>
             <a:r>
@@ -19883,6 +20600,7 @@
         <a:solidFill>
           <a:srgbClr val="F5F7FA"/>
         </a:solidFill>
+        <a:effectLst/>
       </p:bgPr>
     </p:bg>
     <p:spTree>
@@ -19918,6 +20636,13 @@
           </a:solidFill>
           <a:ln/>
         </p:spPr>
+        <p:txBody>
+          <a:bodyPr/>
+          <a:lstStyle/>
+          <a:p>
+            <a:endParaRPr lang="en-US"/>
+          </a:p>
+        </p:txBody>
       </p:sp>
       <p:sp>
         <p:nvSpPr>
@@ -19940,11 +20665,11 @@
           <a:bodyPr wrap="square" lIns="0" tIns="0" rIns="0" bIns="0" rtlCol="0" anchor="ctr"/>
           <a:lstStyle/>
           <a:p>
-            <a:pPr indent="0" marL="0">
-              <a:buNone/>
-            </a:pPr>
-            <a:r>
-              <a:rPr lang="en-US" sz="1200" b="1" spc="200" kern="0" dirty="0">
+            <a:pPr marL="0" indent="0">
+              <a:buNone/>
+            </a:pPr>
+            <a:r>
+              <a:rPr lang="en-US" sz="1200" b="1" kern="0" spc="200" dirty="0">
                 <a:solidFill>
                   <a:srgbClr val="2C8C8C"/>
                 </a:solidFill>
@@ -19979,7 +20704,7 @@
           <a:bodyPr wrap="square" lIns="0" tIns="0" rIns="0" bIns="0" rtlCol="0" anchor="ctr"/>
           <a:lstStyle/>
           <a:p>
-            <a:pPr indent="0" marL="0">
+            <a:pPr marL="0" indent="0">
               <a:buNone/>
             </a:pPr>
             <a:r>
@@ -20018,13 +20743,20 @@
           </a:solidFill>
           <a:ln/>
           <a:effectLst>
-            <a:outerShdw sx="100000" sy="100000" kx="0" ky="0" algn="bl" rotWithShape="0" blurRad="88900" dist="38100" dir="8100000">
+            <a:outerShdw blurRad="88900" dist="38100" dir="8100000" algn="bl" rotWithShape="0">
               <a:srgbClr val="000000">
                 <a:alpha val="16000"/>
               </a:srgbClr>
             </a:outerShdw>
           </a:effectLst>
         </p:spPr>
+        <p:txBody>
+          <a:bodyPr/>
+          <a:lstStyle/>
+          <a:p>
+            <a:endParaRPr lang="en-US"/>
+          </a:p>
+        </p:txBody>
       </p:sp>
       <p:sp>
         <p:nvSpPr>
@@ -20047,11 +20779,11 @@
           <a:bodyPr wrap="square" lIns="0" tIns="0" rIns="0" bIns="0" rtlCol="0" anchor="ctr"/>
           <a:lstStyle/>
           <a:p>
-            <a:pPr indent="0" marL="0">
-              <a:buNone/>
-            </a:pPr>
-            <a:r>
-              <a:rPr lang="en-US" sz="1000" b="1" spc="150" kern="0" dirty="0">
+            <a:pPr marL="0" indent="0">
+              <a:buNone/>
+            </a:pPr>
+            <a:r>
+              <a:rPr lang="en-US" sz="1000" b="1" kern="0" spc="150" dirty="0">
                 <a:solidFill>
                   <a:srgbClr val="E8A33D"/>
                 </a:solidFill>
@@ -20086,7 +20818,7 @@
           <a:bodyPr wrap="square" lIns="0" tIns="0" rIns="0" bIns="0" rtlCol="0" anchor="t"/>
           <a:lstStyle/>
           <a:p>
-            <a:pPr indent="0" marL="0">
+            <a:pPr marL="0" indent="0">
               <a:lnSpc>
                 <a:spcPct val="108000"/>
               </a:lnSpc>
@@ -20107,7 +20839,7 @@
             <a:endParaRPr lang="en-US" sz="1250" dirty="0"/>
           </a:p>
           <a:p>
-            <a:pPr indent="0" marL="0">
+            <a:pPr marL="0" indent="0">
               <a:lnSpc>
                 <a:spcPct val="108000"/>
               </a:lnSpc>
@@ -20130,7 +20862,7 @@
             <a:endParaRPr lang="en-US" sz="1250" dirty="0"/>
           </a:p>
           <a:p>
-            <a:pPr indent="0" marL="0">
+            <a:pPr marL="0" indent="0">
               <a:lnSpc>
                 <a:spcPct val="108000"/>
               </a:lnSpc>
@@ -20154,7 +20886,7 @@
             <a:endParaRPr lang="en-US" sz="1250" dirty="0"/>
           </a:p>
           <a:p>
-            <a:pPr indent="0" marL="0">
+            <a:pPr marL="0" indent="0">
               <a:lnSpc>
                 <a:spcPct val="108000"/>
               </a:lnSpc>
@@ -20201,13 +20933,20 @@
             <a:prstDash val="solid"/>
           </a:ln>
           <a:effectLst>
-            <a:outerShdw sx="100000" sy="100000" kx="0" ky="0" algn="bl" rotWithShape="0" blurRad="88900" dist="38100" dir="8100000">
+            <a:outerShdw blurRad="88900" dist="38100" dir="8100000" algn="bl" rotWithShape="0">
               <a:srgbClr val="000000">
                 <a:alpha val="16000"/>
               </a:srgbClr>
             </a:outerShdw>
           </a:effectLst>
         </p:spPr>
+        <p:txBody>
+          <a:bodyPr/>
+          <a:lstStyle/>
+          <a:p>
+            <a:endParaRPr lang="en-US"/>
+          </a:p>
+        </p:txBody>
       </p:sp>
       <p:sp>
         <p:nvSpPr>
@@ -20230,11 +20969,11 @@
           <a:bodyPr wrap="square" lIns="0" tIns="0" rIns="0" bIns="0" rtlCol="0" anchor="ctr"/>
           <a:lstStyle/>
           <a:p>
-            <a:pPr indent="0" marL="0">
-              <a:buNone/>
-            </a:pPr>
-            <a:r>
-              <a:rPr lang="en-US" sz="1100" b="1" spc="150" kern="0" dirty="0">
+            <a:pPr marL="0" indent="0">
+              <a:buNone/>
+            </a:pPr>
+            <a:r>
+              <a:rPr lang="en-US" sz="1100" b="1" kern="0" spc="150" dirty="0">
                 <a:solidFill>
                   <a:srgbClr val="2C8C8C"/>
                 </a:solidFill>
@@ -20269,7 +21008,7 @@
           <a:bodyPr wrap="square" lIns="0" tIns="0" rIns="0" bIns="0" rtlCol="0" anchor="t"/>
           <a:lstStyle/>
           <a:p>
-            <a:pPr indent="0" marL="0">
+            <a:pPr marL="0" indent="0">
               <a:lnSpc>
                 <a:spcPct val="106000"/>
               </a:lnSpc>
@@ -20290,7 +21029,7 @@
             <a:endParaRPr lang="en-US" sz="1300" dirty="0"/>
           </a:p>
           <a:p>
-            <a:pPr indent="0" marL="0">
+            <a:pPr marL="0" indent="0">
               <a:lnSpc>
                 <a:spcPct val="106000"/>
               </a:lnSpc>
@@ -20311,7 +21050,7 @@
             <a:endParaRPr lang="en-US" sz="1300" dirty="0"/>
           </a:p>
           <a:p>
-            <a:pPr indent="0" marL="0">
+            <a:pPr marL="0" indent="0">
               <a:lnSpc>
                 <a:spcPct val="106000"/>
               </a:lnSpc>
@@ -20332,7 +21071,7 @@
             <a:endParaRPr lang="en-US" sz="1300" dirty="0"/>
           </a:p>
           <a:p>
-            <a:pPr indent="0" marL="0">
+            <a:pPr marL="0" indent="0">
               <a:lnSpc>
                 <a:spcPct val="106000"/>
               </a:lnSpc>
@@ -20353,7 +21092,7 @@
             <a:endParaRPr lang="en-US" sz="1300" dirty="0"/>
           </a:p>
           <a:p>
-            <a:pPr indent="0" marL="0">
+            <a:pPr marL="0" indent="0">
               <a:lnSpc>
                 <a:spcPct val="106000"/>
               </a:lnSpc>
@@ -20374,7 +21113,7 @@
             <a:endParaRPr lang="en-US" sz="1300" dirty="0"/>
           </a:p>
           <a:p>
-            <a:pPr indent="0" marL="0">
+            <a:pPr marL="0" indent="0">
               <a:lnSpc>
                 <a:spcPct val="106000"/>
               </a:lnSpc>
@@ -20395,7 +21134,7 @@
             <a:endParaRPr lang="en-US" sz="1300" dirty="0"/>
           </a:p>
           <a:p>
-            <a:pPr indent="0" marL="0">
+            <a:pPr marL="0" indent="0">
               <a:lnSpc>
                 <a:spcPct val="106000"/>
               </a:lnSpc>
@@ -20437,7 +21176,7 @@
           <a:bodyPr wrap="square" lIns="0" tIns="0" rIns="0" bIns="0" rtlCol="0" anchor="ctr"/>
           <a:lstStyle/>
           <a:p>
-            <a:pPr algn="l" indent="0" marL="0">
+            <a:pPr marL="0" indent="0" algn="l">
               <a:buNone/>
             </a:pPr>
             <a:r>
@@ -20476,7 +21215,7 @@
           <a:bodyPr wrap="square" lIns="0" tIns="0" rIns="0" bIns="0" rtlCol="0" anchor="ctr"/>
           <a:lstStyle/>
           <a:p>
-            <a:pPr algn="r" indent="0" marL="0">
+            <a:pPr marL="0" indent="0" algn="r">
               <a:buNone/>
             </a:pPr>
             <a:r>
@@ -20510,6 +21249,7 @@
         <a:solidFill>
           <a:srgbClr val="F5F7FA"/>
         </a:solidFill>
+        <a:effectLst/>
       </p:bgPr>
     </p:bg>
     <p:spTree>
@@ -20545,6 +21285,13 @@
           </a:solidFill>
           <a:ln/>
         </p:spPr>
+        <p:txBody>
+          <a:bodyPr/>
+          <a:lstStyle/>
+          <a:p>
+            <a:endParaRPr lang="en-US"/>
+          </a:p>
+        </p:txBody>
       </p:sp>
       <p:sp>
         <p:nvSpPr>
@@ -20567,11 +21314,11 @@
           <a:bodyPr wrap="square" lIns="0" tIns="0" rIns="0" bIns="0" rtlCol="0" anchor="ctr"/>
           <a:lstStyle/>
           <a:p>
-            <a:pPr indent="0" marL="0">
-              <a:buNone/>
-            </a:pPr>
-            <a:r>
-              <a:rPr lang="en-US" sz="1200" b="1" spc="200" kern="0" dirty="0">
+            <a:pPr marL="0" indent="0">
+              <a:buNone/>
+            </a:pPr>
+            <a:r>
+              <a:rPr lang="en-US" sz="1200" b="1" kern="0" spc="200" dirty="0">
                 <a:solidFill>
                   <a:srgbClr val="2C8C8C"/>
                 </a:solidFill>
@@ -20606,7 +21353,7 @@
           <a:bodyPr wrap="square" lIns="0" tIns="0" rIns="0" bIns="0" rtlCol="0" anchor="ctr"/>
           <a:lstStyle/>
           <a:p>
-            <a:pPr indent="0" marL="0">
+            <a:pPr marL="0" indent="0">
               <a:buNone/>
             </a:pPr>
             <a:r>
@@ -20650,13 +21397,20 @@
             <a:prstDash val="solid"/>
           </a:ln>
           <a:effectLst>
-            <a:outerShdw sx="100000" sy="100000" kx="0" ky="0" algn="bl" rotWithShape="0" blurRad="88900" dist="38100" dir="8100000">
+            <a:outerShdw blurRad="88900" dist="38100" dir="8100000" algn="bl" rotWithShape="0">
               <a:srgbClr val="000000">
                 <a:alpha val="16000"/>
               </a:srgbClr>
             </a:outerShdw>
           </a:effectLst>
         </p:spPr>
+        <p:txBody>
+          <a:bodyPr/>
+          <a:lstStyle/>
+          <a:p>
+            <a:endParaRPr lang="en-US"/>
+          </a:p>
+        </p:txBody>
       </p:sp>
       <p:sp>
         <p:nvSpPr>
@@ -20679,7 +21433,7 @@
           <a:bodyPr wrap="square" lIns="0" tIns="0" rIns="0" bIns="0" rtlCol="0" anchor="ctr"/>
           <a:lstStyle/>
           <a:p>
-            <a:pPr indent="0" marL="0">
+            <a:pPr marL="0" indent="0">
               <a:buNone/>
             </a:pPr>
             <a:r>
@@ -20718,13 +21472,20 @@
           </a:solidFill>
           <a:ln/>
           <a:effectLst>
-            <a:outerShdw sx="100000" sy="100000" kx="0" ky="0" algn="bl" rotWithShape="0" blurRad="88900" dist="38100" dir="8100000">
+            <a:outerShdw blurRad="88900" dist="38100" dir="8100000" algn="bl" rotWithShape="0">
               <a:srgbClr val="000000">
                 <a:alpha val="16000"/>
               </a:srgbClr>
             </a:outerShdw>
           </a:effectLst>
         </p:spPr>
+        <p:txBody>
+          <a:bodyPr/>
+          <a:lstStyle/>
+          <a:p>
+            <a:endParaRPr lang="en-US"/>
+          </a:p>
+        </p:txBody>
       </p:sp>
       <p:sp>
         <p:nvSpPr>
@@ -20747,11 +21508,11 @@
           <a:bodyPr wrap="square" lIns="0" tIns="0" rIns="0" bIns="0" rtlCol="0" anchor="ctr"/>
           <a:lstStyle/>
           <a:p>
-            <a:pPr indent="0" marL="0">
-              <a:buNone/>
-            </a:pPr>
-            <a:r>
-              <a:rPr lang="en-US" sz="1000" b="1" spc="150" kern="0" dirty="0">
+            <a:pPr marL="0" indent="0">
+              <a:buNone/>
+            </a:pPr>
+            <a:r>
+              <a:rPr lang="en-US" sz="1000" b="1" kern="0" spc="150" dirty="0">
                 <a:solidFill>
                   <a:srgbClr val="E8A33D"/>
                 </a:solidFill>
@@ -20786,7 +21547,7 @@
           <a:bodyPr wrap="square" lIns="0" tIns="0" rIns="0" bIns="0" rtlCol="0" anchor="t"/>
           <a:lstStyle/>
           <a:p>
-            <a:pPr indent="0" marL="0">
+            <a:pPr marL="0" indent="0">
               <a:lnSpc>
                 <a:spcPct val="108000"/>
               </a:lnSpc>
@@ -20806,7 +21567,7 @@
             <a:endParaRPr lang="en-US" sz="1250" dirty="0"/>
           </a:p>
           <a:p>
-            <a:pPr indent="0" marL="0">
+            <a:pPr marL="0" indent="0">
               <a:lnSpc>
                 <a:spcPct val="108000"/>
               </a:lnSpc>
@@ -20826,7 +21587,7 @@
             <a:endParaRPr lang="en-US" sz="1250" dirty="0"/>
           </a:p>
           <a:p>
-            <a:pPr indent="0" marL="0">
+            <a:pPr marL="0" indent="0">
               <a:lnSpc>
                 <a:spcPct val="108000"/>
               </a:lnSpc>
@@ -20846,7 +21607,7 @@
             <a:endParaRPr lang="en-US" sz="1250" dirty="0"/>
           </a:p>
           <a:p>
-            <a:pPr indent="0" marL="0">
+            <a:pPr marL="0" indent="0">
               <a:lnSpc>
                 <a:spcPct val="108000"/>
               </a:lnSpc>
@@ -20855,7 +21616,7 @@
             <a:endParaRPr lang="en-US" sz="1250" dirty="0"/>
           </a:p>
           <a:p>
-            <a:pPr indent="0" marL="0">
+            <a:pPr marL="0" indent="0">
               <a:lnSpc>
                 <a:spcPct val="108000"/>
               </a:lnSpc>
@@ -20897,7 +21658,7 @@
           <a:bodyPr wrap="square" lIns="0" tIns="0" rIns="0" bIns="0" rtlCol="0" anchor="t"/>
           <a:lstStyle/>
           <a:p>
-            <a:pPr indent="0" marL="0">
+            <a:pPr marL="0" indent="0">
               <a:lnSpc>
                 <a:spcPct val="112000"/>
               </a:lnSpc>
@@ -20914,12 +21675,6 @@
               </a:rPr>
               <a:t>Also try: </a:t>
             </a:r>
-            <a:pPr indent="0" marL="0">
-              <a:lnSpc>
-                <a:spcPct val="112000"/>
-              </a:lnSpc>
-              <a:buNone/>
-            </a:pPr>
             <a:r>
               <a:rPr lang="en-US" sz="1350" dirty="0">
                 <a:solidFill>
@@ -20961,13 +21716,20 @@
             <a:prstDash val="solid"/>
           </a:ln>
           <a:effectLst>
-            <a:outerShdw sx="100000" sy="100000" kx="0" ky="0" algn="bl" rotWithShape="0" blurRad="88900" dist="38100" dir="8100000">
+            <a:outerShdw blurRad="88900" dist="38100" dir="8100000" algn="bl" rotWithShape="0">
               <a:srgbClr val="000000">
                 <a:alpha val="16000"/>
               </a:srgbClr>
             </a:outerShdw>
           </a:effectLst>
         </p:spPr>
+        <p:txBody>
+          <a:bodyPr/>
+          <a:lstStyle/>
+          <a:p>
+            <a:endParaRPr lang="en-US"/>
+          </a:p>
+        </p:txBody>
       </p:sp>
       <p:sp>
         <p:nvSpPr>
@@ -20990,7 +21752,7 @@
           <a:bodyPr wrap="square" lIns="0" tIns="0" rIns="0" bIns="0" rtlCol="0" anchor="ctr"/>
           <a:lstStyle/>
           <a:p>
-            <a:pPr indent="0" marL="0">
+            <a:pPr marL="0" indent="0">
               <a:buNone/>
             </a:pPr>
             <a:r>
@@ -21029,13 +21791,20 @@
           </a:solidFill>
           <a:ln/>
           <a:effectLst>
-            <a:outerShdw sx="100000" sy="100000" kx="0" ky="0" algn="bl" rotWithShape="0" blurRad="88900" dist="38100" dir="8100000">
+            <a:outerShdw blurRad="88900" dist="38100" dir="8100000" algn="bl" rotWithShape="0">
               <a:srgbClr val="000000">
                 <a:alpha val="16000"/>
               </a:srgbClr>
             </a:outerShdw>
           </a:effectLst>
         </p:spPr>
+        <p:txBody>
+          <a:bodyPr/>
+          <a:lstStyle/>
+          <a:p>
+            <a:endParaRPr lang="en-US"/>
+          </a:p>
+        </p:txBody>
       </p:sp>
       <p:sp>
         <p:nvSpPr>
@@ -21058,11 +21827,11 @@
           <a:bodyPr wrap="square" lIns="0" tIns="0" rIns="0" bIns="0" rtlCol="0" anchor="ctr"/>
           <a:lstStyle/>
           <a:p>
-            <a:pPr indent="0" marL="0">
-              <a:buNone/>
-            </a:pPr>
-            <a:r>
-              <a:rPr lang="en-US" sz="1000" b="1" spc="150" kern="0" dirty="0">
+            <a:pPr marL="0" indent="0">
+              <a:buNone/>
+            </a:pPr>
+            <a:r>
+              <a:rPr lang="en-US" sz="1000" b="1" kern="0" spc="150" dirty="0">
                 <a:solidFill>
                   <a:srgbClr val="E8A33D"/>
                 </a:solidFill>
@@ -21097,7 +21866,7 @@
           <a:bodyPr wrap="square" lIns="0" tIns="0" rIns="0" bIns="0" rtlCol="0" anchor="t"/>
           <a:lstStyle/>
           <a:p>
-            <a:pPr indent="0" marL="0">
+            <a:pPr marL="0" indent="0">
               <a:lnSpc>
                 <a:spcPct val="108000"/>
               </a:lnSpc>
@@ -21117,7 +21886,7 @@
             <a:endParaRPr lang="en-US" sz="1250" dirty="0"/>
           </a:p>
           <a:p>
-            <a:pPr indent="0" marL="0">
+            <a:pPr marL="0" indent="0">
               <a:lnSpc>
                 <a:spcPct val="108000"/>
               </a:lnSpc>
@@ -21137,7 +21906,7 @@
             <a:endParaRPr lang="en-US" sz="1250" dirty="0"/>
           </a:p>
           <a:p>
-            <a:pPr indent="0" marL="0">
+            <a:pPr marL="0" indent="0">
               <a:lnSpc>
                 <a:spcPct val="108000"/>
               </a:lnSpc>
@@ -21157,7 +21926,7 @@
             <a:endParaRPr lang="en-US" sz="1250" dirty="0"/>
           </a:p>
           <a:p>
-            <a:pPr indent="0" marL="0">
+            <a:pPr marL="0" indent="0">
               <a:lnSpc>
                 <a:spcPct val="108000"/>
               </a:lnSpc>
@@ -21177,7 +21946,7 @@
             <a:endParaRPr lang="en-US" sz="1250" dirty="0"/>
           </a:p>
           <a:p>
-            <a:pPr indent="0" marL="0">
+            <a:pPr marL="0" indent="0">
               <a:lnSpc>
                 <a:spcPct val="108000"/>
               </a:lnSpc>
@@ -21186,7 +21955,7 @@
             <a:endParaRPr lang="en-US" sz="1250" dirty="0"/>
           </a:p>
           <a:p>
-            <a:pPr indent="0" marL="0">
+            <a:pPr marL="0" indent="0">
               <a:lnSpc>
                 <a:spcPct val="108000"/>
               </a:lnSpc>
@@ -21206,7 +21975,7 @@
             <a:endParaRPr lang="en-US" sz="1250" dirty="0"/>
           </a:p>
           <a:p>
-            <a:pPr indent="0" marL="0">
+            <a:pPr marL="0" indent="0">
               <a:lnSpc>
                 <a:spcPct val="108000"/>
               </a:lnSpc>
@@ -21215,7 +21984,7 @@
             <a:endParaRPr lang="en-US" sz="1250" dirty="0"/>
           </a:p>
           <a:p>
-            <a:pPr indent="0" marL="0">
+            <a:pPr marL="0" indent="0">
               <a:lnSpc>
                 <a:spcPct val="108000"/>
               </a:lnSpc>
@@ -21257,7 +22026,7 @@
           <a:bodyPr wrap="square" lIns="0" tIns="0" rIns="0" bIns="0" rtlCol="0" anchor="t"/>
           <a:lstStyle/>
           <a:p>
-            <a:pPr indent="0" marL="0">
+            <a:pPr marL="0" indent="0">
               <a:lnSpc>
                 <a:spcPct val="112000"/>
               </a:lnSpc>
@@ -21274,12 +22043,6 @@
               </a:rPr>
               <a:t>You give the gist in bullets; </a:t>
             </a:r>
-            <a:pPr indent="0" marL="0">
-              <a:lnSpc>
-                <a:spcPct val="112000"/>
-              </a:lnSpc>
-              <a:buNone/>
-            </a:pPr>
             <a:r>
               <a:rPr lang="en-US" sz="1350" b="1" dirty="0">
                 <a:solidFill>
@@ -21316,7 +22079,7 @@
           <a:bodyPr wrap="square" lIns="0" tIns="0" rIns="0" bIns="0" rtlCol="0" anchor="ctr"/>
           <a:lstStyle/>
           <a:p>
-            <a:pPr algn="l" indent="0" marL="0">
+            <a:pPr marL="0" indent="0" algn="l">
               <a:buNone/>
             </a:pPr>
             <a:r>
@@ -21355,7 +22118,7 @@
           <a:bodyPr wrap="square" lIns="0" tIns="0" rIns="0" bIns="0" rtlCol="0" anchor="ctr"/>
           <a:lstStyle/>
           <a:p>
-            <a:pPr algn="r" indent="0" marL="0">
+            <a:pPr marL="0" indent="0" algn="r">
               <a:buNone/>
             </a:pPr>
             <a:r>
@@ -21674,4 +22437,319 @@
     </a:ext>
   </a:extLst>
 </a:theme>
+</file>
+
+<file path=ppt/theme/theme2.xml><?xml version="1.0" encoding="utf-8"?>
+<a:theme xmlns:a="http://schemas.openxmlformats.org/drawingml/2006/main" name="Office Theme">
+  <a:themeElements>
+    <a:clrScheme name="Office">
+      <a:dk1>
+        <a:sysClr val="windowText" lastClr="000000"/>
+      </a:dk1>
+      <a:lt1>
+        <a:sysClr val="window" lastClr="FFFFFF"/>
+      </a:lt1>
+      <a:dk2>
+        <a:srgbClr val="0E2841"/>
+      </a:dk2>
+      <a:lt2>
+        <a:srgbClr val="E8E8E8"/>
+      </a:lt2>
+      <a:accent1>
+        <a:srgbClr val="156082"/>
+      </a:accent1>
+      <a:accent2>
+        <a:srgbClr val="E97132"/>
+      </a:accent2>
+      <a:accent3>
+        <a:srgbClr val="196B24"/>
+      </a:accent3>
+      <a:accent4>
+        <a:srgbClr val="0F9ED5"/>
+      </a:accent4>
+      <a:accent5>
+        <a:srgbClr val="A02B93"/>
+      </a:accent5>
+      <a:accent6>
+        <a:srgbClr val="4EA72E"/>
+      </a:accent6>
+      <a:hlink>
+        <a:srgbClr val="467886"/>
+      </a:hlink>
+      <a:folHlink>
+        <a:srgbClr val="96607D"/>
+      </a:folHlink>
+    </a:clrScheme>
+    <a:fontScheme name="Office">
+      <a:majorFont>
+        <a:latin typeface="Aptos Display" panose="02110004020202020204"/>
+        <a:ea typeface=""/>
+        <a:cs typeface=""/>
+        <a:font script="Jpan" typeface="游ゴシック Light"/>
+        <a:font script="Hang" typeface="맑은 고딕"/>
+        <a:font script="Hans" typeface="等线 Light"/>
+        <a:font script="Hant" typeface="新細明體"/>
+        <a:font script="Arab" typeface="Times New Roman"/>
+        <a:font script="Hebr" typeface="Times New Roman"/>
+        <a:font script="Thai" typeface="Angsana New"/>
+        <a:font script="Ethi" typeface="Nyala"/>
+        <a:font script="Beng" typeface="Vrinda"/>
+        <a:font script="Gujr" typeface="Shruti"/>
+        <a:font script="Khmr" typeface="MoolBoran"/>
+        <a:font script="Knda" typeface="Tunga"/>
+        <a:font script="Guru" typeface="Raavi"/>
+        <a:font script="Cans" typeface="Euphemia"/>
+        <a:font script="Cher" typeface="Plantagenet Cherokee"/>
+        <a:font script="Yiii" typeface="Microsoft Yi Baiti"/>
+        <a:font script="Tibt" typeface="Microsoft Himalaya"/>
+        <a:font script="Thaa" typeface="MV Boli"/>
+        <a:font script="Deva" typeface="Mangal"/>
+        <a:font script="Telu" typeface="Gautami"/>
+        <a:font script="Taml" typeface="Latha"/>
+        <a:font script="Syrc" typeface="Estrangelo Edessa"/>
+        <a:font script="Orya" typeface="Kalinga"/>
+        <a:font script="Mlym" typeface="Kartika"/>
+        <a:font script="Laoo" typeface="DokChampa"/>
+        <a:font script="Sinh" typeface="Iskoola Pota"/>
+        <a:font script="Mong" typeface="Mongolian Baiti"/>
+        <a:font script="Viet" typeface="Times New Roman"/>
+        <a:font script="Uigh" typeface="Microsoft Uighur"/>
+        <a:font script="Geor" typeface="Sylfaen"/>
+        <a:font script="Armn" typeface="Arial"/>
+        <a:font script="Bugi" typeface="Leelawadee UI"/>
+        <a:font script="Bopo" typeface="Microsoft JhengHei"/>
+        <a:font script="Java" typeface="Javanese Text"/>
+        <a:font script="Lisu" typeface="Segoe UI"/>
+        <a:font script="Mymr" typeface="Myanmar Text"/>
+        <a:font script="Nkoo" typeface="Ebrima"/>
+        <a:font script="Olck" typeface="Nirmala UI"/>
+        <a:font script="Osma" typeface="Ebrima"/>
+        <a:font script="Phag" typeface="Phagspa"/>
+        <a:font script="Syrn" typeface="Estrangelo Edessa"/>
+        <a:font script="Syrj" typeface="Estrangelo Edessa"/>
+        <a:font script="Syre" typeface="Estrangelo Edessa"/>
+        <a:font script="Sora" typeface="Nirmala UI"/>
+        <a:font script="Tale" typeface="Microsoft Tai Le"/>
+        <a:font script="Talu" typeface="Microsoft New Tai Lue"/>
+        <a:font script="Tfng" typeface="Ebrima"/>
+      </a:majorFont>
+      <a:minorFont>
+        <a:latin typeface="Aptos" panose="02110004020202020204"/>
+        <a:ea typeface=""/>
+        <a:cs typeface=""/>
+        <a:font script="Jpan" typeface="游ゴシック"/>
+        <a:font script="Hang" typeface="맑은 고딕"/>
+        <a:font script="Hans" typeface="等线"/>
+        <a:font script="Hant" typeface="新細明體"/>
+        <a:font script="Arab" typeface="Arial"/>
+        <a:font script="Hebr" typeface="Arial"/>
+        <a:font script="Thai" typeface="Cordia New"/>
+        <a:font script="Ethi" typeface="Nyala"/>
+        <a:font script="Beng" typeface="Vrinda"/>
+        <a:font script="Gujr" typeface="Shruti"/>
+        <a:font script="Khmr" typeface="DaunPenh"/>
+        <a:font script="Knda" typeface="Tunga"/>
+        <a:font script="Guru" typeface="Raavi"/>
+        <a:font script="Cans" typeface="Euphemia"/>
+        <a:font script="Cher" typeface="Plantagenet Cherokee"/>
+        <a:font script="Yiii" typeface="Microsoft Yi Baiti"/>
+        <a:font script="Tibt" typeface="Microsoft Himalaya"/>
+        <a:font script="Thaa" typeface="MV Boli"/>
+        <a:font script="Deva" typeface="Mangal"/>
+        <a:font script="Telu" typeface="Gautami"/>
+        <a:font script="Taml" typeface="Latha"/>
+        <a:font script="Syrc" typeface="Estrangelo Edessa"/>
+        <a:font script="Orya" typeface="Kalinga"/>
+        <a:font script="Mlym" typeface="Kartika"/>
+        <a:font script="Laoo" typeface="DokChampa"/>
+        <a:font script="Sinh" typeface="Iskoola Pota"/>
+        <a:font script="Mong" typeface="Mongolian Baiti"/>
+        <a:font script="Viet" typeface="Arial"/>
+        <a:font script="Uigh" typeface="Microsoft Uighur"/>
+        <a:font script="Geor" typeface="Sylfaen"/>
+        <a:font script="Armn" typeface="Arial"/>
+        <a:font script="Bugi" typeface="Leelawadee UI"/>
+        <a:font script="Bopo" typeface="Microsoft JhengHei"/>
+        <a:font script="Java" typeface="Javanese Text"/>
+        <a:font script="Lisu" typeface="Segoe UI"/>
+        <a:font script="Mymr" typeface="Myanmar Text"/>
+        <a:font script="Nkoo" typeface="Ebrima"/>
+        <a:font script="Olck" typeface="Nirmala UI"/>
+        <a:font script="Osma" typeface="Ebrima"/>
+        <a:font script="Phag" typeface="Phagspa"/>
+        <a:font script="Syrn" typeface="Estrangelo Edessa"/>
+        <a:font script="Syrj" typeface="Estrangelo Edessa"/>
+        <a:font script="Syre" typeface="Estrangelo Edessa"/>
+        <a:font script="Sora" typeface="Nirmala UI"/>
+        <a:font script="Tale" typeface="Microsoft Tai Le"/>
+        <a:font script="Talu" typeface="Microsoft New Tai Lue"/>
+        <a:font script="Tfng" typeface="Ebrima"/>
+      </a:minorFont>
+    </a:fontScheme>
+    <a:fmtScheme name="Office">
+      <a:fillStyleLst>
+        <a:solidFill>
+          <a:schemeClr val="phClr"/>
+        </a:solidFill>
+        <a:gradFill rotWithShape="1">
+          <a:gsLst>
+            <a:gs pos="0">
+              <a:schemeClr val="phClr">
+                <a:lumMod val="110000"/>
+                <a:satMod val="105000"/>
+                <a:tint val="67000"/>
+              </a:schemeClr>
+            </a:gs>
+            <a:gs pos="50000">
+              <a:schemeClr val="phClr">
+                <a:lumMod val="105000"/>
+                <a:satMod val="103000"/>
+                <a:tint val="73000"/>
+              </a:schemeClr>
+            </a:gs>
+            <a:gs pos="100000">
+              <a:schemeClr val="phClr">
+                <a:lumMod val="105000"/>
+                <a:satMod val="109000"/>
+                <a:tint val="81000"/>
+              </a:schemeClr>
+            </a:gs>
+          </a:gsLst>
+          <a:lin ang="5400000" scaled="0"/>
+        </a:gradFill>
+        <a:gradFill rotWithShape="1">
+          <a:gsLst>
+            <a:gs pos="0">
+              <a:schemeClr val="phClr">
+                <a:satMod val="103000"/>
+                <a:lumMod val="102000"/>
+                <a:tint val="94000"/>
+              </a:schemeClr>
+            </a:gs>
+            <a:gs pos="50000">
+              <a:schemeClr val="phClr">
+                <a:satMod val="110000"/>
+                <a:lumMod val="100000"/>
+                <a:shade val="100000"/>
+              </a:schemeClr>
+            </a:gs>
+            <a:gs pos="100000">
+              <a:schemeClr val="phClr">
+                <a:lumMod val="99000"/>
+                <a:satMod val="120000"/>
+                <a:shade val="78000"/>
+              </a:schemeClr>
+            </a:gs>
+          </a:gsLst>
+          <a:lin ang="5400000" scaled="0"/>
+        </a:gradFill>
+      </a:fillStyleLst>
+      <a:lnStyleLst>
+        <a:ln w="12700" cap="flat" cmpd="sng" algn="ctr">
+          <a:solidFill>
+            <a:schemeClr val="phClr"/>
+          </a:solidFill>
+          <a:prstDash val="solid"/>
+          <a:miter lim="800000"/>
+        </a:ln>
+        <a:ln w="19050" cap="flat" cmpd="sng" algn="ctr">
+          <a:solidFill>
+            <a:schemeClr val="phClr"/>
+          </a:solidFill>
+          <a:prstDash val="solid"/>
+          <a:miter lim="800000"/>
+        </a:ln>
+        <a:ln w="25400" cap="flat" cmpd="sng" algn="ctr">
+          <a:solidFill>
+            <a:schemeClr val="phClr"/>
+          </a:solidFill>
+          <a:prstDash val="solid"/>
+          <a:miter lim="800000"/>
+        </a:ln>
+      </a:lnStyleLst>
+      <a:effectStyleLst>
+        <a:effectStyle>
+          <a:effectLst/>
+        </a:effectStyle>
+        <a:effectStyle>
+          <a:effectLst/>
+        </a:effectStyle>
+        <a:effectStyle>
+          <a:effectLst>
+            <a:outerShdw blurRad="57150" dist="19050" dir="5400000" algn="ctr" rotWithShape="0">
+              <a:srgbClr val="000000">
+                <a:alpha val="63000"/>
+              </a:srgbClr>
+            </a:outerShdw>
+          </a:effectLst>
+        </a:effectStyle>
+      </a:effectStyleLst>
+      <a:bgFillStyleLst>
+        <a:solidFill>
+          <a:schemeClr val="phClr"/>
+        </a:solidFill>
+        <a:solidFill>
+          <a:schemeClr val="phClr">
+            <a:tint val="95000"/>
+            <a:satMod val="170000"/>
+          </a:schemeClr>
+        </a:solidFill>
+        <a:gradFill rotWithShape="1">
+          <a:gsLst>
+            <a:gs pos="0">
+              <a:schemeClr val="phClr">
+                <a:tint val="93000"/>
+                <a:satMod val="150000"/>
+                <a:shade val="98000"/>
+                <a:lumMod val="102000"/>
+              </a:schemeClr>
+            </a:gs>
+            <a:gs pos="50000">
+              <a:schemeClr val="phClr">
+                <a:tint val="98000"/>
+                <a:satMod val="130000"/>
+                <a:shade val="90000"/>
+                <a:lumMod val="103000"/>
+              </a:schemeClr>
+            </a:gs>
+            <a:gs pos="100000">
+              <a:schemeClr val="phClr">
+                <a:shade val="63000"/>
+                <a:satMod val="120000"/>
+              </a:schemeClr>
+            </a:gs>
+          </a:gsLst>
+          <a:lin ang="5400000" scaled="0"/>
+        </a:gradFill>
+      </a:bgFillStyleLst>
+    </a:fmtScheme>
+  </a:themeElements>
+  <a:objectDefaults>
+    <a:lnDef>
+      <a:spPr/>
+      <a:bodyPr/>
+      <a:lstStyle/>
+      <a:style>
+        <a:lnRef idx="2">
+          <a:schemeClr val="accent1"/>
+        </a:lnRef>
+        <a:fillRef idx="0">
+          <a:schemeClr val="accent1"/>
+        </a:fillRef>
+        <a:effectRef idx="1">
+          <a:schemeClr val="accent1"/>
+        </a:effectRef>
+        <a:fontRef idx="minor">
+          <a:schemeClr val="tx1"/>
+        </a:fontRef>
+      </a:style>
+    </a:lnDef>
+  </a:objectDefaults>
+  <a:extraClrSchemeLst/>
+  <a:extLst>
+    <a:ext uri="{05A4C25C-085E-4340-85A3-A5531E510DB2}">
+      <thm15:themeFamily xmlns:thm15="http://schemas.microsoft.com/office/thememl/2012/main" name="Office Theme" id="{2E142A2C-CD16-42D6-873A-C26D2A0506FA}" vid="{1BDDFF52-6CD6-40A5-AB3C-68EB2F1E4D0A}"/>
+    </a:ext>
+  </a:extLst>
+</a:theme>
 </file>